--- a/docs/Parish-Members-Registry-Council-Presentation.pptx
+++ b/docs/Parish-Members-Registry-Council-Presentation.pptx
@@ -4,16 +4,16 @@
   <p:sldMasterIdLst>
     <p:sldMasterId id="2147483648" r:id="rId1"/>
   </p:sldMasterIdLst>
+  <p:notesMasterIdLst>
+    <p:notesMasterId r:id="rId7"/>
+  </p:notesMasterIdLst>
   <p:sldIdLst>
     <p:sldId id="256" r:id="rId2"/>
     <p:sldId id="257" r:id="rId3"/>
-    <p:sldId id="258" r:id="rId4"/>
-    <p:sldId id="259" r:id="rId5"/>
+    <p:sldId id="259" r:id="rId4"/>
+    <p:sldId id="258" r:id="rId5"/>
     <p:sldId id="260" r:id="rId6"/>
   </p:sldIdLst>
-  <p:notesMasterIdLst>
-    <p:notesMasterId r:id="rId7"/>
-  </p:notesMasterIdLst>
   <p:sldSz cx="12192000" cy="6858000"/>
   <p:notesSz cx="6858000" cy="12192000"/>
   <p:defaultTextStyle>
@@ -111,23 +111,23 @@
   <p:extLst>
     <p:ext uri="{521415D9-36F7-43E2-AB2F-B90AF26B5E84}">
       <p14:sectionLst xmlns:p14="http://schemas.microsoft.com/office/powerpoint/2010/main">
-        <p14:section name="Introduction" id="{838434b7-0c50-f59a-868b-4af8e15b1384}">
+        <p14:section name="Introduction" id="{838434B7-0C50-F59A-868B-4AF8E15B1384}">
           <p14:sldIdLst>
             <p14:sldId id="256"/>
           </p14:sldIdLst>
         </p14:section>
-        <p14:section name="Benefits" id="{ca92fef2-3a6a-0a84-f9c0-a9c947b949f2}">
+        <p14:section name="Benefits" id="{CA92FEF2-3A6A-0A84-F9C0-A9C947B949F2}">
           <p14:sldIdLst>
             <p14:sldId id="257"/>
           </p14:sldIdLst>
         </p14:section>
-        <p14:section name="How it works" id="{cd517f44-4e32-3e13-1072-b36ea9c3cbc4}">
+        <p14:section name="How it works" id="{CD517F44-4E32-3E13-1072-B36EA9C3CBC4}">
           <p14:sldIdLst>
+            <p14:sldId id="259"/>
             <p14:sldId id="258"/>
-            <p14:sldId id="259"/>
           </p14:sldIdLst>
         </p14:section>
-        <p14:section name="Hosting" id="{b1159558-f6b5-d362-1c2a-24beff608633}">
+        <p14:section name="Hosting" id="{B1159558-F6B5-D362-1C2A-24BEFF608633}">
           <p14:sldIdLst>
             <p14:sldId id="260"/>
           </p14:sldIdLst>
@@ -163,234 +163,10 @@
           <a:chExt cx="0" cy="0"/>
         </a:xfrm>
       </p:grpSpPr>
-      <p:sp>
-        <p:nvSpPr>
-          <p:cNvPr id="2" name="Header Placeholder 1"/>
-          <p:cNvSpPr>
-            <a:spLocks noGrp="1"/>
-          </p:cNvSpPr>
-          <p:nvPr>
-            <p:ph type="hdr" sz="quarter"/>
-          </p:nvPr>
-        </p:nvSpPr>
-        <p:spPr>
-          <a:xfrm>
-            <a:off x="0" y="0"/>
-            <a:ext cx="2971800" cy="458788"/>
-          </a:xfrm>
-          <a:prstGeom prst="rect">
-            <a:avLst/>
-          </a:prstGeom>
-        </p:spPr>
-        <p:txBody>
-          <a:bodyPr vert="horz" lIns="91440" tIns="45720" rIns="91440" bIns="45720" rtlCol="0"/>
-          <a:lstStyle>
-            <a:lvl1pPr algn="l">
-              <a:defRPr sz="1200"/>
-            </a:lvl1pPr>
-          </a:lstStyle>
-          <a:p>
-            <a:endParaRPr lang="en-US"/>
-          </a:p>
-        </p:txBody>
-      </p:sp>
-      <p:sp>
-        <p:nvSpPr>
-          <p:cNvPr id="3" name="Date Placeholder 2"/>
-          <p:cNvSpPr>
-            <a:spLocks noGrp="1"/>
-          </p:cNvSpPr>
-          <p:nvPr>
-            <p:ph type="dt" idx="1"/>
-          </p:nvPr>
-        </p:nvSpPr>
-        <p:spPr>
-          <a:xfrm>
-            <a:off x="3884613" y="0"/>
-            <a:ext cx="2971800" cy="458788"/>
-          </a:xfrm>
-          <a:prstGeom prst="rect">
-            <a:avLst/>
-          </a:prstGeom>
-        </p:spPr>
-        <p:txBody>
-          <a:bodyPr vert="horz" lIns="91440" tIns="45720" rIns="91440" bIns="45720" rtlCol="0"/>
-          <a:lstStyle>
-            <a:lvl1pPr algn="r">
-              <a:defRPr sz="1200"/>
-            </a:lvl1pPr>
-          </a:lstStyle>
-          <a:p>
-            <a:fld id="{5282F153-3F37-0F45-9E97-73ACFA13230C}" type="datetimeFigureOut">
-              <a:rPr lang="en-US"/>
-              <a:t>7/23/19</a:t>
-            </a:fld>
-            <a:endParaRPr lang="en-US"/>
-          </a:p>
-        </p:txBody>
-      </p:sp>
-      <p:sp>
-        <p:nvSpPr>
-          <p:cNvPr id="4" name="Slide Image Placeholder 3"/>
-          <p:cNvSpPr>
-            <a:spLocks noGrp="1" noRot="1" noChangeAspect="1"/>
-          </p:cNvSpPr>
-          <p:nvPr>
-            <p:ph type="sldImg" idx="2"/>
-          </p:nvPr>
-        </p:nvSpPr>
-        <p:spPr>
-          <a:xfrm>
-            <a:off x="685800" y="1143000"/>
-            <a:ext cx="5486400" cy="3086100"/>
-          </a:xfrm>
-          <a:prstGeom prst="rect">
-            <a:avLst/>
-          </a:prstGeom>
-          <a:noFill/>
-          <a:ln w="12700">
-            <a:solidFill>
-              <a:prstClr val="black"/>
-            </a:solidFill>
-          </a:ln>
-        </p:spPr>
-        <p:txBody>
-          <a:bodyPr vert="horz" lIns="91440" tIns="45720" rIns="91440" bIns="45720" rtlCol="0" anchor="ctr"/>
-          <a:lstStyle/>
-          <a:p>
-            <a:endParaRPr lang="en-US"/>
-          </a:p>
-        </p:txBody>
-      </p:sp>
-      <p:sp>
-        <p:nvSpPr>
-          <p:cNvPr id="5" name="Notes Placeholder 4"/>
-          <p:cNvSpPr>
-            <a:spLocks noGrp="1"/>
-          </p:cNvSpPr>
-          <p:nvPr>
-            <p:ph type="body" sz="quarter" idx="3"/>
-          </p:nvPr>
-        </p:nvSpPr>
-        <p:spPr>
-          <a:xfrm>
-            <a:off x="685800" y="4400550"/>
-            <a:ext cx="5486400" cy="3600450"/>
-          </a:xfrm>
-          <a:prstGeom prst="rect">
-            <a:avLst/>
-          </a:prstGeom>
-        </p:spPr>
-        <p:txBody>
-          <a:bodyPr vert="horz" lIns="91440" tIns="45720" rIns="91440" bIns="45720" rtlCol="0"/>
-          <a:lstStyle/>
-          <a:p>
-            <a:pPr lvl="0"/>
-            <a:r>
-              <a:rPr lang="en-US"/>
-              <a:t>Click to edit Master text styles</a:t>
-            </a:r>
-          </a:p>
-          <a:p>
-            <a:pPr lvl="1"/>
-            <a:r>
-              <a:rPr lang="en-US"/>
-              <a:t>Second level</a:t>
-            </a:r>
-          </a:p>
-          <a:p>
-            <a:pPr lvl="2"/>
-            <a:r>
-              <a:rPr lang="en-US"/>
-              <a:t>Third level</a:t>
-            </a:r>
-          </a:p>
-          <a:p>
-            <a:pPr lvl="3"/>
-            <a:r>
-              <a:rPr lang="en-US"/>
-              <a:t>Fourth level</a:t>
-            </a:r>
-          </a:p>
-          <a:p>
-            <a:pPr lvl="4"/>
-            <a:r>
-              <a:rPr lang="en-US"/>
-              <a:t>Fifth level</a:t>
-            </a:r>
-          </a:p>
-        </p:txBody>
-      </p:sp>
-      <p:sp>
-        <p:nvSpPr>
-          <p:cNvPr id="6" name="Footer Placeholder 5"/>
-          <p:cNvSpPr>
-            <a:spLocks noGrp="1"/>
-          </p:cNvSpPr>
-          <p:nvPr>
-            <p:ph type="ftr" sz="quarter" idx="4"/>
-          </p:nvPr>
-        </p:nvSpPr>
-        <p:spPr>
-          <a:xfrm>
-            <a:off x="0" y="8685213"/>
-            <a:ext cx="2971800" cy="458787"/>
-          </a:xfrm>
-          <a:prstGeom prst="rect">
-            <a:avLst/>
-          </a:prstGeom>
-        </p:spPr>
-        <p:txBody>
-          <a:bodyPr vert="horz" lIns="91440" tIns="45720" rIns="91440" bIns="45720" rtlCol="0" anchor="b"/>
-          <a:lstStyle>
-            <a:lvl1pPr algn="l">
-              <a:defRPr sz="1200"/>
-            </a:lvl1pPr>
-          </a:lstStyle>
-          <a:p>
-            <a:endParaRPr lang="en-US"/>
-          </a:p>
-        </p:txBody>
-      </p:sp>
-      <p:sp>
-        <p:nvSpPr>
-          <p:cNvPr id="7" name="Slide Number Placeholder 6"/>
-          <p:cNvSpPr>
-            <a:spLocks noGrp="1"/>
-          </p:cNvSpPr>
-          <p:nvPr>
-            <p:ph type="sldNum" sz="quarter" idx="5"/>
-          </p:nvPr>
-        </p:nvSpPr>
-        <p:spPr>
-          <a:xfrm>
-            <a:off x="3884613" y="8685213"/>
-            <a:ext cx="2971800" cy="458787"/>
-          </a:xfrm>
-          <a:prstGeom prst="rect">
-            <a:avLst/>
-          </a:prstGeom>
-        </p:spPr>
-        <p:txBody>
-          <a:bodyPr vert="horz" lIns="91440" tIns="45720" rIns="91440" bIns="45720" rtlCol="0" anchor="b"/>
-          <a:lstStyle>
-            <a:lvl1pPr algn="r">
-              <a:defRPr sz="1200"/>
-            </a:lvl1pPr>
-          </a:lstStyle>
-          <a:p>
-            <a:fld id="{CE5E9CC1-C706-0F49-92D6-E571CC5EEA8F}" type="slidenum">
-              <a:rPr lang="en-US"/>
-              <a:t>‹#›</a:t>
-            </a:fld>
-            <a:endParaRPr lang="en-US"/>
-          </a:p>
-        </p:txBody>
-      </p:sp>
     </p:spTree>
     <p:extLst>
       <p:ext uri="{BB962C8B-B14F-4D97-AF65-F5344CB8AC3E}">
-        <p14:creationId xmlns:p14="http://schemas.microsoft.com/office/powerpoint/2010/main" val="1024086991"/>
+        <p14:creationId xmlns:p14="http://schemas.microsoft.com/office/powerpoint/2010/main" val="3935513871"/>
       </p:ext>
     </p:extLst>
   </p:cSld>
@@ -538,7 +314,6 @@
               <a:rPr lang="en-US" dirty="0"/>
               <a:t>Opening: this is the online registry for our parish families. Today covers four things: what it gives the parish, how a new household registers, how the census runs, and the limits of the free hosting it runs on.</a:t>
             </a:r>
-            <a:endParaRPr lang="en-US" dirty="0"/>
           </a:p>
         </p:txBody>
       </p:sp>
@@ -626,7 +401,6 @@
               <a:rPr lang="en-US" dirty="0"/>
               <a:t>Six benefits. The short version: one accurate, searchable record of our families; families enter their own details from a phone; staff verify before anything counts; reports by GKK are instant; the census no longer means retyping; and access is controlled and logged. The same app also runs the parish website and takes certificate, prayer and blood requests.</a:t>
             </a:r>
-            <a:endParaRPr lang="en-US" dirty="0"/>
           </a:p>
         </p:txBody>
       </p:sp>
@@ -712,9 +486,8 @@
           <a:p>
             <a:r>
               <a:rPr lang="en-US" dirty="0"/>
-              <a:t>The family opens the parish website and taps Register. Five steps, all in Bisaya: the family and its head, the members, their sacraments, their involvement in the church, then a review page. Required fields are checked at each step, and the data privacy consent must be ticked. On submit the family gets a reference number. The record is not counted as verified until staff check it in the office. Families can look up their status any time with the reference number; only the family name and status are shown.</a:t>
-            </a:r>
-            <a:endParaRPr lang="en-US" dirty="0"/>
+              <a:t>The census replaces the hand-filled census sheet. Staff start it, print one pre-filled page per household by GKK, and the answers come back in one of two ways: on paper, typed in by staff, or online by the family using the reference number and access code printed on its form. The form asks about participation per member (Aktibo, Panagsa, Wala); the system suggests a status but staff always choose it. The census is per member, not per household, so one family can have active and inactive members. Members marked Moved away or Deceased stay on record but drop out of counts and the next census forms.</a:t>
+            </a:r>
           </a:p>
         </p:txBody>
       </p:sp>
@@ -800,9 +573,8 @@
           <a:p>
             <a:r>
               <a:rPr lang="en-US" dirty="0"/>
-              <a:t>The census replaces the hand-filled census sheet. Staff start it, print one pre-filled page per household by GKK, and the answers come back in one of two ways: on paper, typed in by staff, or online by the family using the reference number and access code printed on its form. The form asks about participation per member (Aktibo, Panagsa, Wala); the system suggests a status but staff always choose it. The census is per member, not per household, so one family can have active and inactive members. Members marked Moved away or Deceased stay on record but drop out of counts and the next census forms.</a:t>
-            </a:r>
-            <a:endParaRPr lang="en-US" dirty="0"/>
+              <a:t>The family opens the parish website and taps Register. Five steps, all in Bisaya: the family and its head, the members, their sacraments, their involvement in the church, then a review page. Required fields are checked at each step, and the data privacy consent must be ticked. On submit the family gets a reference number. The record is not counted as verified until staff check it in the office. Families can look up their status any time with the reference number; only the family name and status are shown.</a:t>
+            </a:r>
           </a:p>
         </p:txBody>
       </p:sp>
@@ -890,7 +662,6 @@
               <a:rPr lang="en-US" dirty="0"/>
               <a:t>The app costs nothing a month to host, and these are the trade-offs. On Supabase the two real risks, pausing and no backups, are already covered by two scheduled jobs on GitHub: a keep-alive every 3 days and an encrypted weekly backup kept 90 days. GitHub pauses scheduled jobs if the repository has no commits for 60 days; it emails the owner and one click turns them back on. On Vercel the point to decide is the non-commercial rule: Vercel counts a site as commercial if anyone is paid to create, update or host it (asking for donations is allowed). If that applies, the parish should budget for Vercel Pro. Usage limits are far above what one parish will use.</a:t>
             </a:r>
-            <a:endParaRPr lang="en-US" dirty="0"/>
           </a:p>
         </p:txBody>
       </p:sp>
@@ -968,6 +739,7 @@
         <a:solidFill>
           <a:schemeClr val="tx1"/>
         </a:solidFill>
+        <a:effectLst/>
       </p:bgPr>
     </p:bg>
     <p:spTree>
@@ -987,9 +759,11 @@
       <p:sp>
         <p:nvSpPr>
           <p:cNvPr id="2" name="Text 0"/>
-          <p:cNvSpPr/>
+          <p:cNvSpPr>
+            <a:spLocks noGrp="1"/>
+          </p:cNvSpPr>
           <p:nvPr>
-            <p:ph idx="100" type="title" hasCustomPrompt="1"/>
+            <p:ph type="title" idx="100" hasCustomPrompt="1"/>
           </p:nvPr>
         </p:nvSpPr>
         <p:spPr>
@@ -1006,7 +780,7 @@
         <p:txBody>
           <a:bodyPr wrap="square" rtlCol="0"/>
           <a:lstStyle>
-            <a:lvl1pPr algn="l" indent="0" marL="0">
+            <a:lvl1pPr marL="0" indent="0" algn="l">
               <a:buNone/>
               <a:defRPr lang="en-US" sz="5400" b="1" dirty="0">
                 <a:solidFill>
@@ -1016,7 +790,7 @@
             </a:lvl1pPr>
           </a:lstStyle>
           <a:p>
-            <a:pPr algn="l" indent="0" marL="0">
+            <a:pPr marL="0" indent="0" algn="l">
               <a:buNone/>
             </a:pPr>
             <a:endParaRPr lang="en-US" sz="5400" dirty="0"/>
@@ -1026,9 +800,11 @@
       <p:sp>
         <p:nvSpPr>
           <p:cNvPr id="3" name="Text 0"/>
-          <p:cNvSpPr/>
+          <p:cNvSpPr>
+            <a:spLocks noGrp="1"/>
+          </p:cNvSpPr>
           <p:nvPr>
-            <p:ph idx="101" type="body" hasCustomPrompt="1"/>
+            <p:ph type="body" idx="101" hasCustomPrompt="1"/>
           </p:nvPr>
         </p:nvSpPr>
         <p:spPr>
@@ -1045,7 +821,7 @@
         <p:txBody>
           <a:bodyPr wrap="square" rtlCol="0"/>
           <a:lstStyle>
-            <a:lvl1pPr indent="0" marL="0">
+            <a:lvl1pPr marL="0" indent="0">
               <a:buNone/>
               <a:defRPr lang="en-US" sz="2200" dirty="0">
                 <a:solidFill>
@@ -1055,7 +831,7 @@
             </a:lvl1pPr>
           </a:lstStyle>
           <a:p>
-            <a:pPr indent="0" marL="0">
+            <a:pPr marL="0" indent="0">
               <a:buNone/>
             </a:pPr>
             <a:endParaRPr lang="en-US" sz="2200" dirty="0"/>
@@ -1078,6 +854,7 @@
         <a:solidFill>
           <a:schemeClr val="bg1"/>
         </a:solidFill>
+        <a:effectLst/>
       </p:bgPr>
     </p:bg>
     <p:spTree>
@@ -1097,9 +874,11 @@
       <p:sp>
         <p:nvSpPr>
           <p:cNvPr id="2" name="Text 0"/>
-          <p:cNvSpPr/>
+          <p:cNvSpPr>
+            <a:spLocks noGrp="1"/>
+          </p:cNvSpPr>
           <p:nvPr>
-            <p:ph idx="100" type="title" hasCustomPrompt="1"/>
+            <p:ph type="title" idx="100" hasCustomPrompt="1"/>
           </p:nvPr>
         </p:nvSpPr>
         <p:spPr>
@@ -1116,7 +895,7 @@
         <p:txBody>
           <a:bodyPr wrap="square" rtlCol="0"/>
           <a:lstStyle>
-            <a:lvl1pPr algn="l" indent="0" marL="0">
+            <a:lvl1pPr marL="0" indent="0" algn="l">
               <a:buNone/>
               <a:defRPr lang="en-US" sz="3400" b="1" dirty="0">
                 <a:solidFill>
@@ -1126,7 +905,7 @@
             </a:lvl1pPr>
           </a:lstStyle>
           <a:p>
-            <a:pPr algn="l" indent="0" marL="0">
+            <a:pPr marL="0" indent="0" algn="l">
               <a:buNone/>
             </a:pPr>
             <a:endParaRPr lang="en-US" sz="3400" dirty="0"/>
@@ -1154,7 +933,7 @@
           <a:bodyPr wrap="square" lIns="0" tIns="0" rIns="0" bIns="0" rtlCol="0" anchor="ctr"/>
           <a:lstStyle/>
           <a:p>
-            <a:pPr indent="0" marL="0">
+            <a:pPr marL="0" indent="0">
               <a:buNone/>
             </a:pPr>
             <a:r>
@@ -1189,7 +968,7 @@
           </a:prstGeom>
           <a:extLst>
             <a:ext uri="{C572A759-6A51-4108-AA02-DFA0A04FC94B}">
-              <ma14:wrappingTextBoxFlag xmlns:ma14="http://schemas.microsoft.com/office/mac/drawingml/2011/main" val="0"/>
+              <ma14:wrappingTextBoxFlag xmlns:ma14="http://schemas.microsoft.com/office/mac/drawingml/2011/main" xmlns="" val="0"/>
             </a:ext>
           </a:extLst>
         </p:spPr>
@@ -1207,8 +986,8 @@
           <a:p>
             <a:pPr algn="r"/>
             <a:fld id="{F7021451-1387-4CA6-816F-3879F97B5CBC}" type="slidenum">
-              <a:rPr b="0" lang="en-US"/>
-              <a:t>1003</a:t>
+              <a:rPr lang="en-US" b="0"/>
+              <a:t>‹#›</a:t>
             </a:fld>
             <a:endParaRPr lang="en-US"/>
           </a:p>
@@ -1225,6 +1004,11 @@
 <file path=ppt/slideMasters/slideMaster1.xml><?xml version="1.0" encoding="utf-8"?>
 <p:sldMaster xmlns:a="http://schemas.openxmlformats.org/drawingml/2006/main" xmlns:r="http://schemas.openxmlformats.org/officeDocument/2006/relationships" xmlns:p="http://schemas.openxmlformats.org/presentationml/2006/main">
   <p:cSld>
+    <p:bg>
+      <p:bgRef idx="1001">
+        <a:schemeClr val="bg1"/>
+      </p:bgRef>
+    </p:bg>
     <p:spTree>
       <p:nvGrpSpPr>
         <p:cNvPr id="1" name=""/>
@@ -1259,7 +1043,7 @@
           </a:prstGeom>
           <a:extLst>
             <a:ext uri="{C572A759-6A51-4108-AA02-DFA0A04FC94B}">
-              <ma14:wrappingTextBoxFlag xmlns:ma14="http://schemas.microsoft.com/office/mac/drawingml/2011/main" val="0"/>
+              <ma14:wrappingTextBoxFlag xmlns:ma14="http://schemas.microsoft.com/office/mac/drawingml/2011/main" xmlns="" val="0"/>
             </a:ext>
           </a:extLst>
         </p:spPr>
@@ -1277,8 +1061,8 @@
           <a:p>
             <a:pPr algn="r"/>
             <a:fld id="{F7021451-1387-4CA6-816F-3879F97B5CBC}" type="slidenum">
-              <a:rPr b="0" lang="en-US"/>
-              <a:t>null</a:t>
+              <a:rPr lang="en-US" b="0"/>
+              <a:t>‹#›</a:t>
             </a:fld>
             <a:endParaRPr lang="en-US"/>
           </a:p>
@@ -1565,14 +1349,14 @@
       </p:grpSpPr>
       <p:pic>
         <p:nvPicPr>
-          <p:cNvPr id="2" name="Registry mark" descr="Star and cross mark of the registry">    </p:cNvPr>
+          <p:cNvPr id="2" name="Registry mark" descr="Star and cross mark of the registry"/>
           <p:cNvPicPr>
             <a:picLocks noChangeAspect="1"/>
           </p:cNvPicPr>
           <p:nvPr/>
         </p:nvPicPr>
         <p:blipFill>
-          <a:blip r:embed="rId1"/>
+          <a:blip r:embed="rId3"/>
           <a:stretch>
             <a:fillRect/>
           </a:stretch>
@@ -1590,9 +1374,11 @@
       <p:sp>
         <p:nvSpPr>
           <p:cNvPr id="3" name="Text 0"/>
-          <p:cNvSpPr/>
+          <p:cNvSpPr>
+            <a:spLocks noGrp="1"/>
+          </p:cNvSpPr>
           <p:nvPr>
-            <p:ph idx="100" type="title" hasCustomPrompt="1"/>
+            <p:ph type="title" idx="100" hasCustomPrompt="1"/>
           </p:nvPr>
         </p:nvSpPr>
         <p:spPr>
@@ -1610,7 +1396,7 @@
           <a:bodyPr wrap="square" lIns="0" tIns="0" rIns="0" bIns="0" rtlCol="0" anchor="t"/>
           <a:lstStyle/>
           <a:p>
-            <a:pPr algn="l" indent="0" marL="0">
+            <a:pPr marL="0" indent="0" algn="l">
               <a:buNone/>
             </a:pPr>
             <a:r>
@@ -1628,9 +1414,11 @@
       <p:sp>
         <p:nvSpPr>
           <p:cNvPr id="4" name="Text 0"/>
-          <p:cNvSpPr/>
+          <p:cNvSpPr>
+            <a:spLocks noGrp="1"/>
+          </p:cNvSpPr>
           <p:nvPr>
-            <p:ph idx="101" type="body" hasCustomPrompt="1"/>
+            <p:ph type="body" idx="101" hasCustomPrompt="1"/>
           </p:nvPr>
         </p:nvSpPr>
         <p:spPr>
@@ -1648,7 +1436,7 @@
           <a:bodyPr wrap="square" lIns="0" tIns="0" rIns="0" bIns="0" rtlCol="0" anchor="t"/>
           <a:lstStyle/>
           <a:p>
-            <a:pPr indent="0" marL="0">
+            <a:pPr marL="0" indent="0">
               <a:buNone/>
             </a:pPr>
             <a:r>
@@ -1662,7 +1450,7 @@
             <a:endParaRPr lang="en-US" sz="2200" dirty="0"/>
           </a:p>
           <a:p>
-            <a:pPr indent="0" marL="0">
+            <a:pPr marL="0" indent="0">
               <a:buNone/>
             </a:pPr>
             <a:r>
@@ -1705,9 +1493,11 @@
       <p:sp>
         <p:nvSpPr>
           <p:cNvPr id="2" name="Text 0"/>
-          <p:cNvSpPr/>
+          <p:cNvSpPr>
+            <a:spLocks noGrp="1"/>
+          </p:cNvSpPr>
           <p:nvPr>
-            <p:ph idx="100" type="title" hasCustomPrompt="1"/>
+            <p:ph type="title" idx="100" hasCustomPrompt="1"/>
           </p:nvPr>
         </p:nvSpPr>
         <p:spPr>
@@ -1725,7 +1515,7 @@
           <a:bodyPr wrap="square" lIns="0" tIns="0" rIns="0" bIns="0" rtlCol="0" anchor="ctr"/>
           <a:lstStyle/>
           <a:p>
-            <a:pPr algn="l" indent="0" marL="0">
+            <a:pPr marL="0" indent="0" algn="l">
               <a:buNone/>
             </a:pPr>
             <a:r>
@@ -1794,303 +1584,7 @@
       </p:sp>
       <p:pic>
         <p:nvPicPr>
-          <p:cNvPr id="5" name="Benefit 1 icon" descr="preencoded.png">    </p:cNvPr>
-          <p:cNvPicPr>
-            <a:picLocks noChangeAspect="1"/>
-          </p:cNvPicPr>
-          <p:nvPr/>
-        </p:nvPicPr>
-        <p:blipFill>
-          <a:blip r:embed="rId1"/>
-          <a:stretch>
-            <a:fillRect/>
-          </a:stretch>
-        </p:blipFill>
-        <p:spPr>
-          <a:xfrm>
-            <a:off x="950976" y="1865376"/>
-            <a:ext cx="274320" cy="274320"/>
-          </a:xfrm>
-          <a:prstGeom prst="rect">
-            <a:avLst/>
-          </a:prstGeom>
-        </p:spPr>
-      </p:pic>
-      <p:sp>
-        <p:nvSpPr>
-          <p:cNvPr id="6" name="Benefit 1 heading"/>
-          <p:cNvSpPr txBox="1"/>
-          <p:nvPr/>
-        </p:nvSpPr>
-        <p:spPr>
-          <a:xfrm>
-            <a:off x="1508760" y="1719072"/>
-            <a:ext cx="2326538" cy="566928"/>
-          </a:xfrm>
-          <a:prstGeom prst="rect">
-            <a:avLst/>
-          </a:prstGeom>
-          <a:noFill/>
-          <a:ln/>
-        </p:spPr>
-        <p:txBody>
-          <a:bodyPr wrap="square" lIns="0" tIns="0" rIns="0" bIns="0" rtlCol="0" anchor="ctr"/>
-          <a:lstStyle/>
-          <a:p>
-            <a:pPr indent="0" marL="0">
-              <a:buNone/>
-            </a:pPr>
-            <a:r>
-              <a:rPr lang="en-US" sz="1700" b="1" dirty="0">
-                <a:solidFill>
-                  <a:schemeClr val="tx1"/>
-                </a:solidFill>
-              </a:rPr>
-              <a:t>One record for every family</a:t>
-            </a:r>
-            <a:endParaRPr lang="en-US" sz="1700" dirty="0"/>
-          </a:p>
-        </p:txBody>
-      </p:sp>
-      <p:sp>
-        <p:nvSpPr>
-          <p:cNvPr id="7" name="Benefit 1 text"/>
-          <p:cNvSpPr txBox="1"/>
-          <p:nvPr/>
-        </p:nvSpPr>
-        <p:spPr>
-          <a:xfrm>
-            <a:off x="804672" y="2423160"/>
-            <a:ext cx="3003194" cy="822960"/>
-          </a:xfrm>
-          <a:prstGeom prst="rect">
-            <a:avLst/>
-          </a:prstGeom>
-          <a:noFill/>
-          <a:ln/>
-        </p:spPr>
-        <p:txBody>
-          <a:bodyPr wrap="square" lIns="0" tIns="0" rIns="0" bIns="0" rtlCol="0" anchor="t"/>
-          <a:lstStyle/>
-          <a:p>
-            <a:pPr indent="0" marL="0">
-              <a:buNone/>
-            </a:pPr>
-            <a:r>
-              <a:rPr lang="en-US" sz="1350" dirty="0">
-                <a:solidFill>
-                  <a:schemeClr val="tx2"/>
-                </a:solidFill>
-              </a:rPr>
-              <a:t>Households, members, sacraments, ministries and GKK in one searchable place instead of scattered paper sheets.</a:t>
-            </a:r>
-            <a:endParaRPr lang="en-US" sz="1350" dirty="0"/>
-          </a:p>
-        </p:txBody>
-      </p:sp>
-      <p:sp>
-        <p:nvSpPr>
-          <p:cNvPr id="8" name="Benefit 2 card"/>
-          <p:cNvSpPr/>
-          <p:nvPr/>
-        </p:nvSpPr>
-        <p:spPr>
-          <a:xfrm>
-            <a:off x="4338218" y="1463040"/>
-            <a:ext cx="3515258" cy="1920240"/>
-          </a:xfrm>
-          <a:prstGeom prst="roundRect">
-            <a:avLst>
-              <a:gd name="adj" fmla="val 5714"/>
-            </a:avLst>
-          </a:prstGeom>
-          <a:solidFill>
-            <a:schemeClr val="bg2"/>
-          </a:solidFill>
-          <a:ln w="12700">
-            <a:solidFill>
-              <a:schemeClr val="bg2"/>
-            </a:solidFill>
-            <a:prstDash val="solid"/>
-          </a:ln>
-        </p:spPr>
-      </p:sp>
-      <p:sp>
-        <p:nvSpPr>
-          <p:cNvPr id="9" name="Benefit 2 icon circle"/>
-          <p:cNvSpPr/>
-          <p:nvPr/>
-        </p:nvSpPr>
-        <p:spPr>
-          <a:xfrm>
-            <a:off x="4594250" y="1719072"/>
-            <a:ext cx="566928" cy="566928"/>
-          </a:xfrm>
-          <a:prstGeom prst="ellipse">
-            <a:avLst/>
-          </a:prstGeom>
-          <a:solidFill>
-            <a:schemeClr val="accent1"/>
-          </a:solidFill>
-          <a:ln w="12700">
-            <a:solidFill>
-              <a:schemeClr val="accent1"/>
-            </a:solidFill>
-            <a:prstDash val="solid"/>
-          </a:ln>
-        </p:spPr>
-      </p:sp>
-      <p:pic>
-        <p:nvPicPr>
-          <p:cNvPr id="10" name="Benefit 2 icon" descr="preencoded.png">    </p:cNvPr>
-          <p:cNvPicPr>
-            <a:picLocks noChangeAspect="1"/>
-          </p:cNvPicPr>
-          <p:nvPr/>
-        </p:nvPicPr>
-        <p:blipFill>
-          <a:blip r:embed="rId2"/>
-          <a:stretch>
-            <a:fillRect/>
-          </a:stretch>
-        </p:blipFill>
-        <p:spPr>
-          <a:xfrm>
-            <a:off x="4740554" y="1865376"/>
-            <a:ext cx="274320" cy="274320"/>
-          </a:xfrm>
-          <a:prstGeom prst="rect">
-            <a:avLst/>
-          </a:prstGeom>
-        </p:spPr>
-      </p:pic>
-      <p:sp>
-        <p:nvSpPr>
-          <p:cNvPr id="11" name="Benefit 2 heading"/>
-          <p:cNvSpPr txBox="1"/>
-          <p:nvPr/>
-        </p:nvSpPr>
-        <p:spPr>
-          <a:xfrm>
-            <a:off x="5298338" y="1719072"/>
-            <a:ext cx="2326538" cy="566928"/>
-          </a:xfrm>
-          <a:prstGeom prst="rect">
-            <a:avLst/>
-          </a:prstGeom>
-          <a:noFill/>
-          <a:ln/>
-        </p:spPr>
-        <p:txBody>
-          <a:bodyPr wrap="square" lIns="0" tIns="0" rIns="0" bIns="0" rtlCol="0" anchor="ctr"/>
-          <a:lstStyle/>
-          <a:p>
-            <a:pPr indent="0" marL="0">
-              <a:buNone/>
-            </a:pPr>
-            <a:r>
-              <a:rPr lang="en-US" sz="1700" b="1" dirty="0">
-                <a:solidFill>
-                  <a:schemeClr val="tx1"/>
-                </a:solidFill>
-              </a:rPr>
-              <a:t>Families register by phone</a:t>
-            </a:r>
-            <a:endParaRPr lang="en-US" sz="1700" dirty="0"/>
-          </a:p>
-        </p:txBody>
-      </p:sp>
-      <p:sp>
-        <p:nvSpPr>
-          <p:cNvPr id="12" name="Benefit 2 text"/>
-          <p:cNvSpPr txBox="1"/>
-          <p:nvPr/>
-        </p:nvSpPr>
-        <p:spPr>
-          <a:xfrm>
-            <a:off x="4594250" y="2423160"/>
-            <a:ext cx="3003194" cy="822960"/>
-          </a:xfrm>
-          <a:prstGeom prst="rect">
-            <a:avLst/>
-          </a:prstGeom>
-          <a:noFill/>
-          <a:ln/>
-        </p:spPr>
-        <p:txBody>
-          <a:bodyPr wrap="square" lIns="0" tIns="0" rIns="0" bIns="0" rtlCol="0" anchor="t"/>
-          <a:lstStyle/>
-          <a:p>
-            <a:pPr indent="0" marL="0">
-              <a:buNone/>
-            </a:pPr>
-            <a:r>
-              <a:rPr lang="en-US" sz="1350" dirty="0">
-                <a:solidFill>
-                  <a:schemeClr val="tx2"/>
-                </a:solidFill>
-              </a:rPr>
-              <a:t>A 5-step form in Bisaya. The family gets a reference number at once and can check its status online.</a:t>
-            </a:r>
-            <a:endParaRPr lang="en-US" sz="1350" dirty="0"/>
-          </a:p>
-        </p:txBody>
-      </p:sp>
-      <p:sp>
-        <p:nvSpPr>
-          <p:cNvPr id="13" name="Benefit 3 card"/>
-          <p:cNvSpPr/>
-          <p:nvPr/>
-        </p:nvSpPr>
-        <p:spPr>
-          <a:xfrm>
-            <a:off x="8127797" y="1463040"/>
-            <a:ext cx="3515258" cy="1920240"/>
-          </a:xfrm>
-          <a:prstGeom prst="roundRect">
-            <a:avLst>
-              <a:gd name="adj" fmla="val 5714"/>
-            </a:avLst>
-          </a:prstGeom>
-          <a:solidFill>
-            <a:schemeClr val="bg2"/>
-          </a:solidFill>
-          <a:ln w="12700">
-            <a:solidFill>
-              <a:schemeClr val="bg2"/>
-            </a:solidFill>
-            <a:prstDash val="solid"/>
-          </a:ln>
-        </p:spPr>
-      </p:sp>
-      <p:sp>
-        <p:nvSpPr>
-          <p:cNvPr id="14" name="Benefit 3 icon circle"/>
-          <p:cNvSpPr/>
-          <p:nvPr/>
-        </p:nvSpPr>
-        <p:spPr>
-          <a:xfrm>
-            <a:off x="8383829" y="1719072"/>
-            <a:ext cx="566928" cy="566928"/>
-          </a:xfrm>
-          <a:prstGeom prst="ellipse">
-            <a:avLst/>
-          </a:prstGeom>
-          <a:solidFill>
-            <a:schemeClr val="accent1"/>
-          </a:solidFill>
-          <a:ln w="12700">
-            <a:solidFill>
-              <a:schemeClr val="accent1"/>
-            </a:solidFill>
-            <a:prstDash val="solid"/>
-          </a:ln>
-        </p:spPr>
-      </p:sp>
-      <p:pic>
-        <p:nvPicPr>
-          <p:cNvPr id="15" name="Benefit 3 icon" descr="preencoded.png">    </p:cNvPr>
+          <p:cNvPr id="5" name="Benefit 1 icon" descr="preencoded.png"/>
           <p:cNvPicPr>
             <a:picLocks noChangeAspect="1"/>
           </p:cNvPicPr>
@@ -2104,7 +1598,7 @@
         </p:blipFill>
         <p:spPr>
           <a:xfrm>
-            <a:off x="8530133" y="1865376"/>
+            <a:off x="950976" y="1865376"/>
             <a:ext cx="274320" cy="274320"/>
           </a:xfrm>
           <a:prstGeom prst="rect">
@@ -2114,13 +1608,13 @@
       </p:pic>
       <p:sp>
         <p:nvSpPr>
-          <p:cNvPr id="16" name="Benefit 3 heading"/>
-          <p:cNvSpPr txBox="1"/>
-          <p:nvPr/>
-        </p:nvSpPr>
-        <p:spPr>
-          <a:xfrm>
-            <a:off x="9087917" y="1719072"/>
+          <p:cNvPr id="6" name="Benefit 1 heading"/>
+          <p:cNvSpPr txBox="1"/>
+          <p:nvPr/>
+        </p:nvSpPr>
+        <p:spPr>
+          <a:xfrm>
+            <a:off x="1508760" y="1719072"/>
             <a:ext cx="2326538" cy="566928"/>
           </a:xfrm>
           <a:prstGeom prst="rect">
@@ -2133,7 +1627,7 @@
           <a:bodyPr wrap="square" lIns="0" tIns="0" rIns="0" bIns="0" rtlCol="0" anchor="ctr"/>
           <a:lstStyle/>
           <a:p>
-            <a:pPr indent="0" marL="0">
+            <a:pPr marL="0" indent="0">
               <a:buNone/>
             </a:pPr>
             <a:r>
@@ -2142,7 +1636,7 @@
                   <a:schemeClr val="tx1"/>
                 </a:solidFill>
               </a:rPr>
-              <a:t>Checked before it counts</a:t>
+              <a:t>One record for every family</a:t>
             </a:r>
             <a:endParaRPr lang="en-US" sz="1700" dirty="0"/>
           </a:p>
@@ -2150,13 +1644,13 @@
       </p:sp>
       <p:sp>
         <p:nvSpPr>
-          <p:cNvPr id="17" name="Benefit 3 text"/>
-          <p:cNvSpPr txBox="1"/>
-          <p:nvPr/>
-        </p:nvSpPr>
-        <p:spPr>
-          <a:xfrm>
-            <a:off x="8383829" y="2423160"/>
+          <p:cNvPr id="7" name="Benefit 1 text"/>
+          <p:cNvSpPr txBox="1"/>
+          <p:nvPr/>
+        </p:nvSpPr>
+        <p:spPr>
+          <a:xfrm>
+            <a:off x="804672" y="2423160"/>
             <a:ext cx="3003194" cy="822960"/>
           </a:xfrm>
           <a:prstGeom prst="rect">
@@ -2169,7 +1663,7 @@
           <a:bodyPr wrap="square" lIns="0" tIns="0" rIns="0" bIns="0" rtlCol="0" anchor="t"/>
           <a:lstStyle/>
           <a:p>
-            <a:pPr indent="0" marL="0">
+            <a:pPr marL="0" indent="0">
               <a:buNone/>
             </a:pPr>
             <a:r>
@@ -2178,7 +1672,7 @@
                   <a:schemeClr val="tx2"/>
                 </a:solidFill>
               </a:rPr>
-              <a:t>Staff verify every registration. Possible duplicates are flagged, and sacraments can be confirmed against the parish register.</a:t>
+              <a:t>Households, members, sacraments, ministries and GKK in one searchable place instead of scattered paper sheets.</a:t>
             </a:r>
             <a:endParaRPr lang="en-US" sz="1350" dirty="0"/>
           </a:p>
@@ -2186,13 +1680,13 @@
       </p:sp>
       <p:sp>
         <p:nvSpPr>
-          <p:cNvPr id="18" name="Benefit 4 card"/>
+          <p:cNvPr id="8" name="Benefit 2 card"/>
           <p:cNvSpPr/>
           <p:nvPr/>
         </p:nvSpPr>
         <p:spPr>
           <a:xfrm>
-            <a:off x="548640" y="3657600"/>
+            <a:off x="4338218" y="1463040"/>
             <a:ext cx="3515258" cy="1920240"/>
           </a:xfrm>
           <a:prstGeom prst="roundRect">
@@ -2213,13 +1707,13 @@
       </p:sp>
       <p:sp>
         <p:nvSpPr>
-          <p:cNvPr id="19" name="Benefit 4 icon circle"/>
+          <p:cNvPr id="9" name="Benefit 2 icon circle"/>
           <p:cNvSpPr/>
           <p:nvPr/>
         </p:nvSpPr>
         <p:spPr>
           <a:xfrm>
-            <a:off x="804672" y="3913632"/>
+            <a:off x="4594250" y="1719072"/>
             <a:ext cx="566928" cy="566928"/>
           </a:xfrm>
           <a:prstGeom prst="ellipse">
@@ -2238,7 +1732,7 @@
       </p:sp>
       <p:pic>
         <p:nvPicPr>
-          <p:cNvPr id="20" name="Benefit 4 icon" descr="preencoded.png">    </p:cNvPr>
+          <p:cNvPr id="10" name="Benefit 2 icon" descr="preencoded.png"/>
           <p:cNvPicPr>
             <a:picLocks noChangeAspect="1"/>
           </p:cNvPicPr>
@@ -2252,7 +1746,7 @@
         </p:blipFill>
         <p:spPr>
           <a:xfrm>
-            <a:off x="950976" y="4059936"/>
+            <a:off x="4740554" y="1865376"/>
             <a:ext cx="274320" cy="274320"/>
           </a:xfrm>
           <a:prstGeom prst="rect">
@@ -2262,13 +1756,13 @@
       </p:pic>
       <p:sp>
         <p:nvSpPr>
-          <p:cNvPr id="21" name="Benefit 4 heading"/>
-          <p:cNvSpPr txBox="1"/>
-          <p:nvPr/>
-        </p:nvSpPr>
-        <p:spPr>
-          <a:xfrm>
-            <a:off x="1508760" y="3913632"/>
+          <p:cNvPr id="11" name="Benefit 2 heading"/>
+          <p:cNvSpPr txBox="1"/>
+          <p:nvPr/>
+        </p:nvSpPr>
+        <p:spPr>
+          <a:xfrm>
+            <a:off x="5298338" y="1719072"/>
             <a:ext cx="2326538" cy="566928"/>
           </a:xfrm>
           <a:prstGeom prst="rect">
@@ -2281,7 +1775,7 @@
           <a:bodyPr wrap="square" lIns="0" tIns="0" rIns="0" bIns="0" rtlCol="0" anchor="ctr"/>
           <a:lstStyle/>
           <a:p>
-            <a:pPr indent="0" marL="0">
+            <a:pPr marL="0" indent="0">
               <a:buNone/>
             </a:pPr>
             <a:r>
@@ -2290,7 +1784,7 @@
                   <a:schemeClr val="tx1"/>
                 </a:solidFill>
               </a:rPr>
-              <a:t>Parish numbers in seconds</a:t>
+              <a:t>Families register by phone</a:t>
             </a:r>
             <a:endParaRPr lang="en-US" sz="1700" dirty="0"/>
           </a:p>
@@ -2298,13 +1792,13 @@
       </p:sp>
       <p:sp>
         <p:nvSpPr>
-          <p:cNvPr id="22" name="Benefit 4 text"/>
-          <p:cNvSpPr txBox="1"/>
-          <p:nvPr/>
-        </p:nvSpPr>
-        <p:spPr>
-          <a:xfrm>
-            <a:off x="804672" y="4617720"/>
+          <p:cNvPr id="12" name="Benefit 2 text"/>
+          <p:cNvSpPr txBox="1"/>
+          <p:nvPr/>
+        </p:nvSpPr>
+        <p:spPr>
+          <a:xfrm>
+            <a:off x="4594250" y="2423160"/>
             <a:ext cx="3003194" cy="822960"/>
           </a:xfrm>
           <a:prstGeom prst="rect">
@@ -2317,7 +1811,7 @@
           <a:bodyPr wrap="square" lIns="0" tIns="0" rIns="0" bIns="0" rtlCol="0" anchor="t"/>
           <a:lstStyle/>
           <a:p>
-            <a:pPr indent="0" marL="0">
+            <a:pPr marL="0" indent="0">
               <a:buNone/>
             </a:pPr>
             <a:r>
@@ -2326,7 +1820,7 @@
                   <a:schemeClr val="tx2"/>
                 </a:solidFill>
               </a:rPr>
-              <a:t>Dashboard and reports by GKK: members, ages, sacraments, ministries. Lists export to a spreadsheet.</a:t>
+              <a:t>A 5-step form in Bisaya. The family gets a reference number at once and can check its status online.</a:t>
             </a:r>
             <a:endParaRPr lang="en-US" sz="1350" dirty="0"/>
           </a:p>
@@ -2334,13 +1828,13 @@
       </p:sp>
       <p:sp>
         <p:nvSpPr>
-          <p:cNvPr id="23" name="Benefit 5 card"/>
+          <p:cNvPr id="13" name="Benefit 3 card"/>
           <p:cNvSpPr/>
           <p:nvPr/>
         </p:nvSpPr>
         <p:spPr>
           <a:xfrm>
-            <a:off x="4338218" y="3657600"/>
+            <a:off x="8127797" y="1463040"/>
             <a:ext cx="3515258" cy="1920240"/>
           </a:xfrm>
           <a:prstGeom prst="roundRect">
@@ -2361,13 +1855,13 @@
       </p:sp>
       <p:sp>
         <p:nvSpPr>
-          <p:cNvPr id="24" name="Benefit 5 icon circle"/>
+          <p:cNvPr id="14" name="Benefit 3 icon circle"/>
           <p:cNvSpPr/>
           <p:nvPr/>
         </p:nvSpPr>
         <p:spPr>
           <a:xfrm>
-            <a:off x="4594250" y="3913632"/>
+            <a:off x="8383829" y="1719072"/>
             <a:ext cx="566928" cy="566928"/>
           </a:xfrm>
           <a:prstGeom prst="ellipse">
@@ -2386,7 +1880,7 @@
       </p:sp>
       <p:pic>
         <p:nvPicPr>
-          <p:cNvPr id="25" name="Benefit 5 icon" descr="preencoded.png">    </p:cNvPr>
+          <p:cNvPr id="15" name="Benefit 3 icon" descr="preencoded.png"/>
           <p:cNvPicPr>
             <a:picLocks noChangeAspect="1"/>
           </p:cNvPicPr>
@@ -2400,7 +1894,7 @@
         </p:blipFill>
         <p:spPr>
           <a:xfrm>
-            <a:off x="4740554" y="4059936"/>
+            <a:off x="8530133" y="1865376"/>
             <a:ext cx="274320" cy="274320"/>
           </a:xfrm>
           <a:prstGeom prst="rect">
@@ -2410,13 +1904,13 @@
       </p:pic>
       <p:sp>
         <p:nvSpPr>
-          <p:cNvPr id="26" name="Benefit 5 heading"/>
-          <p:cNvSpPr txBox="1"/>
-          <p:nvPr/>
-        </p:nvSpPr>
-        <p:spPr>
-          <a:xfrm>
-            <a:off x="5298338" y="3913632"/>
+          <p:cNvPr id="16" name="Benefit 3 heading"/>
+          <p:cNvSpPr txBox="1"/>
+          <p:nvPr/>
+        </p:nvSpPr>
+        <p:spPr>
+          <a:xfrm>
+            <a:off x="9087917" y="1719072"/>
             <a:ext cx="2326538" cy="566928"/>
           </a:xfrm>
           <a:prstGeom prst="rect">
@@ -2429,7 +1923,7 @@
           <a:bodyPr wrap="square" lIns="0" tIns="0" rIns="0" bIns="0" rtlCol="0" anchor="ctr"/>
           <a:lstStyle/>
           <a:p>
-            <a:pPr indent="0" marL="0">
+            <a:pPr marL="0" indent="0">
               <a:buNone/>
             </a:pPr>
             <a:r>
@@ -2438,7 +1932,7 @@
                   <a:schemeClr val="tx1"/>
                 </a:solidFill>
               </a:rPr>
-              <a:t>A census without retyping</a:t>
+              <a:t>Checked before it counts</a:t>
             </a:r>
             <a:endParaRPr lang="en-US" sz="1700" dirty="0"/>
           </a:p>
@@ -2446,13 +1940,13 @@
       </p:sp>
       <p:sp>
         <p:nvSpPr>
-          <p:cNvPr id="27" name="Benefit 5 text"/>
-          <p:cNvSpPr txBox="1"/>
-          <p:nvPr/>
-        </p:nvSpPr>
-        <p:spPr>
-          <a:xfrm>
-            <a:off x="4594250" y="4617720"/>
+          <p:cNvPr id="17" name="Benefit 3 text"/>
+          <p:cNvSpPr txBox="1"/>
+          <p:nvPr/>
+        </p:nvSpPr>
+        <p:spPr>
+          <a:xfrm>
+            <a:off x="8383829" y="2423160"/>
             <a:ext cx="3003194" cy="822960"/>
           </a:xfrm>
           <a:prstGeom prst="rect">
@@ -2465,7 +1959,7 @@
           <a:bodyPr wrap="square" lIns="0" tIns="0" rIns="0" bIns="0" rtlCol="0" anchor="t"/>
           <a:lstStyle/>
           <a:p>
-            <a:pPr indent="0" marL="0">
+            <a:pPr marL="0" indent="0">
               <a:buNone/>
             </a:pPr>
             <a:r>
@@ -2474,7 +1968,7 @@
                   <a:schemeClr val="tx2"/>
                 </a:solidFill>
               </a:rPr>
-              <a:t>Forms print pre-filled per household. Families can also answer online, and staff approve each update.</a:t>
+              <a:t>Staff verify every registration. Possible duplicates are flagged, and sacraments can be confirmed against the parish register.</a:t>
             </a:r>
             <a:endParaRPr lang="en-US" sz="1350" dirty="0"/>
           </a:p>
@@ -2482,13 +1976,13 @@
       </p:sp>
       <p:sp>
         <p:nvSpPr>
-          <p:cNvPr id="28" name="Benefit 6 card"/>
+          <p:cNvPr id="18" name="Benefit 4 card"/>
           <p:cNvSpPr/>
           <p:nvPr/>
         </p:nvSpPr>
         <p:spPr>
           <a:xfrm>
-            <a:off x="8127797" y="3657600"/>
+            <a:off x="548640" y="3657600"/>
             <a:ext cx="3515258" cy="1920240"/>
           </a:xfrm>
           <a:prstGeom prst="roundRect">
@@ -2509,13 +2003,13 @@
       </p:sp>
       <p:sp>
         <p:nvSpPr>
-          <p:cNvPr id="29" name="Benefit 6 icon circle"/>
+          <p:cNvPr id="19" name="Benefit 4 icon circle"/>
           <p:cNvSpPr/>
           <p:nvPr/>
         </p:nvSpPr>
         <p:spPr>
           <a:xfrm>
-            <a:off x="8383829" y="3913632"/>
+            <a:off x="804672" y="3913632"/>
             <a:ext cx="566928" cy="566928"/>
           </a:xfrm>
           <a:prstGeom prst="ellipse">
@@ -2534,7 +2028,7 @@
       </p:sp>
       <p:pic>
         <p:nvPicPr>
-          <p:cNvPr id="30" name="Benefit 6 icon" descr="preencoded.png">    </p:cNvPr>
+          <p:cNvPr id="20" name="Benefit 4 icon" descr="preencoded.png"/>
           <p:cNvPicPr>
             <a:picLocks noChangeAspect="1"/>
           </p:cNvPicPr>
@@ -2548,6 +2042,302 @@
         </p:blipFill>
         <p:spPr>
           <a:xfrm>
+            <a:off x="950976" y="4059936"/>
+            <a:ext cx="274320" cy="274320"/>
+          </a:xfrm>
+          <a:prstGeom prst="rect">
+            <a:avLst/>
+          </a:prstGeom>
+        </p:spPr>
+      </p:pic>
+      <p:sp>
+        <p:nvSpPr>
+          <p:cNvPr id="21" name="Benefit 4 heading"/>
+          <p:cNvSpPr txBox="1"/>
+          <p:nvPr/>
+        </p:nvSpPr>
+        <p:spPr>
+          <a:xfrm>
+            <a:off x="1508760" y="3913632"/>
+            <a:ext cx="2326538" cy="566928"/>
+          </a:xfrm>
+          <a:prstGeom prst="rect">
+            <a:avLst/>
+          </a:prstGeom>
+          <a:noFill/>
+          <a:ln/>
+        </p:spPr>
+        <p:txBody>
+          <a:bodyPr wrap="square" lIns="0" tIns="0" rIns="0" bIns="0" rtlCol="0" anchor="ctr"/>
+          <a:lstStyle/>
+          <a:p>
+            <a:pPr marL="0" indent="0">
+              <a:buNone/>
+            </a:pPr>
+            <a:r>
+              <a:rPr lang="en-US" sz="1700" b="1" dirty="0">
+                <a:solidFill>
+                  <a:schemeClr val="tx1"/>
+                </a:solidFill>
+              </a:rPr>
+              <a:t>Parish numbers in seconds</a:t>
+            </a:r>
+            <a:endParaRPr lang="en-US" sz="1700" dirty="0"/>
+          </a:p>
+        </p:txBody>
+      </p:sp>
+      <p:sp>
+        <p:nvSpPr>
+          <p:cNvPr id="22" name="Benefit 4 text"/>
+          <p:cNvSpPr txBox="1"/>
+          <p:nvPr/>
+        </p:nvSpPr>
+        <p:spPr>
+          <a:xfrm>
+            <a:off x="804672" y="4617720"/>
+            <a:ext cx="3003194" cy="822960"/>
+          </a:xfrm>
+          <a:prstGeom prst="rect">
+            <a:avLst/>
+          </a:prstGeom>
+          <a:noFill/>
+          <a:ln/>
+        </p:spPr>
+        <p:txBody>
+          <a:bodyPr wrap="square" lIns="0" tIns="0" rIns="0" bIns="0" rtlCol="0" anchor="t"/>
+          <a:lstStyle/>
+          <a:p>
+            <a:pPr marL="0" indent="0">
+              <a:buNone/>
+            </a:pPr>
+            <a:r>
+              <a:rPr lang="en-US" sz="1350" dirty="0">
+                <a:solidFill>
+                  <a:schemeClr val="tx2"/>
+                </a:solidFill>
+              </a:rPr>
+              <a:t>Dashboard and reports by GKK: members, ages, sacraments, ministries. Lists export to a spreadsheet.</a:t>
+            </a:r>
+            <a:endParaRPr lang="en-US" sz="1350" dirty="0"/>
+          </a:p>
+        </p:txBody>
+      </p:sp>
+      <p:sp>
+        <p:nvSpPr>
+          <p:cNvPr id="23" name="Benefit 5 card"/>
+          <p:cNvSpPr/>
+          <p:nvPr/>
+        </p:nvSpPr>
+        <p:spPr>
+          <a:xfrm>
+            <a:off x="4338218" y="3657600"/>
+            <a:ext cx="3515258" cy="1920240"/>
+          </a:xfrm>
+          <a:prstGeom prst="roundRect">
+            <a:avLst>
+              <a:gd name="adj" fmla="val 5714"/>
+            </a:avLst>
+          </a:prstGeom>
+          <a:solidFill>
+            <a:schemeClr val="bg2"/>
+          </a:solidFill>
+          <a:ln w="12700">
+            <a:solidFill>
+              <a:schemeClr val="bg2"/>
+            </a:solidFill>
+            <a:prstDash val="solid"/>
+          </a:ln>
+        </p:spPr>
+      </p:sp>
+      <p:sp>
+        <p:nvSpPr>
+          <p:cNvPr id="24" name="Benefit 5 icon circle"/>
+          <p:cNvSpPr/>
+          <p:nvPr/>
+        </p:nvSpPr>
+        <p:spPr>
+          <a:xfrm>
+            <a:off x="4594250" y="3913632"/>
+            <a:ext cx="566928" cy="566928"/>
+          </a:xfrm>
+          <a:prstGeom prst="ellipse">
+            <a:avLst/>
+          </a:prstGeom>
+          <a:solidFill>
+            <a:schemeClr val="accent1"/>
+          </a:solidFill>
+          <a:ln w="12700">
+            <a:solidFill>
+              <a:schemeClr val="accent1"/>
+            </a:solidFill>
+            <a:prstDash val="solid"/>
+          </a:ln>
+        </p:spPr>
+      </p:sp>
+      <p:pic>
+        <p:nvPicPr>
+          <p:cNvPr id="25" name="Benefit 5 icon" descr="preencoded.png"/>
+          <p:cNvPicPr>
+            <a:picLocks noChangeAspect="1"/>
+          </p:cNvPicPr>
+          <p:nvPr/>
+        </p:nvPicPr>
+        <p:blipFill>
+          <a:blip r:embed="rId7"/>
+          <a:stretch>
+            <a:fillRect/>
+          </a:stretch>
+        </p:blipFill>
+        <p:spPr>
+          <a:xfrm>
+            <a:off x="4740554" y="4059936"/>
+            <a:ext cx="274320" cy="274320"/>
+          </a:xfrm>
+          <a:prstGeom prst="rect">
+            <a:avLst/>
+          </a:prstGeom>
+        </p:spPr>
+      </p:pic>
+      <p:sp>
+        <p:nvSpPr>
+          <p:cNvPr id="26" name="Benefit 5 heading"/>
+          <p:cNvSpPr txBox="1"/>
+          <p:nvPr/>
+        </p:nvSpPr>
+        <p:spPr>
+          <a:xfrm>
+            <a:off x="5298338" y="3913632"/>
+            <a:ext cx="2326538" cy="566928"/>
+          </a:xfrm>
+          <a:prstGeom prst="rect">
+            <a:avLst/>
+          </a:prstGeom>
+          <a:noFill/>
+          <a:ln/>
+        </p:spPr>
+        <p:txBody>
+          <a:bodyPr wrap="square" lIns="0" tIns="0" rIns="0" bIns="0" rtlCol="0" anchor="ctr"/>
+          <a:lstStyle/>
+          <a:p>
+            <a:pPr marL="0" indent="0">
+              <a:buNone/>
+            </a:pPr>
+            <a:r>
+              <a:rPr lang="en-US" sz="1700" b="1" dirty="0">
+                <a:solidFill>
+                  <a:schemeClr val="tx1"/>
+                </a:solidFill>
+              </a:rPr>
+              <a:t>A census without retyping</a:t>
+            </a:r>
+            <a:endParaRPr lang="en-US" sz="1700" dirty="0"/>
+          </a:p>
+        </p:txBody>
+      </p:sp>
+      <p:sp>
+        <p:nvSpPr>
+          <p:cNvPr id="27" name="Benefit 5 text"/>
+          <p:cNvSpPr txBox="1"/>
+          <p:nvPr/>
+        </p:nvSpPr>
+        <p:spPr>
+          <a:xfrm>
+            <a:off x="4594250" y="4617720"/>
+            <a:ext cx="3003194" cy="822960"/>
+          </a:xfrm>
+          <a:prstGeom prst="rect">
+            <a:avLst/>
+          </a:prstGeom>
+          <a:noFill/>
+          <a:ln/>
+        </p:spPr>
+        <p:txBody>
+          <a:bodyPr wrap="square" lIns="0" tIns="0" rIns="0" bIns="0" rtlCol="0" anchor="t"/>
+          <a:lstStyle/>
+          <a:p>
+            <a:pPr marL="0" indent="0">
+              <a:buNone/>
+            </a:pPr>
+            <a:r>
+              <a:rPr lang="en-US" sz="1350" dirty="0">
+                <a:solidFill>
+                  <a:schemeClr val="tx2"/>
+                </a:solidFill>
+              </a:rPr>
+              <a:t>Forms print pre-filled per household. Families can also answer online, and staff approve each update.</a:t>
+            </a:r>
+            <a:endParaRPr lang="en-US" sz="1350" dirty="0"/>
+          </a:p>
+        </p:txBody>
+      </p:sp>
+      <p:sp>
+        <p:nvSpPr>
+          <p:cNvPr id="28" name="Benefit 6 card"/>
+          <p:cNvSpPr/>
+          <p:nvPr/>
+        </p:nvSpPr>
+        <p:spPr>
+          <a:xfrm>
+            <a:off x="8127797" y="3657600"/>
+            <a:ext cx="3515258" cy="1920240"/>
+          </a:xfrm>
+          <a:prstGeom prst="roundRect">
+            <a:avLst>
+              <a:gd name="adj" fmla="val 5714"/>
+            </a:avLst>
+          </a:prstGeom>
+          <a:solidFill>
+            <a:schemeClr val="bg2"/>
+          </a:solidFill>
+          <a:ln w="12700">
+            <a:solidFill>
+              <a:schemeClr val="bg2"/>
+            </a:solidFill>
+            <a:prstDash val="solid"/>
+          </a:ln>
+        </p:spPr>
+      </p:sp>
+      <p:sp>
+        <p:nvSpPr>
+          <p:cNvPr id="29" name="Benefit 6 icon circle"/>
+          <p:cNvSpPr/>
+          <p:nvPr/>
+        </p:nvSpPr>
+        <p:spPr>
+          <a:xfrm>
+            <a:off x="8383829" y="3913632"/>
+            <a:ext cx="566928" cy="566928"/>
+          </a:xfrm>
+          <a:prstGeom prst="ellipse">
+            <a:avLst/>
+          </a:prstGeom>
+          <a:solidFill>
+            <a:schemeClr val="accent1"/>
+          </a:solidFill>
+          <a:ln w="12700">
+            <a:solidFill>
+              <a:schemeClr val="accent1"/>
+            </a:solidFill>
+            <a:prstDash val="solid"/>
+          </a:ln>
+        </p:spPr>
+      </p:sp>
+      <p:pic>
+        <p:nvPicPr>
+          <p:cNvPr id="30" name="Benefit 6 icon" descr="preencoded.png"/>
+          <p:cNvPicPr>
+            <a:picLocks noChangeAspect="1"/>
+          </p:cNvPicPr>
+          <p:nvPr/>
+        </p:nvPicPr>
+        <p:blipFill>
+          <a:blip r:embed="rId8"/>
+          <a:stretch>
+            <a:fillRect/>
+          </a:stretch>
+        </p:blipFill>
+        <p:spPr>
+          <a:xfrm>
             <a:off x="8530133" y="4059936"/>
             <a:ext cx="274320" cy="274320"/>
           </a:xfrm>
@@ -2577,7 +2367,7 @@
           <a:bodyPr wrap="square" lIns="0" tIns="0" rIns="0" bIns="0" rtlCol="0" anchor="ctr"/>
           <a:lstStyle/>
           <a:p>
-            <a:pPr indent="0" marL="0">
+            <a:pPr marL="0" indent="0">
               <a:buNone/>
             </a:pPr>
             <a:r>
@@ -2613,7 +2403,7 @@
           <a:bodyPr wrap="square" lIns="0" tIns="0" rIns="0" bIns="0" rtlCol="0" anchor="t"/>
           <a:lstStyle/>
           <a:p>
-            <a:pPr indent="0" marL="0">
+            <a:pPr marL="0" indent="0">
               <a:buNone/>
             </a:pPr>
             <a:r>
@@ -2649,7 +2439,7 @@
           <a:bodyPr wrap="square" lIns="0" tIns="0" rIns="0" bIns="0" rtlCol="0" anchor="ctr"/>
           <a:lstStyle/>
           <a:p>
-            <a:pPr indent="0" marL="0">
+            <a:pPr marL="0" indent="0">
               <a:buNone/>
             </a:pPr>
             <a:r>
@@ -2660,9 +2450,6 @@
               </a:rPr>
               <a:t>Also included:  </a:t>
             </a:r>
-            <a:pPr indent="0" marL="0">
-              <a:buNone/>
-            </a:pPr>
             <a:r>
               <a:rPr lang="en-US" sz="1300" dirty="0">
                 <a:solidFill>
@@ -2677,7 +2464,7 @@
       </p:sp>
       <p:sp>
         <p:nvSpPr>
-          <p:cNvPr id="25" name="Slide Number Placeholder 0"/>
+          <p:cNvPr id="34" name="Slide Number Placeholder 0"/>
           <p:cNvSpPr>
             <a:spLocks noGrp="1"/>
           </p:cNvSpPr>
@@ -2695,7 +2482,7 @@
           </a:prstGeom>
           <a:extLst>
             <a:ext uri="{C572A759-6A51-4108-AA02-DFA0A04FC94B}">
-              <ma14:wrappingTextBoxFlag xmlns:ma14="http://schemas.microsoft.com/office/mac/drawingml/2011/main" val="0"/>
+              <ma14:wrappingTextBoxFlag xmlns:ma14="http://schemas.microsoft.com/office/mac/drawingml/2011/main" xmlns="" val="0"/>
             </a:ext>
           </a:extLst>
         </p:spPr>
@@ -2713,7 +2500,7 @@
           <a:p>
             <a:pPr algn="r"/>
             <a:fld id="{F7021451-1387-4CA6-816F-3879F97B5CBC}" type="slidenum">
-              <a:rPr b="0" lang="en-US"/>
+              <a:rPr lang="en-US" b="0"/>
               <a:t>2</a:t>
             </a:fld>
             <a:endParaRPr lang="en-US"/>
@@ -2729,6 +2516,1562 @@
 </file>
 
 <file path=ppt/slides/slide3.xml><?xml version="1.0" encoding="utf-8"?>
+<p:sld xmlns:a="http://schemas.openxmlformats.org/drawingml/2006/main" xmlns:r="http://schemas.openxmlformats.org/officeDocument/2006/relationships" xmlns:p="http://schemas.openxmlformats.org/presentationml/2006/main">
+  <p:cSld name="Slide 4">
+    <p:spTree>
+      <p:nvGrpSpPr>
+        <p:cNvPr id="1" name=""/>
+        <p:cNvGrpSpPr/>
+        <p:nvPr/>
+      </p:nvGrpSpPr>
+      <p:grpSpPr>
+        <a:xfrm>
+          <a:off x="0" y="0"/>
+          <a:ext cx="0" cy="0"/>
+          <a:chOff x="0" y="0"/>
+          <a:chExt cx="0" cy="0"/>
+        </a:xfrm>
+      </p:grpSpPr>
+      <p:sp>
+        <p:nvSpPr>
+          <p:cNvPr id="2" name="Text 0"/>
+          <p:cNvSpPr>
+            <a:spLocks noGrp="1"/>
+          </p:cNvSpPr>
+          <p:nvPr>
+            <p:ph type="title" idx="100" hasCustomPrompt="1"/>
+          </p:nvPr>
+        </p:nvSpPr>
+        <p:spPr>
+          <a:xfrm>
+            <a:off x="548640" y="411480"/>
+            <a:ext cx="11094415" cy="777240"/>
+          </a:xfrm>
+          <a:prstGeom prst="rect">
+            <a:avLst/>
+          </a:prstGeom>
+          <a:noFill/>
+          <a:ln/>
+        </p:spPr>
+        <p:txBody>
+          <a:bodyPr wrap="square" lIns="0" tIns="0" rIns="0" bIns="0" rtlCol="0" anchor="ctr"/>
+          <a:lstStyle/>
+          <a:p>
+            <a:pPr marL="0" indent="0" algn="l">
+              <a:buNone/>
+            </a:pPr>
+            <a:r>
+              <a:rPr lang="en-US" sz="3400" b="1" dirty="0">
+                <a:solidFill>
+                  <a:schemeClr val="tx1"/>
+                </a:solidFill>
+              </a:rPr>
+              <a:t>How the parish census runs</a:t>
+            </a:r>
+            <a:endParaRPr lang="en-US" sz="3400" dirty="0"/>
+          </a:p>
+        </p:txBody>
+      </p:sp>
+      <p:sp>
+        <p:nvSpPr>
+          <p:cNvPr id="3" name="Census 1 card"/>
+          <p:cNvSpPr/>
+          <p:nvPr/>
+        </p:nvSpPr>
+        <p:spPr>
+          <a:xfrm>
+            <a:off x="548640" y="1463040"/>
+            <a:ext cx="2377440" cy="2697480"/>
+          </a:xfrm>
+          <a:prstGeom prst="roundRect">
+            <a:avLst>
+              <a:gd name="adj" fmla="val 4615"/>
+            </a:avLst>
+          </a:prstGeom>
+          <a:solidFill>
+            <a:schemeClr val="bg2"/>
+          </a:solidFill>
+          <a:ln w="12700">
+            <a:solidFill>
+              <a:schemeClr val="bg2"/>
+            </a:solidFill>
+            <a:prstDash val="solid"/>
+          </a:ln>
+        </p:spPr>
+      </p:sp>
+      <p:sp>
+        <p:nvSpPr>
+          <p:cNvPr id="4" name="Census 1 dot"/>
+          <p:cNvSpPr/>
+          <p:nvPr/>
+        </p:nvSpPr>
+        <p:spPr>
+          <a:xfrm>
+            <a:off x="749808" y="1664208"/>
+            <a:ext cx="420624" cy="420624"/>
+          </a:xfrm>
+          <a:prstGeom prst="ellipse">
+            <a:avLst/>
+          </a:prstGeom>
+          <a:solidFill>
+            <a:schemeClr val="accent1"/>
+          </a:solidFill>
+          <a:ln w="12700">
+            <a:solidFill>
+              <a:schemeClr val="accent1"/>
+            </a:solidFill>
+            <a:prstDash val="solid"/>
+          </a:ln>
+        </p:spPr>
+      </p:sp>
+      <p:sp>
+        <p:nvSpPr>
+          <p:cNvPr id="5" name="Census 1 number"/>
+          <p:cNvSpPr txBox="1"/>
+          <p:nvPr/>
+        </p:nvSpPr>
+        <p:spPr>
+          <a:xfrm>
+            <a:off x="749808" y="1664208"/>
+            <a:ext cx="420624" cy="420624"/>
+          </a:xfrm>
+          <a:prstGeom prst="rect">
+            <a:avLst/>
+          </a:prstGeom>
+          <a:noFill/>
+          <a:ln/>
+        </p:spPr>
+        <p:txBody>
+          <a:bodyPr wrap="square" lIns="0" tIns="0" rIns="0" bIns="0" rtlCol="0" anchor="ctr"/>
+          <a:lstStyle/>
+          <a:p>
+            <a:pPr marL="0" indent="0" algn="ctr">
+              <a:buNone/>
+            </a:pPr>
+            <a:r>
+              <a:rPr lang="en-US" sz="1500" b="1" dirty="0">
+                <a:solidFill>
+                  <a:schemeClr val="bg1"/>
+                </a:solidFill>
+              </a:rPr>
+              <a:t>1</a:t>
+            </a:r>
+            <a:endParaRPr lang="en-US" sz="1500" dirty="0"/>
+          </a:p>
+        </p:txBody>
+      </p:sp>
+      <p:pic>
+        <p:nvPicPr>
+          <p:cNvPr id="6" name="Census 1 icon" descr="preencoded.png"/>
+          <p:cNvPicPr>
+            <a:picLocks noChangeAspect="1"/>
+          </p:cNvPicPr>
+          <p:nvPr/>
+        </p:nvPicPr>
+        <p:blipFill>
+          <a:blip r:embed="rId3"/>
+          <a:stretch>
+            <a:fillRect/>
+          </a:stretch>
+        </p:blipFill>
+        <p:spPr>
+          <a:xfrm>
+            <a:off x="2267712" y="1664208"/>
+            <a:ext cx="420624" cy="420624"/>
+          </a:xfrm>
+          <a:prstGeom prst="rect">
+            <a:avLst/>
+          </a:prstGeom>
+        </p:spPr>
+      </p:pic>
+      <p:sp>
+        <p:nvSpPr>
+          <p:cNvPr id="7" name="Census 1 heading"/>
+          <p:cNvSpPr txBox="1"/>
+          <p:nvPr/>
+        </p:nvSpPr>
+        <p:spPr>
+          <a:xfrm>
+            <a:off x="749808" y="2286000"/>
+            <a:ext cx="1975104" cy="365760"/>
+          </a:xfrm>
+          <a:prstGeom prst="rect">
+            <a:avLst/>
+          </a:prstGeom>
+          <a:noFill/>
+          <a:ln/>
+        </p:spPr>
+        <p:txBody>
+          <a:bodyPr wrap="square" lIns="0" tIns="0" rIns="0" bIns="0" rtlCol="0" anchor="t"/>
+          <a:lstStyle/>
+          <a:p>
+            <a:pPr marL="0" indent="0">
+              <a:buNone/>
+            </a:pPr>
+            <a:r>
+              <a:rPr lang="en-US" sz="1700" b="1" dirty="0">
+                <a:solidFill>
+                  <a:schemeClr val="tx1"/>
+                </a:solidFill>
+              </a:rPr>
+              <a:t>Staff start a census</a:t>
+            </a:r>
+            <a:endParaRPr lang="en-US" sz="1700" dirty="0"/>
+          </a:p>
+        </p:txBody>
+      </p:sp>
+      <p:sp>
+        <p:nvSpPr>
+          <p:cNvPr id="8" name="Census 1 text"/>
+          <p:cNvSpPr txBox="1"/>
+          <p:nvPr/>
+        </p:nvSpPr>
+        <p:spPr>
+          <a:xfrm>
+            <a:off x="749808" y="2761488"/>
+            <a:ext cx="1975104" cy="1234440"/>
+          </a:xfrm>
+          <a:prstGeom prst="rect">
+            <a:avLst/>
+          </a:prstGeom>
+          <a:noFill/>
+          <a:ln/>
+        </p:spPr>
+        <p:txBody>
+          <a:bodyPr wrap="square" lIns="0" tIns="0" rIns="0" bIns="0" rtlCol="0" anchor="t"/>
+          <a:lstStyle/>
+          <a:p>
+            <a:pPr marL="0" indent="0">
+              <a:buNone/>
+            </a:pPr>
+            <a:r>
+              <a:rPr lang="en-US" sz="1300" dirty="0">
+                <a:solidFill>
+                  <a:schemeClr val="tx2"/>
+                </a:solidFill>
+              </a:rPr>
+              <a:t>For example "2026 Census". The parish decides when: every year, every two years, or as needed.</a:t>
+            </a:r>
+            <a:br>
+              <a:rPr lang="en-US" sz="1300" dirty="0">
+                <a:solidFill>
+                  <a:schemeClr val="tx2"/>
+                </a:solidFill>
+              </a:rPr>
+            </a:br>
+            <a:r>
+              <a:rPr lang="en-US" sz="1300" b="1" dirty="0">
+                <a:solidFill>
+                  <a:schemeClr val="tx2"/>
+                </a:solidFill>
+              </a:rPr>
+              <a:t>Date Range: </a:t>
+            </a:r>
+            <a:r>
+              <a:rPr lang="en-US" sz="1300" dirty="0">
+                <a:solidFill>
+                  <a:schemeClr val="tx2"/>
+                </a:solidFill>
+              </a:rPr>
+              <a:t>(example)</a:t>
+            </a:r>
+            <a:br>
+              <a:rPr lang="en-US" sz="1300" dirty="0">
+                <a:solidFill>
+                  <a:schemeClr val="tx2"/>
+                </a:solidFill>
+              </a:rPr>
+            </a:br>
+            <a:r>
+              <a:rPr lang="en-US" sz="1300" b="1" dirty="0">
+                <a:solidFill>
+                  <a:schemeClr val="tx2"/>
+                </a:solidFill>
+              </a:rPr>
+              <a:t>October 05 – 30, 2026</a:t>
+            </a:r>
+            <a:endParaRPr lang="en-US" sz="1300" b="1" dirty="0"/>
+          </a:p>
+        </p:txBody>
+      </p:sp>
+      <p:sp>
+        <p:nvSpPr>
+          <p:cNvPr id="9" name="Census arrow 1"/>
+          <p:cNvSpPr/>
+          <p:nvPr/>
+        </p:nvSpPr>
+        <p:spPr>
+          <a:xfrm>
+            <a:off x="2999232" y="2674620"/>
+            <a:ext cx="173736" cy="274320"/>
+          </a:xfrm>
+          <a:prstGeom prst="chevron">
+            <a:avLst/>
+          </a:prstGeom>
+          <a:solidFill>
+            <a:schemeClr val="accent2"/>
+          </a:solidFill>
+          <a:ln w="12700">
+            <a:solidFill>
+              <a:schemeClr val="accent2"/>
+            </a:solidFill>
+            <a:prstDash val="solid"/>
+          </a:ln>
+        </p:spPr>
+      </p:sp>
+      <p:sp>
+        <p:nvSpPr>
+          <p:cNvPr id="10" name="Census 2 card"/>
+          <p:cNvSpPr/>
+          <p:nvPr/>
+        </p:nvSpPr>
+        <p:spPr>
+          <a:xfrm>
+            <a:off x="3246120" y="1463040"/>
+            <a:ext cx="2377440" cy="1485900"/>
+          </a:xfrm>
+          <a:prstGeom prst="roundRect">
+            <a:avLst>
+              <a:gd name="adj" fmla="val 4615"/>
+            </a:avLst>
+          </a:prstGeom>
+          <a:solidFill>
+            <a:schemeClr val="bg2"/>
+          </a:solidFill>
+          <a:ln w="12700">
+            <a:solidFill>
+              <a:schemeClr val="bg2"/>
+            </a:solidFill>
+            <a:prstDash val="solid"/>
+          </a:ln>
+        </p:spPr>
+      </p:sp>
+      <p:sp>
+        <p:nvSpPr>
+          <p:cNvPr id="11" name="Census 2 dot"/>
+          <p:cNvSpPr/>
+          <p:nvPr/>
+        </p:nvSpPr>
+        <p:spPr>
+          <a:xfrm>
+            <a:off x="3447288" y="1664208"/>
+            <a:ext cx="420624" cy="420624"/>
+          </a:xfrm>
+          <a:prstGeom prst="ellipse">
+            <a:avLst/>
+          </a:prstGeom>
+          <a:solidFill>
+            <a:schemeClr val="accent1"/>
+          </a:solidFill>
+          <a:ln w="12700">
+            <a:solidFill>
+              <a:schemeClr val="accent1"/>
+            </a:solidFill>
+            <a:prstDash val="solid"/>
+          </a:ln>
+        </p:spPr>
+      </p:sp>
+      <p:sp>
+        <p:nvSpPr>
+          <p:cNvPr id="12" name="Census 2 number"/>
+          <p:cNvSpPr txBox="1"/>
+          <p:nvPr/>
+        </p:nvSpPr>
+        <p:spPr>
+          <a:xfrm>
+            <a:off x="3447288" y="1665275"/>
+            <a:ext cx="420624" cy="420624"/>
+          </a:xfrm>
+          <a:prstGeom prst="rect">
+            <a:avLst/>
+          </a:prstGeom>
+          <a:noFill/>
+          <a:ln/>
+        </p:spPr>
+        <p:txBody>
+          <a:bodyPr wrap="square" lIns="0" tIns="0" rIns="0" bIns="0" rtlCol="0" anchor="ctr"/>
+          <a:lstStyle/>
+          <a:p>
+            <a:pPr marL="0" indent="0" algn="ctr">
+              <a:buNone/>
+            </a:pPr>
+            <a:r>
+              <a:rPr lang="en-US" sz="1500" b="1" dirty="0">
+                <a:solidFill>
+                  <a:schemeClr val="bg1"/>
+                </a:solidFill>
+              </a:rPr>
+              <a:t>2a</a:t>
+            </a:r>
+            <a:endParaRPr lang="en-US" sz="1500" dirty="0"/>
+          </a:p>
+        </p:txBody>
+      </p:sp>
+      <p:pic>
+        <p:nvPicPr>
+          <p:cNvPr id="13" name="Census 2 icon" descr="preencoded.png"/>
+          <p:cNvPicPr>
+            <a:picLocks noChangeAspect="1"/>
+          </p:cNvPicPr>
+          <p:nvPr/>
+        </p:nvPicPr>
+        <p:blipFill>
+          <a:blip r:embed="rId4"/>
+          <a:stretch>
+            <a:fillRect/>
+          </a:stretch>
+        </p:blipFill>
+        <p:spPr>
+          <a:xfrm>
+            <a:off x="5152644" y="1655278"/>
+            <a:ext cx="420624" cy="420624"/>
+          </a:xfrm>
+          <a:prstGeom prst="rect">
+            <a:avLst/>
+          </a:prstGeom>
+        </p:spPr>
+      </p:pic>
+      <p:sp>
+        <p:nvSpPr>
+          <p:cNvPr id="14" name="Census 2 heading"/>
+          <p:cNvSpPr txBox="1"/>
+          <p:nvPr/>
+        </p:nvSpPr>
+        <p:spPr>
+          <a:xfrm>
+            <a:off x="3962917" y="1604665"/>
+            <a:ext cx="1975104" cy="365760"/>
+          </a:xfrm>
+          <a:prstGeom prst="rect">
+            <a:avLst/>
+          </a:prstGeom>
+          <a:noFill/>
+          <a:ln/>
+        </p:spPr>
+        <p:txBody>
+          <a:bodyPr wrap="square" lIns="0" tIns="0" rIns="0" bIns="0" rtlCol="0" anchor="t"/>
+          <a:lstStyle/>
+          <a:p>
+            <a:pPr marL="0" indent="0">
+              <a:buNone/>
+            </a:pPr>
+            <a:r>
+              <a:rPr lang="en-US" b="1" dirty="0">
+                <a:solidFill>
+                  <a:schemeClr val="tx1"/>
+                </a:solidFill>
+              </a:rPr>
+              <a:t>Print forms </a:t>
+            </a:r>
+            <a:br>
+              <a:rPr lang="en-US" b="1" dirty="0">
+                <a:solidFill>
+                  <a:schemeClr val="tx1"/>
+                </a:solidFill>
+              </a:rPr>
+            </a:br>
+            <a:r>
+              <a:rPr lang="en-US" b="1" dirty="0">
+                <a:solidFill>
+                  <a:schemeClr val="tx1"/>
+                </a:solidFill>
+              </a:rPr>
+              <a:t>by GKK</a:t>
+            </a:r>
+            <a:endParaRPr lang="en-US" dirty="0"/>
+          </a:p>
+        </p:txBody>
+      </p:sp>
+      <p:sp>
+        <p:nvSpPr>
+          <p:cNvPr id="15" name="Census 2 text"/>
+          <p:cNvSpPr txBox="1"/>
+          <p:nvPr/>
+        </p:nvSpPr>
+        <p:spPr>
+          <a:xfrm>
+            <a:off x="3477587" y="2151019"/>
+            <a:ext cx="2045265" cy="810140"/>
+          </a:xfrm>
+          <a:prstGeom prst="rect">
+            <a:avLst/>
+          </a:prstGeom>
+          <a:noFill/>
+          <a:ln/>
+        </p:spPr>
+        <p:txBody>
+          <a:bodyPr wrap="square" lIns="0" tIns="0" rIns="0" bIns="0" rtlCol="0" anchor="t"/>
+          <a:lstStyle/>
+          <a:p>
+            <a:pPr marL="0" indent="0">
+              <a:buNone/>
+            </a:pPr>
+            <a:r>
+              <a:rPr lang="en-US" sz="1300" dirty="0">
+                <a:solidFill>
+                  <a:schemeClr val="tx2"/>
+                </a:solidFill>
+              </a:rPr>
+              <a:t>One page per household, pre-filled with what is on file, plus the family’s access code for the online portal.</a:t>
+            </a:r>
+            <a:endParaRPr lang="en-US" sz="1300" dirty="0"/>
+          </a:p>
+        </p:txBody>
+      </p:sp>
+      <p:sp>
+        <p:nvSpPr>
+          <p:cNvPr id="16" name="Census arrow 2"/>
+          <p:cNvSpPr/>
+          <p:nvPr/>
+        </p:nvSpPr>
+        <p:spPr>
+          <a:xfrm>
+            <a:off x="5696712" y="2674620"/>
+            <a:ext cx="173736" cy="274320"/>
+          </a:xfrm>
+          <a:prstGeom prst="chevron">
+            <a:avLst/>
+          </a:prstGeom>
+          <a:solidFill>
+            <a:schemeClr val="accent2"/>
+          </a:solidFill>
+          <a:ln w="12700">
+            <a:solidFill>
+              <a:schemeClr val="accent2"/>
+            </a:solidFill>
+            <a:prstDash val="solid"/>
+          </a:ln>
+        </p:spPr>
+      </p:sp>
+      <p:sp>
+        <p:nvSpPr>
+          <p:cNvPr id="17" name="Census 3a card"/>
+          <p:cNvSpPr/>
+          <p:nvPr/>
+        </p:nvSpPr>
+        <p:spPr>
+          <a:xfrm>
+            <a:off x="5943600" y="1463040"/>
+            <a:ext cx="3001975" cy="1234440"/>
+          </a:xfrm>
+          <a:prstGeom prst="roundRect">
+            <a:avLst>
+              <a:gd name="adj" fmla="val 8889"/>
+            </a:avLst>
+          </a:prstGeom>
+          <a:solidFill>
+            <a:schemeClr val="bg2"/>
+          </a:solidFill>
+          <a:ln w="12700">
+            <a:solidFill>
+              <a:schemeClr val="bg2"/>
+            </a:solidFill>
+            <a:prstDash val="solid"/>
+          </a:ln>
+        </p:spPr>
+      </p:sp>
+      <p:sp>
+        <p:nvSpPr>
+          <p:cNvPr id="18" name="Census 3a icon circle"/>
+          <p:cNvSpPr/>
+          <p:nvPr/>
+        </p:nvSpPr>
+        <p:spPr>
+          <a:xfrm>
+            <a:off x="6126480" y="1645920"/>
+            <a:ext cx="420624" cy="420624"/>
+          </a:xfrm>
+          <a:prstGeom prst="ellipse">
+            <a:avLst/>
+          </a:prstGeom>
+          <a:solidFill>
+            <a:schemeClr val="accent2"/>
+          </a:solidFill>
+          <a:ln w="12700">
+            <a:solidFill>
+              <a:schemeClr val="accent2"/>
+            </a:solidFill>
+            <a:prstDash val="solid"/>
+          </a:ln>
+        </p:spPr>
+      </p:sp>
+      <p:pic>
+        <p:nvPicPr>
+          <p:cNvPr id="19" name="Census 3a icon" descr="preencoded.png"/>
+          <p:cNvPicPr>
+            <a:picLocks noChangeAspect="1"/>
+          </p:cNvPicPr>
+          <p:nvPr/>
+        </p:nvPicPr>
+        <p:blipFill>
+          <a:blip r:embed="rId5"/>
+          <a:stretch>
+            <a:fillRect/>
+          </a:stretch>
+        </p:blipFill>
+        <p:spPr>
+          <a:xfrm>
+            <a:off x="6236208" y="1755648"/>
+            <a:ext cx="201168" cy="201168"/>
+          </a:xfrm>
+          <a:prstGeom prst="rect">
+            <a:avLst/>
+          </a:prstGeom>
+        </p:spPr>
+      </p:pic>
+      <p:sp>
+        <p:nvSpPr>
+          <p:cNvPr id="20" name="Census 3a heading"/>
+          <p:cNvSpPr txBox="1"/>
+          <p:nvPr/>
+        </p:nvSpPr>
+        <p:spPr>
+          <a:xfrm>
+            <a:off x="6675120" y="1645920"/>
+            <a:ext cx="2087575" cy="420624"/>
+          </a:xfrm>
+          <a:prstGeom prst="rect">
+            <a:avLst/>
+          </a:prstGeom>
+          <a:noFill/>
+          <a:ln/>
+        </p:spPr>
+        <p:txBody>
+          <a:bodyPr wrap="square" lIns="0" tIns="0" rIns="0" bIns="0" rtlCol="0" anchor="ctr"/>
+          <a:lstStyle/>
+          <a:p>
+            <a:pPr marL="0" indent="0">
+              <a:buNone/>
+            </a:pPr>
+            <a:r>
+              <a:rPr lang="en-US" sz="1550" b="1" dirty="0">
+                <a:solidFill>
+                  <a:schemeClr val="tx1"/>
+                </a:solidFill>
+              </a:rPr>
+              <a:t> On paper</a:t>
+            </a:r>
+            <a:endParaRPr lang="en-US" sz="1550" dirty="0"/>
+          </a:p>
+        </p:txBody>
+      </p:sp>
+      <p:sp>
+        <p:nvSpPr>
+          <p:cNvPr id="21" name="Census 3a text"/>
+          <p:cNvSpPr txBox="1"/>
+          <p:nvPr/>
+        </p:nvSpPr>
+        <p:spPr>
+          <a:xfrm>
+            <a:off x="6126480" y="2139696"/>
+            <a:ext cx="2636215" cy="466344"/>
+          </a:xfrm>
+          <a:prstGeom prst="rect">
+            <a:avLst/>
+          </a:prstGeom>
+          <a:noFill/>
+          <a:ln/>
+        </p:spPr>
+        <p:txBody>
+          <a:bodyPr wrap="square" lIns="0" tIns="0" rIns="0" bIns="0" rtlCol="0" anchor="t"/>
+          <a:lstStyle/>
+          <a:p>
+            <a:pPr marL="0" indent="0">
+              <a:buNone/>
+            </a:pPr>
+            <a:r>
+              <a:rPr lang="en-US" sz="1200" dirty="0">
+                <a:solidFill>
+                  <a:schemeClr val="tx2"/>
+                </a:solidFill>
+              </a:rPr>
+              <a:t>The family fills in the form. Staff record each member’s answers. </a:t>
+            </a:r>
+            <a:r>
+              <a:rPr lang="en-US" sz="1200" b="1" dirty="0">
+                <a:solidFill>
+                  <a:schemeClr val="tx2"/>
+                </a:solidFill>
+              </a:rPr>
+              <a:t>Then</a:t>
+            </a:r>
+            <a:r>
+              <a:rPr lang="en-US" sz="1200" dirty="0">
+                <a:solidFill>
+                  <a:schemeClr val="tx2"/>
+                </a:solidFill>
+              </a:rPr>
+              <a:t> </a:t>
+            </a:r>
+            <a:r>
+              <a:rPr lang="en-US" sz="1200" b="1" dirty="0">
+                <a:solidFill>
+                  <a:schemeClr val="tx2"/>
+                </a:solidFill>
+              </a:rPr>
+              <a:t>GKK Leaders can update the ONLINE CENSUS.</a:t>
+            </a:r>
+            <a:endParaRPr lang="en-US" sz="1200" b="1" dirty="0"/>
+          </a:p>
+        </p:txBody>
+      </p:sp>
+      <p:sp>
+        <p:nvSpPr>
+          <p:cNvPr id="22" name="Census 3b card"/>
+          <p:cNvSpPr/>
+          <p:nvPr/>
+        </p:nvSpPr>
+        <p:spPr>
+          <a:xfrm>
+            <a:off x="3246120" y="3058668"/>
+            <a:ext cx="5699455" cy="1101852"/>
+          </a:xfrm>
+          <a:prstGeom prst="roundRect">
+            <a:avLst>
+              <a:gd name="adj" fmla="val 8889"/>
+            </a:avLst>
+          </a:prstGeom>
+          <a:solidFill>
+            <a:schemeClr val="bg2"/>
+          </a:solidFill>
+          <a:ln w="12700">
+            <a:solidFill>
+              <a:schemeClr val="bg2"/>
+            </a:solidFill>
+            <a:prstDash val="solid"/>
+          </a:ln>
+        </p:spPr>
+      </p:sp>
+      <p:sp>
+        <p:nvSpPr>
+          <p:cNvPr id="25" name="Census 3b heading"/>
+          <p:cNvSpPr txBox="1"/>
+          <p:nvPr/>
+        </p:nvSpPr>
+        <p:spPr>
+          <a:xfrm>
+            <a:off x="3782873" y="3120838"/>
+            <a:ext cx="3547034" cy="420624"/>
+          </a:xfrm>
+          <a:prstGeom prst="rect">
+            <a:avLst/>
+          </a:prstGeom>
+          <a:noFill/>
+          <a:ln/>
+        </p:spPr>
+        <p:txBody>
+          <a:bodyPr wrap="square" lIns="0" tIns="0" rIns="0" bIns="0" rtlCol="0" anchor="ctr"/>
+          <a:lstStyle/>
+          <a:p>
+            <a:pPr marL="0" indent="0">
+              <a:buNone/>
+            </a:pPr>
+            <a:r>
+              <a:rPr lang="en-US" sz="1550" b="1" dirty="0">
+                <a:solidFill>
+                  <a:schemeClr val="tx1"/>
+                </a:solidFill>
+              </a:rPr>
+              <a:t>Online register/update of CENSUS Record</a:t>
+            </a:r>
+            <a:endParaRPr lang="en-US" sz="1550" dirty="0"/>
+          </a:p>
+        </p:txBody>
+      </p:sp>
+      <p:sp>
+        <p:nvSpPr>
+          <p:cNvPr id="26" name="Census 3b text"/>
+          <p:cNvSpPr txBox="1"/>
+          <p:nvPr/>
+        </p:nvSpPr>
+        <p:spPr>
+          <a:xfrm>
+            <a:off x="3831460" y="3609594"/>
+            <a:ext cx="2636215" cy="466344"/>
+          </a:xfrm>
+          <a:prstGeom prst="rect">
+            <a:avLst/>
+          </a:prstGeom>
+          <a:noFill/>
+          <a:ln/>
+        </p:spPr>
+        <p:txBody>
+          <a:bodyPr wrap="square" lIns="0" tIns="0" rIns="0" bIns="0" rtlCol="0" anchor="t"/>
+          <a:lstStyle/>
+          <a:p>
+            <a:pPr marL="0" indent="0">
+              <a:buNone/>
+            </a:pPr>
+            <a:r>
+              <a:rPr lang="en-US" sz="1200" dirty="0">
+                <a:solidFill>
+                  <a:schemeClr val="tx2"/>
+                </a:solidFill>
+              </a:rPr>
+              <a:t>The family signs in with its reference number and code; staff approve.</a:t>
+            </a:r>
+            <a:endParaRPr lang="en-US" sz="1200" dirty="0"/>
+          </a:p>
+        </p:txBody>
+      </p:sp>
+      <p:sp>
+        <p:nvSpPr>
+          <p:cNvPr id="27" name="Census arrow 3"/>
+          <p:cNvSpPr/>
+          <p:nvPr/>
+        </p:nvSpPr>
+        <p:spPr>
+          <a:xfrm>
+            <a:off x="9018727" y="2674620"/>
+            <a:ext cx="173736" cy="274320"/>
+          </a:xfrm>
+          <a:prstGeom prst="chevron">
+            <a:avLst/>
+          </a:prstGeom>
+          <a:solidFill>
+            <a:schemeClr val="accent2"/>
+          </a:solidFill>
+          <a:ln w="12700">
+            <a:solidFill>
+              <a:schemeClr val="accent2"/>
+            </a:solidFill>
+            <a:prstDash val="solid"/>
+          </a:ln>
+        </p:spPr>
+      </p:sp>
+      <p:sp>
+        <p:nvSpPr>
+          <p:cNvPr id="28" name="Census 4 card"/>
+          <p:cNvSpPr/>
+          <p:nvPr/>
+        </p:nvSpPr>
+        <p:spPr>
+          <a:xfrm>
+            <a:off x="9265615" y="1463040"/>
+            <a:ext cx="2377440" cy="2697480"/>
+          </a:xfrm>
+          <a:prstGeom prst="roundRect">
+            <a:avLst>
+              <a:gd name="adj" fmla="val 4615"/>
+            </a:avLst>
+          </a:prstGeom>
+          <a:solidFill>
+            <a:schemeClr val="bg2"/>
+          </a:solidFill>
+          <a:ln w="12700">
+            <a:solidFill>
+              <a:schemeClr val="bg2"/>
+            </a:solidFill>
+            <a:prstDash val="solid"/>
+          </a:ln>
+        </p:spPr>
+      </p:sp>
+      <p:sp>
+        <p:nvSpPr>
+          <p:cNvPr id="29" name="Census 4 dot"/>
+          <p:cNvSpPr/>
+          <p:nvPr/>
+        </p:nvSpPr>
+        <p:spPr>
+          <a:xfrm>
+            <a:off x="9466783" y="1664208"/>
+            <a:ext cx="420624" cy="420624"/>
+          </a:xfrm>
+          <a:prstGeom prst="ellipse">
+            <a:avLst/>
+          </a:prstGeom>
+          <a:solidFill>
+            <a:schemeClr val="accent1"/>
+          </a:solidFill>
+          <a:ln w="12700">
+            <a:solidFill>
+              <a:schemeClr val="accent1"/>
+            </a:solidFill>
+            <a:prstDash val="solid"/>
+          </a:ln>
+        </p:spPr>
+      </p:sp>
+      <p:sp>
+        <p:nvSpPr>
+          <p:cNvPr id="30" name="Census 4 number"/>
+          <p:cNvSpPr txBox="1"/>
+          <p:nvPr/>
+        </p:nvSpPr>
+        <p:spPr>
+          <a:xfrm>
+            <a:off x="9466783" y="1664208"/>
+            <a:ext cx="420624" cy="420624"/>
+          </a:xfrm>
+          <a:prstGeom prst="rect">
+            <a:avLst/>
+          </a:prstGeom>
+          <a:noFill/>
+          <a:ln/>
+        </p:spPr>
+        <p:txBody>
+          <a:bodyPr wrap="square" lIns="0" tIns="0" rIns="0" bIns="0" rtlCol="0" anchor="ctr"/>
+          <a:lstStyle/>
+          <a:p>
+            <a:pPr marL="0" indent="0" algn="ctr">
+              <a:buNone/>
+            </a:pPr>
+            <a:r>
+              <a:rPr lang="en-US" sz="1500" b="1" dirty="0">
+                <a:solidFill>
+                  <a:schemeClr val="bg1"/>
+                </a:solidFill>
+              </a:rPr>
+              <a:t>4</a:t>
+            </a:r>
+            <a:endParaRPr lang="en-US" sz="1500" dirty="0"/>
+          </a:p>
+        </p:txBody>
+      </p:sp>
+      <p:pic>
+        <p:nvPicPr>
+          <p:cNvPr id="31" name="Census 4 icon" descr="preencoded.png"/>
+          <p:cNvPicPr>
+            <a:picLocks noChangeAspect="1"/>
+          </p:cNvPicPr>
+          <p:nvPr/>
+        </p:nvPicPr>
+        <p:blipFill>
+          <a:blip r:embed="rId6"/>
+          <a:stretch>
+            <a:fillRect/>
+          </a:stretch>
+        </p:blipFill>
+        <p:spPr>
+          <a:xfrm>
+            <a:off x="10984687" y="1664208"/>
+            <a:ext cx="420624" cy="420624"/>
+          </a:xfrm>
+          <a:prstGeom prst="rect">
+            <a:avLst/>
+          </a:prstGeom>
+        </p:spPr>
+      </p:pic>
+      <p:sp>
+        <p:nvSpPr>
+          <p:cNvPr id="32" name="Census 4 heading"/>
+          <p:cNvSpPr txBox="1"/>
+          <p:nvPr/>
+        </p:nvSpPr>
+        <p:spPr>
+          <a:xfrm>
+            <a:off x="9466783" y="2286000"/>
+            <a:ext cx="1975104" cy="365760"/>
+          </a:xfrm>
+          <a:prstGeom prst="rect">
+            <a:avLst/>
+          </a:prstGeom>
+          <a:noFill/>
+          <a:ln/>
+        </p:spPr>
+        <p:txBody>
+          <a:bodyPr wrap="square" lIns="0" tIns="0" rIns="0" bIns="0" rtlCol="0" anchor="t"/>
+          <a:lstStyle/>
+          <a:p>
+            <a:pPr marL="0" indent="0">
+              <a:buNone/>
+            </a:pPr>
+            <a:r>
+              <a:rPr lang="en-US" sz="1700" b="1" dirty="0">
+                <a:solidFill>
+                  <a:schemeClr val="tx1"/>
+                </a:solidFill>
+              </a:rPr>
+              <a:t>Close and see results</a:t>
+            </a:r>
+            <a:endParaRPr lang="en-US" sz="1700" dirty="0"/>
+          </a:p>
+        </p:txBody>
+      </p:sp>
+      <p:sp>
+        <p:nvSpPr>
+          <p:cNvPr id="33" name="Census 4 text"/>
+          <p:cNvSpPr txBox="1"/>
+          <p:nvPr/>
+        </p:nvSpPr>
+        <p:spPr>
+          <a:xfrm>
+            <a:off x="9466783" y="2761488"/>
+            <a:ext cx="1975104" cy="1234440"/>
+          </a:xfrm>
+          <a:prstGeom prst="rect">
+            <a:avLst/>
+          </a:prstGeom>
+          <a:noFill/>
+          <a:ln/>
+        </p:spPr>
+        <p:txBody>
+          <a:bodyPr wrap="square" lIns="0" tIns="0" rIns="0" bIns="0" rtlCol="0" anchor="t"/>
+          <a:lstStyle/>
+          <a:p>
+            <a:pPr marL="0" indent="0">
+              <a:buNone/>
+            </a:pPr>
+            <a:r>
+              <a:rPr lang="en-US" sz="1300" dirty="0">
+                <a:solidFill>
+                  <a:schemeClr val="tx2"/>
+                </a:solidFill>
+              </a:rPr>
+              <a:t>Results by GKK. Members nobody confirmed are listed for follow-up. Closing changes no data.</a:t>
+            </a:r>
+            <a:endParaRPr lang="en-US" sz="1300" dirty="0"/>
+          </a:p>
+        </p:txBody>
+      </p:sp>
+      <p:sp>
+        <p:nvSpPr>
+          <p:cNvPr id="34" name="Status band"/>
+          <p:cNvSpPr/>
+          <p:nvPr/>
+        </p:nvSpPr>
+        <p:spPr>
+          <a:xfrm>
+            <a:off x="548640" y="4434840"/>
+            <a:ext cx="11094415" cy="960120"/>
+          </a:xfrm>
+          <a:prstGeom prst="roundRect">
+            <a:avLst>
+              <a:gd name="adj" fmla="val 11429"/>
+            </a:avLst>
+          </a:prstGeom>
+          <a:solidFill>
+            <a:schemeClr val="tx1"/>
+          </a:solidFill>
+          <a:ln w="12700">
+            <a:solidFill>
+              <a:schemeClr val="tx1"/>
+            </a:solidFill>
+            <a:prstDash val="solid"/>
+          </a:ln>
+        </p:spPr>
+      </p:sp>
+      <p:sp>
+        <p:nvSpPr>
+          <p:cNvPr id="35" name="Status band label"/>
+          <p:cNvSpPr txBox="1"/>
+          <p:nvPr/>
+        </p:nvSpPr>
+        <p:spPr>
+          <a:xfrm>
+            <a:off x="822960" y="4434840"/>
+            <a:ext cx="2743200" cy="960120"/>
+          </a:xfrm>
+          <a:prstGeom prst="rect">
+            <a:avLst/>
+          </a:prstGeom>
+          <a:noFill/>
+          <a:ln/>
+        </p:spPr>
+        <p:txBody>
+          <a:bodyPr wrap="square" lIns="0" tIns="0" rIns="0" bIns="0" rtlCol="0" anchor="ctr"/>
+          <a:lstStyle/>
+          <a:p>
+            <a:pPr marL="0" indent="0">
+              <a:buNone/>
+            </a:pPr>
+            <a:r>
+              <a:rPr lang="en-US" sz="1600" b="1" dirty="0">
+                <a:solidFill>
+                  <a:schemeClr val="bg1"/>
+                </a:solidFill>
+              </a:rPr>
+              <a:t>Every member gets a status</a:t>
+            </a:r>
+            <a:endParaRPr lang="en-US" sz="1600" dirty="0"/>
+          </a:p>
+        </p:txBody>
+      </p:sp>
+      <p:sp>
+        <p:nvSpPr>
+          <p:cNvPr id="36" name="Status chip 1"/>
+          <p:cNvSpPr/>
+          <p:nvPr/>
+        </p:nvSpPr>
+        <p:spPr>
+          <a:xfrm>
+            <a:off x="3657600" y="4690872"/>
+            <a:ext cx="1410553" cy="457200"/>
+          </a:xfrm>
+          <a:prstGeom prst="roundRect">
+            <a:avLst>
+              <a:gd name="adj" fmla="val 50000"/>
+            </a:avLst>
+          </a:prstGeom>
+          <a:solidFill>
+            <a:schemeClr val="bg1"/>
+          </a:solidFill>
+          <a:ln w="12700">
+            <a:solidFill>
+              <a:schemeClr val="bg1"/>
+            </a:solidFill>
+            <a:prstDash val="solid"/>
+          </a:ln>
+        </p:spPr>
+      </p:sp>
+      <p:sp>
+        <p:nvSpPr>
+          <p:cNvPr id="37" name="Status chip 1 text"/>
+          <p:cNvSpPr txBox="1"/>
+          <p:nvPr/>
+        </p:nvSpPr>
+        <p:spPr>
+          <a:xfrm>
+            <a:off x="3657600" y="4690872"/>
+            <a:ext cx="1410553" cy="457200"/>
+          </a:xfrm>
+          <a:prstGeom prst="rect">
+            <a:avLst/>
+          </a:prstGeom>
+          <a:noFill/>
+          <a:ln/>
+        </p:spPr>
+        <p:txBody>
+          <a:bodyPr wrap="square" lIns="0" tIns="0" rIns="0" bIns="0" rtlCol="0" anchor="ctr"/>
+          <a:lstStyle/>
+          <a:p>
+            <a:pPr marL="0" indent="0" algn="ctr">
+              <a:buNone/>
+            </a:pPr>
+            <a:r>
+              <a:rPr lang="en-US" sz="1350" b="1" dirty="0">
+                <a:solidFill>
+                  <a:schemeClr val="tx1"/>
+                </a:solidFill>
+              </a:rPr>
+              <a:t>Active</a:t>
+            </a:r>
+            <a:endParaRPr lang="en-US" sz="1350" dirty="0"/>
+          </a:p>
+        </p:txBody>
+      </p:sp>
+      <p:sp>
+        <p:nvSpPr>
+          <p:cNvPr id="38" name="Status chip 2"/>
+          <p:cNvSpPr/>
+          <p:nvPr/>
+        </p:nvSpPr>
+        <p:spPr>
+          <a:xfrm>
+            <a:off x="5232745" y="4690872"/>
+            <a:ext cx="1410553" cy="457200"/>
+          </a:xfrm>
+          <a:prstGeom prst="roundRect">
+            <a:avLst>
+              <a:gd name="adj" fmla="val 50000"/>
+            </a:avLst>
+          </a:prstGeom>
+          <a:solidFill>
+            <a:schemeClr val="bg1"/>
+          </a:solidFill>
+          <a:ln w="12700">
+            <a:solidFill>
+              <a:schemeClr val="bg1"/>
+            </a:solidFill>
+            <a:prstDash val="solid"/>
+          </a:ln>
+        </p:spPr>
+      </p:sp>
+      <p:sp>
+        <p:nvSpPr>
+          <p:cNvPr id="39" name="Status chip 2 text"/>
+          <p:cNvSpPr txBox="1"/>
+          <p:nvPr/>
+        </p:nvSpPr>
+        <p:spPr>
+          <a:xfrm>
+            <a:off x="5232745" y="4690872"/>
+            <a:ext cx="1410553" cy="457200"/>
+          </a:xfrm>
+          <a:prstGeom prst="rect">
+            <a:avLst/>
+          </a:prstGeom>
+          <a:noFill/>
+          <a:ln/>
+        </p:spPr>
+        <p:txBody>
+          <a:bodyPr wrap="square" lIns="0" tIns="0" rIns="0" bIns="0" rtlCol="0" anchor="ctr"/>
+          <a:lstStyle/>
+          <a:p>
+            <a:pPr marL="0" indent="0" algn="ctr">
+              <a:buNone/>
+            </a:pPr>
+            <a:r>
+              <a:rPr lang="en-US" sz="1350" b="1" dirty="0">
+                <a:solidFill>
+                  <a:schemeClr val="tx1"/>
+                </a:solidFill>
+              </a:rPr>
+              <a:t>Inactive</a:t>
+            </a:r>
+            <a:endParaRPr lang="en-US" sz="1350" dirty="0"/>
+          </a:p>
+        </p:txBody>
+      </p:sp>
+      <p:sp>
+        <p:nvSpPr>
+          <p:cNvPr id="40" name="Status chip 3"/>
+          <p:cNvSpPr/>
+          <p:nvPr/>
+        </p:nvSpPr>
+        <p:spPr>
+          <a:xfrm>
+            <a:off x="6807891" y="4690872"/>
+            <a:ext cx="1410553" cy="457200"/>
+          </a:xfrm>
+          <a:prstGeom prst="roundRect">
+            <a:avLst>
+              <a:gd name="adj" fmla="val 50000"/>
+            </a:avLst>
+          </a:prstGeom>
+          <a:solidFill>
+            <a:schemeClr val="bg1"/>
+          </a:solidFill>
+          <a:ln w="12700">
+            <a:solidFill>
+              <a:schemeClr val="bg1"/>
+            </a:solidFill>
+            <a:prstDash val="solid"/>
+          </a:ln>
+        </p:spPr>
+      </p:sp>
+      <p:sp>
+        <p:nvSpPr>
+          <p:cNvPr id="41" name="Status chip 3 text"/>
+          <p:cNvSpPr txBox="1"/>
+          <p:nvPr/>
+        </p:nvSpPr>
+        <p:spPr>
+          <a:xfrm>
+            <a:off x="6807891" y="4690872"/>
+            <a:ext cx="1410553" cy="457200"/>
+          </a:xfrm>
+          <a:prstGeom prst="rect">
+            <a:avLst/>
+          </a:prstGeom>
+          <a:noFill/>
+          <a:ln/>
+        </p:spPr>
+        <p:txBody>
+          <a:bodyPr wrap="square" lIns="0" tIns="0" rIns="0" bIns="0" rtlCol="0" anchor="ctr"/>
+          <a:lstStyle/>
+          <a:p>
+            <a:pPr marL="0" indent="0" algn="ctr">
+              <a:buNone/>
+            </a:pPr>
+            <a:r>
+              <a:rPr lang="en-US" sz="1350" b="1" dirty="0">
+                <a:solidFill>
+                  <a:schemeClr val="tx1"/>
+                </a:solidFill>
+              </a:rPr>
+              <a:t>Moved away</a:t>
+            </a:r>
+            <a:endParaRPr lang="en-US" sz="1350" dirty="0"/>
+          </a:p>
+        </p:txBody>
+      </p:sp>
+      <p:sp>
+        <p:nvSpPr>
+          <p:cNvPr id="42" name="Status chip 4"/>
+          <p:cNvSpPr/>
+          <p:nvPr/>
+        </p:nvSpPr>
+        <p:spPr>
+          <a:xfrm>
+            <a:off x="8383036" y="4690872"/>
+            <a:ext cx="1410553" cy="457200"/>
+          </a:xfrm>
+          <a:prstGeom prst="roundRect">
+            <a:avLst>
+              <a:gd name="adj" fmla="val 50000"/>
+            </a:avLst>
+          </a:prstGeom>
+          <a:solidFill>
+            <a:schemeClr val="bg1"/>
+          </a:solidFill>
+          <a:ln w="12700">
+            <a:solidFill>
+              <a:schemeClr val="bg1"/>
+            </a:solidFill>
+            <a:prstDash val="solid"/>
+          </a:ln>
+        </p:spPr>
+      </p:sp>
+      <p:sp>
+        <p:nvSpPr>
+          <p:cNvPr id="43" name="Status chip 4 text"/>
+          <p:cNvSpPr txBox="1"/>
+          <p:nvPr/>
+        </p:nvSpPr>
+        <p:spPr>
+          <a:xfrm>
+            <a:off x="8383036" y="4690872"/>
+            <a:ext cx="1410553" cy="457200"/>
+          </a:xfrm>
+          <a:prstGeom prst="rect">
+            <a:avLst/>
+          </a:prstGeom>
+          <a:noFill/>
+          <a:ln/>
+        </p:spPr>
+        <p:txBody>
+          <a:bodyPr wrap="square" lIns="0" tIns="0" rIns="0" bIns="0" rtlCol="0" anchor="ctr"/>
+          <a:lstStyle/>
+          <a:p>
+            <a:pPr marL="0" indent="0" algn="ctr">
+              <a:buNone/>
+            </a:pPr>
+            <a:r>
+              <a:rPr lang="en-US" sz="1350" b="1" dirty="0">
+                <a:solidFill>
+                  <a:schemeClr val="tx1"/>
+                </a:solidFill>
+              </a:rPr>
+              <a:t>Deceased</a:t>
+            </a:r>
+            <a:endParaRPr lang="en-US" sz="1350" dirty="0"/>
+          </a:p>
+        </p:txBody>
+      </p:sp>
+      <p:sp>
+        <p:nvSpPr>
+          <p:cNvPr id="44" name="Status chip 5"/>
+          <p:cNvSpPr/>
+          <p:nvPr/>
+        </p:nvSpPr>
+        <p:spPr>
+          <a:xfrm>
+            <a:off x="9958182" y="4690872"/>
+            <a:ext cx="1410553" cy="457200"/>
+          </a:xfrm>
+          <a:prstGeom prst="roundRect">
+            <a:avLst>
+              <a:gd name="adj" fmla="val 50000"/>
+            </a:avLst>
+          </a:prstGeom>
+          <a:solidFill>
+            <a:schemeClr val="bg1"/>
+          </a:solidFill>
+          <a:ln w="12700">
+            <a:solidFill>
+              <a:schemeClr val="bg1"/>
+            </a:solidFill>
+            <a:prstDash val="solid"/>
+          </a:ln>
+        </p:spPr>
+      </p:sp>
+      <p:sp>
+        <p:nvSpPr>
+          <p:cNvPr id="45" name="Status chip 5 text"/>
+          <p:cNvSpPr txBox="1"/>
+          <p:nvPr/>
+        </p:nvSpPr>
+        <p:spPr>
+          <a:xfrm>
+            <a:off x="9958182" y="4690872"/>
+            <a:ext cx="1410553" cy="457200"/>
+          </a:xfrm>
+          <a:prstGeom prst="rect">
+            <a:avLst/>
+          </a:prstGeom>
+          <a:noFill/>
+          <a:ln/>
+        </p:spPr>
+        <p:txBody>
+          <a:bodyPr wrap="square" lIns="0" tIns="0" rIns="0" bIns="0" rtlCol="0" anchor="ctr"/>
+          <a:lstStyle/>
+          <a:p>
+            <a:pPr marL="0" indent="0" algn="ctr">
+              <a:buNone/>
+            </a:pPr>
+            <a:r>
+              <a:rPr lang="en-US" sz="1350" b="1" dirty="0">
+                <a:solidFill>
+                  <a:schemeClr val="tx1"/>
+                </a:solidFill>
+              </a:rPr>
+              <a:t>Left the Church</a:t>
+            </a:r>
+            <a:endParaRPr lang="en-US" sz="1350" dirty="0"/>
+          </a:p>
+        </p:txBody>
+      </p:sp>
+      <p:sp>
+        <p:nvSpPr>
+          <p:cNvPr id="46" name="Safeguards note"/>
+          <p:cNvSpPr txBox="1"/>
+          <p:nvPr/>
+        </p:nvSpPr>
+        <p:spPr>
+          <a:xfrm>
+            <a:off x="548640" y="5669280"/>
+            <a:ext cx="11094415" cy="502920"/>
+          </a:xfrm>
+          <a:prstGeom prst="rect">
+            <a:avLst/>
+          </a:prstGeom>
+          <a:noFill/>
+          <a:ln/>
+        </p:spPr>
+        <p:txBody>
+          <a:bodyPr wrap="square" lIns="0" tIns="0" rIns="0" bIns="0" rtlCol="0" anchor="t"/>
+          <a:lstStyle/>
+          <a:p>
+            <a:pPr marL="0" indent="0">
+              <a:buNone/>
+            </a:pPr>
+            <a:r>
+              <a:rPr lang="en-US" sz="1300" b="1" dirty="0">
+                <a:solidFill>
+                  <a:schemeClr val="accent4"/>
+                </a:solidFill>
+              </a:rPr>
+              <a:t>Safeguards:  </a:t>
+            </a:r>
+            <a:r>
+              <a:rPr lang="en-US" sz="1300" dirty="0">
+                <a:solidFill>
+                  <a:schemeClr val="tx2"/>
+                </a:solidFill>
+              </a:rPr>
+              <a:t>nothing changes in the registry until staff save or approve  ·  five wrong codes lock a household’s sign-in for 15 minutes  ·  a lost form gets a new code</a:t>
+            </a:r>
+            <a:endParaRPr lang="en-US" sz="1300" dirty="0"/>
+          </a:p>
+        </p:txBody>
+      </p:sp>
+      <p:sp>
+        <p:nvSpPr>
+          <p:cNvPr id="47" name="Slide Number Placeholder 0"/>
+          <p:cNvSpPr>
+            <a:spLocks noGrp="1"/>
+          </p:cNvSpPr>
+          <p:nvPr>
+            <p:ph type="sldNum" sz="quarter" idx="4294967295"/>
+          </p:nvPr>
+        </p:nvSpPr>
+        <p:spPr>
+          <a:xfrm>
+            <a:off x="11094415" y="6382512"/>
+            <a:ext cx="548640" cy="274320"/>
+          </a:xfrm>
+          <a:prstGeom prst="rect">
+            <a:avLst/>
+          </a:prstGeom>
+          <a:extLst>
+            <a:ext uri="{C572A759-6A51-4108-AA02-DFA0A04FC94B}">
+              <ma14:wrappingTextBoxFlag xmlns:ma14="http://schemas.microsoft.com/office/mac/drawingml/2011/main" xmlns="" val="0"/>
+            </a:ext>
+          </a:extLst>
+        </p:spPr>
+        <p:txBody>
+          <a:bodyPr/>
+          <a:lstStyle>
+            <a:lvl1pPr>
+              <a:defRPr sz="1050">
+                <a:solidFill>
+                  <a:schemeClr val="tx2"/>
+                </a:solidFill>
+              </a:defRPr>
+            </a:lvl1pPr>
+          </a:lstStyle>
+          <a:p>
+            <a:pPr algn="r"/>
+            <a:fld id="{F7021451-1387-4CA6-816F-3879F97B5CBC}" type="slidenum">
+              <a:rPr lang="en-US" b="0"/>
+              <a:t>3</a:t>
+            </a:fld>
+            <a:endParaRPr lang="en-US"/>
+          </a:p>
+        </p:txBody>
+      </p:sp>
+      <p:sp>
+        <p:nvSpPr>
+          <p:cNvPr id="51" name="Census 2 dot">
+            <a:extLst>
+              <a:ext uri="{FF2B5EF4-FFF2-40B4-BE49-F238E27FC236}">
+                <a16:creationId xmlns:a16="http://schemas.microsoft.com/office/drawing/2014/main" id="{EE500DA8-429B-461D-9D40-67E1D36CA7CD}"/>
+              </a:ext>
+            </a:extLst>
+          </p:cNvPr>
+          <p:cNvSpPr/>
+          <p:nvPr/>
+        </p:nvSpPr>
+        <p:spPr>
+          <a:xfrm>
+            <a:off x="3267228" y="3120838"/>
+            <a:ext cx="420624" cy="420624"/>
+          </a:xfrm>
+          <a:prstGeom prst="ellipse">
+            <a:avLst/>
+          </a:prstGeom>
+          <a:solidFill>
+            <a:schemeClr val="accent1"/>
+          </a:solidFill>
+          <a:ln w="12700">
+            <a:solidFill>
+              <a:schemeClr val="accent1"/>
+            </a:solidFill>
+            <a:prstDash val="solid"/>
+          </a:ln>
+        </p:spPr>
+      </p:sp>
+      <p:sp>
+        <p:nvSpPr>
+          <p:cNvPr id="48" name="Census 2 number">
+            <a:extLst>
+              <a:ext uri="{FF2B5EF4-FFF2-40B4-BE49-F238E27FC236}">
+                <a16:creationId xmlns:a16="http://schemas.microsoft.com/office/drawing/2014/main" id="{0769BBE4-7C80-98F0-37DC-CADDFCF42088}"/>
+              </a:ext>
+            </a:extLst>
+          </p:cNvPr>
+          <p:cNvSpPr txBox="1"/>
+          <p:nvPr/>
+        </p:nvSpPr>
+        <p:spPr>
+          <a:xfrm>
+            <a:off x="3278124" y="3120838"/>
+            <a:ext cx="420624" cy="420624"/>
+          </a:xfrm>
+          <a:prstGeom prst="rect">
+            <a:avLst/>
+          </a:prstGeom>
+          <a:noFill/>
+          <a:ln/>
+        </p:spPr>
+        <p:txBody>
+          <a:bodyPr wrap="square" lIns="0" tIns="0" rIns="0" bIns="0" rtlCol="0" anchor="ctr"/>
+          <a:lstStyle/>
+          <a:p>
+            <a:pPr marL="0" indent="0" algn="ctr">
+              <a:buNone/>
+            </a:pPr>
+            <a:r>
+              <a:rPr lang="en-US" sz="1500" b="1" dirty="0">
+                <a:solidFill>
+                  <a:schemeClr val="bg1"/>
+                </a:solidFill>
+              </a:rPr>
+              <a:t>2b</a:t>
+            </a:r>
+            <a:endParaRPr lang="en-US" sz="1500" dirty="0"/>
+          </a:p>
+        </p:txBody>
+      </p:sp>
+    </p:spTree>
+  </p:cSld>
+  <p:clrMapOvr>
+    <a:masterClrMapping/>
+  </p:clrMapOvr>
+</p:sld>
+</file>
+
+<file path=ppt/slides/slide4.xml><?xml version="1.0" encoding="utf-8"?>
 <p:sld xmlns:a="http://schemas.openxmlformats.org/drawingml/2006/main" xmlns:r="http://schemas.openxmlformats.org/officeDocument/2006/relationships" xmlns:p="http://schemas.openxmlformats.org/presentationml/2006/main">
   <p:cSld name="Slide 3">
     <p:spTree>
@@ -2748,9 +4091,11 @@
       <p:sp>
         <p:nvSpPr>
           <p:cNvPr id="2" name="Text 0"/>
-          <p:cNvSpPr/>
+          <p:cNvSpPr>
+            <a:spLocks noGrp="1"/>
+          </p:cNvSpPr>
           <p:nvPr>
-            <p:ph idx="100" type="title" hasCustomPrompt="1"/>
+            <p:ph type="title" idx="100" hasCustomPrompt="1"/>
           </p:nvPr>
         </p:nvSpPr>
         <p:spPr>
@@ -2768,7 +4113,7 @@
           <a:bodyPr wrap="square" lIns="0" tIns="0" rIns="0" bIns="0" rtlCol="0" anchor="ctr"/>
           <a:lstStyle/>
           <a:p>
-            <a:pPr algn="l" indent="0" marL="0">
+            <a:pPr marL="0" indent="0" algn="l">
               <a:buNone/>
             </a:pPr>
             <a:r>
@@ -2804,11 +4149,11 @@
           <a:bodyPr wrap="square" lIns="0" tIns="0" rIns="0" bIns="0" rtlCol="0" anchor="ctr"/>
           <a:lstStyle/>
           <a:p>
-            <a:pPr indent="0" marL="0">
-              <a:buNone/>
-            </a:pPr>
-            <a:r>
-              <a:rPr lang="en-US" sz="1200" b="1" spc="200" kern="0" dirty="0">
+            <a:pPr marL="0" indent="0">
+              <a:buNone/>
+            </a:pPr>
+            <a:r>
+              <a:rPr lang="en-US" sz="1200" b="1" kern="0" spc="200" dirty="0">
                 <a:solidFill>
                   <a:schemeClr val="accent4"/>
                 </a:solidFill>
@@ -2892,7 +4237,7 @@
           <a:bodyPr wrap="square" lIns="0" tIns="0" rIns="0" bIns="0" rtlCol="0" anchor="ctr"/>
           <a:lstStyle/>
           <a:p>
-            <a:pPr algn="ctr" indent="0" marL="0">
+            <a:pPr marL="0" indent="0" algn="ctr">
               <a:buNone/>
             </a:pPr>
             <a:r>
@@ -2928,7 +4273,7 @@
           <a:bodyPr wrap="square" lIns="0" tIns="0" rIns="0" bIns="0" rtlCol="0" anchor="ctr"/>
           <a:lstStyle/>
           <a:p>
-            <a:pPr indent="0" marL="0">
+            <a:pPr marL="0" indent="0">
               <a:buNone/>
             </a:pPr>
             <a:r>
@@ -2964,7 +4309,7 @@
           <a:bodyPr wrap="square" lIns="0" tIns="0" rIns="0" bIns="0" rtlCol="0" anchor="t"/>
           <a:lstStyle/>
           <a:p>
-            <a:pPr indent="0" marL="0">
+            <a:pPr marL="0" indent="0">
               <a:buNone/>
             </a:pPr>
             <a:r>
@@ -3077,7 +4422,7 @@
           <a:bodyPr wrap="square" lIns="0" tIns="0" rIns="0" bIns="0" rtlCol="0" anchor="ctr"/>
           <a:lstStyle/>
           <a:p>
-            <a:pPr algn="ctr" indent="0" marL="0">
+            <a:pPr marL="0" indent="0" algn="ctr">
               <a:buNone/>
             </a:pPr>
             <a:r>
@@ -3113,7 +4458,7 @@
           <a:bodyPr wrap="square" lIns="0" tIns="0" rIns="0" bIns="0" rtlCol="0" anchor="ctr"/>
           <a:lstStyle/>
           <a:p>
-            <a:pPr indent="0" marL="0">
+            <a:pPr marL="0" indent="0">
               <a:buNone/>
             </a:pPr>
             <a:r>
@@ -3149,7 +4494,7 @@
           <a:bodyPr wrap="square" lIns="0" tIns="0" rIns="0" bIns="0" rtlCol="0" anchor="t"/>
           <a:lstStyle/>
           <a:p>
-            <a:pPr indent="0" marL="0">
+            <a:pPr marL="0" indent="0">
               <a:buNone/>
             </a:pPr>
             <a:r>
@@ -3262,7 +4607,7 @@
           <a:bodyPr wrap="square" lIns="0" tIns="0" rIns="0" bIns="0" rtlCol="0" anchor="ctr"/>
           <a:lstStyle/>
           <a:p>
-            <a:pPr algn="ctr" indent="0" marL="0">
+            <a:pPr marL="0" indent="0" algn="ctr">
               <a:buNone/>
             </a:pPr>
             <a:r>
@@ -3298,7 +4643,7 @@
           <a:bodyPr wrap="square" lIns="0" tIns="0" rIns="0" bIns="0" rtlCol="0" anchor="ctr"/>
           <a:lstStyle/>
           <a:p>
-            <a:pPr indent="0" marL="0">
+            <a:pPr marL="0" indent="0">
               <a:buNone/>
             </a:pPr>
             <a:r>
@@ -3334,7 +4679,7 @@
           <a:bodyPr wrap="square" lIns="0" tIns="0" rIns="0" bIns="0" rtlCol="0" anchor="t"/>
           <a:lstStyle/>
           <a:p>
-            <a:pPr indent="0" marL="0">
+            <a:pPr marL="0" indent="0">
               <a:buNone/>
             </a:pPr>
             <a:r>
@@ -3447,7 +4792,7 @@
           <a:bodyPr wrap="square" lIns="0" tIns="0" rIns="0" bIns="0" rtlCol="0" anchor="ctr"/>
           <a:lstStyle/>
           <a:p>
-            <a:pPr algn="ctr" indent="0" marL="0">
+            <a:pPr marL="0" indent="0" algn="ctr">
               <a:buNone/>
             </a:pPr>
             <a:r>
@@ -3483,7 +4828,7 @@
           <a:bodyPr wrap="square" lIns="0" tIns="0" rIns="0" bIns="0" rtlCol="0" anchor="ctr"/>
           <a:lstStyle/>
           <a:p>
-            <a:pPr indent="0" marL="0">
+            <a:pPr marL="0" indent="0">
               <a:buNone/>
             </a:pPr>
             <a:r>
@@ -3519,7 +4864,7 @@
           <a:bodyPr wrap="square" lIns="0" tIns="0" rIns="0" bIns="0" rtlCol="0" anchor="t"/>
           <a:lstStyle/>
           <a:p>
-            <a:pPr indent="0" marL="0">
+            <a:pPr marL="0" indent="0">
               <a:buNone/>
             </a:pPr>
             <a:r>
@@ -3632,7 +4977,7 @@
           <a:bodyPr wrap="square" lIns="0" tIns="0" rIns="0" bIns="0" rtlCol="0" anchor="ctr"/>
           <a:lstStyle/>
           <a:p>
-            <a:pPr algn="ctr" indent="0" marL="0">
+            <a:pPr marL="0" indent="0" algn="ctr">
               <a:buNone/>
             </a:pPr>
             <a:r>
@@ -3668,7 +5013,7 @@
           <a:bodyPr wrap="square" lIns="0" tIns="0" rIns="0" bIns="0" rtlCol="0" anchor="ctr"/>
           <a:lstStyle/>
           <a:p>
-            <a:pPr indent="0" marL="0">
+            <a:pPr marL="0" indent="0">
               <a:buNone/>
             </a:pPr>
             <a:r>
@@ -3704,7 +5049,7 @@
           <a:bodyPr wrap="square" lIns="0" tIns="0" rIns="0" bIns="0" rtlCol="0" anchor="t"/>
           <a:lstStyle/>
           <a:p>
-            <a:pPr indent="0" marL="0">
+            <a:pPr marL="0" indent="0">
               <a:buNone/>
             </a:pPr>
             <a:r>
@@ -3740,11 +5085,11 @@
           <a:bodyPr wrap="square" lIns="0" tIns="0" rIns="0" bIns="0" rtlCol="0" anchor="ctr"/>
           <a:lstStyle/>
           <a:p>
-            <a:pPr indent="0" marL="0">
-              <a:buNone/>
-            </a:pPr>
-            <a:r>
-              <a:rPr lang="en-US" sz="1200" b="1" spc="200" kern="0" dirty="0">
+            <a:pPr marL="0" indent="0">
+              <a:buNone/>
+            </a:pPr>
+            <a:r>
+              <a:rPr lang="en-US" sz="1200" b="1" kern="0" spc="200" dirty="0">
                 <a:solidFill>
                   <a:schemeClr val="accent4"/>
                 </a:solidFill>
@@ -3809,353 +5154,7 @@
       </p:sp>
       <p:pic>
         <p:nvPicPr>
-          <p:cNvPr id="36" name="After 1 icon" descr="preencoded.png">    </p:cNvPr>
-          <p:cNvPicPr>
-            <a:picLocks noChangeAspect="1"/>
-          </p:cNvPicPr>
-          <p:nvPr/>
-        </p:nvPicPr>
-        <p:blipFill>
-          <a:blip r:embed="rId1"/>
-          <a:stretch>
-            <a:fillRect/>
-          </a:stretch>
-        </p:blipFill>
-        <p:spPr>
-          <a:xfrm>
-            <a:off x="841248" y="4636008"/>
-            <a:ext cx="201168" cy="201168"/>
-          </a:xfrm>
-          <a:prstGeom prst="rect">
-            <a:avLst/>
-          </a:prstGeom>
-        </p:spPr>
-      </p:pic>
-      <p:sp>
-        <p:nvSpPr>
-          <p:cNvPr id="37" name="After 1 heading"/>
-          <p:cNvSpPr txBox="1"/>
-          <p:nvPr/>
-        </p:nvSpPr>
-        <p:spPr>
-          <a:xfrm>
-            <a:off x="1280160" y="4526280"/>
-            <a:ext cx="1619174" cy="420624"/>
-          </a:xfrm>
-          <a:prstGeom prst="rect">
-            <a:avLst/>
-          </a:prstGeom>
-          <a:noFill/>
-          <a:ln/>
-        </p:spPr>
-        <p:txBody>
-          <a:bodyPr wrap="square" lIns="0" tIns="0" rIns="0" bIns="0" rtlCol="0" anchor="ctr"/>
-          <a:lstStyle/>
-          <a:p>
-            <a:pPr indent="0" marL="0">
-              <a:buNone/>
-            </a:pPr>
-            <a:r>
-              <a:rPr lang="en-US" sz="1550" b="1" dirty="0">
-                <a:solidFill>
-                  <a:schemeClr val="tx1"/>
-                </a:solidFill>
-              </a:rPr>
-              <a:t>Reference number</a:t>
-            </a:r>
-            <a:endParaRPr lang="en-US" sz="1550" dirty="0"/>
-          </a:p>
-        </p:txBody>
-      </p:sp>
-      <p:sp>
-        <p:nvSpPr>
-          <p:cNvPr id="38" name="After 1 text"/>
-          <p:cNvSpPr txBox="1"/>
-          <p:nvPr/>
-        </p:nvSpPr>
-        <p:spPr>
-          <a:xfrm>
-            <a:off x="731520" y="5056632"/>
-            <a:ext cx="2167814" cy="566928"/>
-          </a:xfrm>
-          <a:prstGeom prst="rect">
-            <a:avLst/>
-          </a:prstGeom>
-          <a:noFill/>
-          <a:ln/>
-        </p:spPr>
-        <p:txBody>
-          <a:bodyPr wrap="square" lIns="0" tIns="0" rIns="0" bIns="0" rtlCol="0" anchor="t"/>
-          <a:lstStyle/>
-          <a:p>
-            <a:pPr indent="0" marL="0">
-              <a:buNone/>
-            </a:pPr>
-            <a:r>
-              <a:rPr lang="en-US" sz="1200" dirty="0">
-                <a:solidFill>
-                  <a:schemeClr val="tx2"/>
-                </a:solidFill>
-              </a:rPr>
-              <a:t>Shown at once (OLG-2026-…), with a confirmation slip the family can print.</a:t>
-            </a:r>
-            <a:endParaRPr lang="en-US" sz="1200" dirty="0"/>
-          </a:p>
-        </p:txBody>
-      </p:sp>
-      <p:sp>
-        <p:nvSpPr>
-          <p:cNvPr id="39" name="After 1 arrow"/>
-          <p:cNvSpPr/>
-          <p:nvPr/>
-        </p:nvSpPr>
-        <p:spPr>
-          <a:xfrm>
-            <a:off x="3155366" y="4869180"/>
-            <a:ext cx="173736" cy="274320"/>
-          </a:xfrm>
-          <a:prstGeom prst="chevron">
-            <a:avLst/>
-          </a:prstGeom>
-          <a:solidFill>
-            <a:schemeClr val="accent2"/>
-          </a:solidFill>
-          <a:ln w="12700">
-            <a:solidFill>
-              <a:schemeClr val="accent2"/>
-            </a:solidFill>
-            <a:prstDash val="solid"/>
-          </a:ln>
-        </p:spPr>
-      </p:sp>
-      <p:sp>
-        <p:nvSpPr>
-          <p:cNvPr id="40" name="After 2 card"/>
-          <p:cNvSpPr/>
-          <p:nvPr/>
-        </p:nvSpPr>
-        <p:spPr>
-          <a:xfrm>
-            <a:off x="3402254" y="4343400"/>
-            <a:ext cx="2533574" cy="1325880"/>
-          </a:xfrm>
-          <a:prstGeom prst="roundRect">
-            <a:avLst>
-              <a:gd name="adj" fmla="val 8276"/>
-            </a:avLst>
-          </a:prstGeom>
-          <a:solidFill>
-            <a:schemeClr val="bg2"/>
-          </a:solidFill>
-          <a:ln w="12700">
-            <a:solidFill>
-              <a:schemeClr val="bg2"/>
-            </a:solidFill>
-            <a:prstDash val="solid"/>
-          </a:ln>
-        </p:spPr>
-      </p:sp>
-      <p:sp>
-        <p:nvSpPr>
-          <p:cNvPr id="41" name="After 2 icon circle"/>
-          <p:cNvSpPr/>
-          <p:nvPr/>
-        </p:nvSpPr>
-        <p:spPr>
-          <a:xfrm>
-            <a:off x="3585134" y="4526280"/>
-            <a:ext cx="420624" cy="420624"/>
-          </a:xfrm>
-          <a:prstGeom prst="ellipse">
-            <a:avLst/>
-          </a:prstGeom>
-          <a:solidFill>
-            <a:schemeClr val="accent1"/>
-          </a:solidFill>
-          <a:ln w="12700">
-            <a:solidFill>
-              <a:schemeClr val="accent1"/>
-            </a:solidFill>
-            <a:prstDash val="solid"/>
-          </a:ln>
-        </p:spPr>
-      </p:sp>
-      <p:pic>
-        <p:nvPicPr>
-          <p:cNvPr id="42" name="After 2 icon" descr="preencoded.png">    </p:cNvPr>
-          <p:cNvPicPr>
-            <a:picLocks noChangeAspect="1"/>
-          </p:cNvPicPr>
-          <p:nvPr/>
-        </p:nvPicPr>
-        <p:blipFill>
-          <a:blip r:embed="rId2"/>
-          <a:stretch>
-            <a:fillRect/>
-          </a:stretch>
-        </p:blipFill>
-        <p:spPr>
-          <a:xfrm>
-            <a:off x="3694862" y="4636008"/>
-            <a:ext cx="201168" cy="201168"/>
-          </a:xfrm>
-          <a:prstGeom prst="rect">
-            <a:avLst/>
-          </a:prstGeom>
-        </p:spPr>
-      </p:pic>
-      <p:sp>
-        <p:nvSpPr>
-          <p:cNvPr id="43" name="After 2 heading"/>
-          <p:cNvSpPr txBox="1"/>
-          <p:nvPr/>
-        </p:nvSpPr>
-        <p:spPr>
-          <a:xfrm>
-            <a:off x="4133774" y="4526280"/>
-            <a:ext cx="1619174" cy="420624"/>
-          </a:xfrm>
-          <a:prstGeom prst="rect">
-            <a:avLst/>
-          </a:prstGeom>
-          <a:noFill/>
-          <a:ln/>
-        </p:spPr>
-        <p:txBody>
-          <a:bodyPr wrap="square" lIns="0" tIns="0" rIns="0" bIns="0" rtlCol="0" anchor="ctr"/>
-          <a:lstStyle/>
-          <a:p>
-            <a:pPr indent="0" marL="0">
-              <a:buNone/>
-            </a:pPr>
-            <a:r>
-              <a:rPr lang="en-US" sz="1550" b="1" dirty="0">
-                <a:solidFill>
-                  <a:schemeClr val="tx1"/>
-                </a:solidFill>
-              </a:rPr>
-              <a:t>Office queue</a:t>
-            </a:r>
-            <a:endParaRPr lang="en-US" sz="1550" dirty="0"/>
-          </a:p>
-        </p:txBody>
-      </p:sp>
-      <p:sp>
-        <p:nvSpPr>
-          <p:cNvPr id="44" name="After 2 text"/>
-          <p:cNvSpPr txBox="1"/>
-          <p:nvPr/>
-        </p:nvSpPr>
-        <p:spPr>
-          <a:xfrm>
-            <a:off x="3585134" y="5056632"/>
-            <a:ext cx="2167814" cy="566928"/>
-          </a:xfrm>
-          <a:prstGeom prst="rect">
-            <a:avLst/>
-          </a:prstGeom>
-          <a:noFill/>
-          <a:ln/>
-        </p:spPr>
-        <p:txBody>
-          <a:bodyPr wrap="square" lIns="0" tIns="0" rIns="0" bIns="0" rtlCol="0" anchor="t"/>
-          <a:lstStyle/>
-          <a:p>
-            <a:pPr indent="0" marL="0">
-              <a:buNone/>
-            </a:pPr>
-            <a:r>
-              <a:rPr lang="en-US" sz="1200" dirty="0">
-                <a:solidFill>
-                  <a:schemeClr val="tx2"/>
-                </a:solidFill>
-              </a:rPr>
-              <a:t>The household appears on the staff dashboard as awaiting verification.</a:t>
-            </a:r>
-            <a:endParaRPr lang="en-US" sz="1200" dirty="0"/>
-          </a:p>
-        </p:txBody>
-      </p:sp>
-      <p:sp>
-        <p:nvSpPr>
-          <p:cNvPr id="45" name="After 2 arrow"/>
-          <p:cNvSpPr/>
-          <p:nvPr/>
-        </p:nvSpPr>
-        <p:spPr>
-          <a:xfrm>
-            <a:off x="6008980" y="4869180"/>
-            <a:ext cx="173736" cy="274320"/>
-          </a:xfrm>
-          <a:prstGeom prst="chevron">
-            <a:avLst/>
-          </a:prstGeom>
-          <a:solidFill>
-            <a:schemeClr val="accent2"/>
-          </a:solidFill>
-          <a:ln w="12700">
-            <a:solidFill>
-              <a:schemeClr val="accent2"/>
-            </a:solidFill>
-            <a:prstDash val="solid"/>
-          </a:ln>
-        </p:spPr>
-      </p:sp>
-      <p:sp>
-        <p:nvSpPr>
-          <p:cNvPr id="46" name="After 3 card"/>
-          <p:cNvSpPr/>
-          <p:nvPr/>
-        </p:nvSpPr>
-        <p:spPr>
-          <a:xfrm>
-            <a:off x="6255868" y="4343400"/>
-            <a:ext cx="2533574" cy="1325880"/>
-          </a:xfrm>
-          <a:prstGeom prst="roundRect">
-            <a:avLst>
-              <a:gd name="adj" fmla="val 8276"/>
-            </a:avLst>
-          </a:prstGeom>
-          <a:solidFill>
-            <a:schemeClr val="bg2"/>
-          </a:solidFill>
-          <a:ln w="12700">
-            <a:solidFill>
-              <a:schemeClr val="bg2"/>
-            </a:solidFill>
-            <a:prstDash val="solid"/>
-          </a:ln>
-        </p:spPr>
-      </p:sp>
-      <p:sp>
-        <p:nvSpPr>
-          <p:cNvPr id="47" name="After 3 icon circle"/>
-          <p:cNvSpPr/>
-          <p:nvPr/>
-        </p:nvSpPr>
-        <p:spPr>
-          <a:xfrm>
-            <a:off x="6438748" y="4526280"/>
-            <a:ext cx="420624" cy="420624"/>
-          </a:xfrm>
-          <a:prstGeom prst="ellipse">
-            <a:avLst/>
-          </a:prstGeom>
-          <a:solidFill>
-            <a:schemeClr val="accent3"/>
-          </a:solidFill>
-          <a:ln w="12700">
-            <a:solidFill>
-              <a:schemeClr val="accent3"/>
-            </a:solidFill>
-            <a:prstDash val="solid"/>
-          </a:ln>
-        </p:spPr>
-      </p:sp>
-      <p:pic>
-        <p:nvPicPr>
-          <p:cNvPr id="48" name="After 3 icon" descr="preencoded.png">    </p:cNvPr>
+          <p:cNvPr id="36" name="After 1 icon" descr="preencoded.png"/>
           <p:cNvPicPr>
             <a:picLocks noChangeAspect="1"/>
           </p:cNvPicPr>
@@ -4169,7 +5168,7 @@
         </p:blipFill>
         <p:spPr>
           <a:xfrm>
-            <a:off x="6548476" y="4636008"/>
+            <a:off x="841248" y="4636008"/>
             <a:ext cx="201168" cy="201168"/>
           </a:xfrm>
           <a:prstGeom prst="rect">
@@ -4179,13 +5178,13 @@
       </p:pic>
       <p:sp>
         <p:nvSpPr>
-          <p:cNvPr id="49" name="After 3 heading"/>
-          <p:cNvSpPr txBox="1"/>
-          <p:nvPr/>
-        </p:nvSpPr>
-        <p:spPr>
-          <a:xfrm>
-            <a:off x="6987388" y="4526280"/>
+          <p:cNvPr id="37" name="After 1 heading"/>
+          <p:cNvSpPr txBox="1"/>
+          <p:nvPr/>
+        </p:nvSpPr>
+        <p:spPr>
+          <a:xfrm>
+            <a:off x="1280160" y="4526280"/>
             <a:ext cx="1619174" cy="420624"/>
           </a:xfrm>
           <a:prstGeom prst="rect">
@@ -4198,7 +5197,7 @@
           <a:bodyPr wrap="square" lIns="0" tIns="0" rIns="0" bIns="0" rtlCol="0" anchor="ctr"/>
           <a:lstStyle/>
           <a:p>
-            <a:pPr indent="0" marL="0">
+            <a:pPr marL="0" indent="0">
               <a:buNone/>
             </a:pPr>
             <a:r>
@@ -4207,7 +5206,7 @@
                   <a:schemeClr val="tx1"/>
                 </a:solidFill>
               </a:rPr>
-              <a:t>Staff verify</a:t>
+              <a:t>Reference number</a:t>
             </a:r>
             <a:endParaRPr lang="en-US" sz="1550" dirty="0"/>
           </a:p>
@@ -4215,13 +5214,13 @@
       </p:sp>
       <p:sp>
         <p:nvSpPr>
-          <p:cNvPr id="50" name="After 3 text"/>
-          <p:cNvSpPr txBox="1"/>
-          <p:nvPr/>
-        </p:nvSpPr>
-        <p:spPr>
-          <a:xfrm>
-            <a:off x="6438748" y="5056632"/>
+          <p:cNvPr id="38" name="After 1 text"/>
+          <p:cNvSpPr txBox="1"/>
+          <p:nvPr/>
+        </p:nvSpPr>
+        <p:spPr>
+          <a:xfrm>
+            <a:off x="731520" y="5056632"/>
             <a:ext cx="2167814" cy="566928"/>
           </a:xfrm>
           <a:prstGeom prst="rect">
@@ -4234,7 +5233,7 @@
           <a:bodyPr wrap="square" lIns="0" tIns="0" rIns="0" bIns="0" rtlCol="0" anchor="t"/>
           <a:lstStyle/>
           <a:p>
-            <a:pPr indent="0" marL="0">
+            <a:pPr marL="0" indent="0">
               <a:buNone/>
             </a:pPr>
             <a:r>
@@ -4243,7 +5242,7 @@
                   <a:schemeClr val="tx2"/>
                 </a:solidFill>
               </a:rPr>
-              <a:t>Staff check the details. Who verified, and when, is recorded.</a:t>
+              <a:t>Shown at once (OLG-2026-…), with a confirmation slip the family can print.</a:t>
             </a:r>
             <a:endParaRPr lang="en-US" sz="1200" dirty="0"/>
           </a:p>
@@ -4251,13 +5250,13 @@
       </p:sp>
       <p:sp>
         <p:nvSpPr>
-          <p:cNvPr id="51" name="After 3 arrow"/>
+          <p:cNvPr id="39" name="After 1 arrow"/>
           <p:cNvSpPr/>
           <p:nvPr/>
         </p:nvSpPr>
         <p:spPr>
           <a:xfrm>
-            <a:off x="8862593" y="4869180"/>
+            <a:off x="3155366" y="4869180"/>
             <a:ext cx="173736" cy="274320"/>
           </a:xfrm>
           <a:prstGeom prst="chevron">
@@ -4276,13 +5275,13 @@
       </p:sp>
       <p:sp>
         <p:nvSpPr>
-          <p:cNvPr id="52" name="After 4 card"/>
+          <p:cNvPr id="40" name="After 2 card"/>
           <p:cNvSpPr/>
           <p:nvPr/>
         </p:nvSpPr>
         <p:spPr>
           <a:xfrm>
-            <a:off x="9109481" y="4343400"/>
+            <a:off x="3402254" y="4343400"/>
             <a:ext cx="2533574" cy="1325880"/>
           </a:xfrm>
           <a:prstGeom prst="roundRect">
@@ -4303,13 +5302,13 @@
       </p:sp>
       <p:sp>
         <p:nvSpPr>
-          <p:cNvPr id="53" name="After 4 icon circle"/>
+          <p:cNvPr id="41" name="After 2 icon circle"/>
           <p:cNvSpPr/>
           <p:nvPr/>
         </p:nvSpPr>
         <p:spPr>
           <a:xfrm>
-            <a:off x="9292361" y="4526280"/>
+            <a:off x="3585134" y="4526280"/>
             <a:ext cx="420624" cy="420624"/>
           </a:xfrm>
           <a:prstGeom prst="ellipse">
@@ -4328,7 +5327,7 @@
       </p:sp>
       <p:pic>
         <p:nvPicPr>
-          <p:cNvPr id="54" name="After 4 icon" descr="preencoded.png">    </p:cNvPr>
+          <p:cNvPr id="42" name="After 2 icon" descr="preencoded.png"/>
           <p:cNvPicPr>
             <a:picLocks noChangeAspect="1"/>
           </p:cNvPicPr>
@@ -4342,7 +5341,7 @@
         </p:blipFill>
         <p:spPr>
           <a:xfrm>
-            <a:off x="9402089" y="4636008"/>
+            <a:off x="3694862" y="4636008"/>
             <a:ext cx="201168" cy="201168"/>
           </a:xfrm>
           <a:prstGeom prst="rect">
@@ -4352,13 +5351,13 @@
       </p:pic>
       <p:sp>
         <p:nvSpPr>
-          <p:cNvPr id="55" name="After 4 heading"/>
-          <p:cNvSpPr txBox="1"/>
-          <p:nvPr/>
-        </p:nvSpPr>
-        <p:spPr>
-          <a:xfrm>
-            <a:off x="9841001" y="4526280"/>
+          <p:cNvPr id="43" name="After 2 heading"/>
+          <p:cNvSpPr txBox="1"/>
+          <p:nvPr/>
+        </p:nvSpPr>
+        <p:spPr>
+          <a:xfrm>
+            <a:off x="4133774" y="4526280"/>
             <a:ext cx="1619174" cy="420624"/>
           </a:xfrm>
           <a:prstGeom prst="rect">
@@ -4371,7 +5370,7 @@
           <a:bodyPr wrap="square" lIns="0" tIns="0" rIns="0" bIns="0" rtlCol="0" anchor="ctr"/>
           <a:lstStyle/>
           <a:p>
-            <a:pPr indent="0" marL="0">
+            <a:pPr marL="0" indent="0">
               <a:buNone/>
             </a:pPr>
             <a:r>
@@ -4380,7 +5379,7 @@
                   <a:schemeClr val="tx1"/>
                 </a:solidFill>
               </a:rPr>
-              <a:t>Status check</a:t>
+              <a:t>Office queue</a:t>
             </a:r>
             <a:endParaRPr lang="en-US" sz="1550" dirty="0"/>
           </a:p>
@@ -4388,13 +5387,13 @@
       </p:sp>
       <p:sp>
         <p:nvSpPr>
-          <p:cNvPr id="56" name="After 4 text"/>
-          <p:cNvSpPr txBox="1"/>
-          <p:nvPr/>
-        </p:nvSpPr>
-        <p:spPr>
-          <a:xfrm>
-            <a:off x="9292361" y="5056632"/>
+          <p:cNvPr id="44" name="After 2 text"/>
+          <p:cNvSpPr txBox="1"/>
+          <p:nvPr/>
+        </p:nvSpPr>
+        <p:spPr>
+          <a:xfrm>
+            <a:off x="3585134" y="5056632"/>
             <a:ext cx="2167814" cy="566928"/>
           </a:xfrm>
           <a:prstGeom prst="rect">
@@ -4407,7 +5406,7 @@
           <a:bodyPr wrap="square" lIns="0" tIns="0" rIns="0" bIns="0" rtlCol="0" anchor="t"/>
           <a:lstStyle/>
           <a:p>
-            <a:pPr indent="0" marL="0">
+            <a:pPr marL="0" indent="0">
               <a:buNone/>
             </a:pPr>
             <a:r>
@@ -4416,7 +5415,7 @@
                   <a:schemeClr val="tx2"/>
                 </a:solidFill>
               </a:rPr>
-              <a:t>With the reference number, the website shows Received or Verified.</a:t>
+              <a:t>The household appears on the staff dashboard as awaiting verification.</a:t>
             </a:r>
             <a:endParaRPr lang="en-US" sz="1200" dirty="0"/>
           </a:p>
@@ -4424,173 +5423,43 @@
       </p:sp>
       <p:sp>
         <p:nvSpPr>
-          <p:cNvPr id="57" name="Office entry note"/>
-          <p:cNvSpPr txBox="1"/>
-          <p:nvPr/>
-        </p:nvSpPr>
-        <p:spPr>
-          <a:xfrm>
-            <a:off x="548640" y="5879592"/>
-            <a:ext cx="11094415" cy="320040"/>
-          </a:xfrm>
-          <a:prstGeom prst="rect">
-            <a:avLst/>
-          </a:prstGeom>
-          <a:noFill/>
-          <a:ln/>
-        </p:spPr>
-        <p:txBody>
-          <a:bodyPr wrap="square" lIns="0" tIns="0" rIns="0" bIns="0" rtlCol="0" anchor="ctr"/>
-          <a:lstStyle/>
-          <a:p>
-            <a:pPr indent="0" marL="0">
-              <a:buNone/>
-            </a:pPr>
-            <a:r>
-              <a:rPr lang="en-US" sz="1300" b="1" dirty="0">
-                <a:solidFill>
-                  <a:schemeClr val="accent4"/>
-                </a:solidFill>
-              </a:rPr>
-              <a:t>No phone or internet?  </a:t>
-            </a:r>
-            <a:pPr indent="0" marL="0">
-              <a:buNone/>
-            </a:pPr>
-            <a:r>
-              <a:rPr lang="en-US" sz="1300" dirty="0">
-                <a:solidFill>
-                  <a:schemeClr val="tx2"/>
-                </a:solidFill>
-              </a:rPr>
-              <a:t>Staff can enter the household at the parish office using the same form.</a:t>
-            </a:r>
-            <a:endParaRPr lang="en-US" sz="1300" dirty="0"/>
-          </a:p>
-        </p:txBody>
-      </p:sp>
-      <p:sp>
-        <p:nvSpPr>
-          <p:cNvPr id="25" name="Slide Number Placeholder 0"/>
-          <p:cNvSpPr>
-            <a:spLocks noGrp="1"/>
-          </p:cNvSpPr>
-          <p:nvPr>
-            <p:ph type="sldNum" sz="quarter" idx="4294967295"/>
-          </p:nvPr>
-        </p:nvSpPr>
-        <p:spPr>
-          <a:xfrm>
-            <a:off x="11094415" y="6382512"/>
-            <a:ext cx="548640" cy="274320"/>
-          </a:xfrm>
-          <a:prstGeom prst="rect">
-            <a:avLst/>
-          </a:prstGeom>
-          <a:extLst>
-            <a:ext uri="{C572A759-6A51-4108-AA02-DFA0A04FC94B}">
-              <ma14:wrappingTextBoxFlag xmlns:ma14="http://schemas.microsoft.com/office/mac/drawingml/2011/main" val="0"/>
-            </a:ext>
-          </a:extLst>
-        </p:spPr>
-        <p:txBody>
-          <a:bodyPr/>
-          <a:lstStyle>
-            <a:lvl1pPr>
-              <a:defRPr sz="1050">
-                <a:solidFill>
-                  <a:schemeClr val="tx2"/>
-                </a:solidFill>
-              </a:defRPr>
-            </a:lvl1pPr>
-          </a:lstStyle>
-          <a:p>
-            <a:pPr algn="r"/>
-            <a:fld id="{F7021451-1387-4CA6-816F-3879F97B5CBC}" type="slidenum">
-              <a:rPr b="0" lang="en-US"/>
-              <a:t>3</a:t>
-            </a:fld>
-            <a:endParaRPr lang="en-US"/>
-          </a:p>
-        </p:txBody>
-      </p:sp>
-    </p:spTree>
-  </p:cSld>
-  <p:clrMapOvr>
-    <a:masterClrMapping/>
-  </p:clrMapOvr>
-</p:sld>
-</file>
-
-<file path=ppt/slides/slide4.xml><?xml version="1.0" encoding="utf-8"?>
-<p:sld xmlns:a="http://schemas.openxmlformats.org/drawingml/2006/main" xmlns:r="http://schemas.openxmlformats.org/officeDocument/2006/relationships" xmlns:p="http://schemas.openxmlformats.org/presentationml/2006/main">
-  <p:cSld name="Slide 4">
-    <p:spTree>
-      <p:nvGrpSpPr>
-        <p:cNvPr id="1" name=""/>
-        <p:cNvGrpSpPr/>
-        <p:nvPr/>
-      </p:nvGrpSpPr>
-      <p:grpSpPr>
-        <a:xfrm>
-          <a:off x="0" y="0"/>
-          <a:ext cx="0" cy="0"/>
-          <a:chOff x="0" y="0"/>
-          <a:chExt cx="0" cy="0"/>
-        </a:xfrm>
-      </p:grpSpPr>
-      <p:sp>
-        <p:nvSpPr>
-          <p:cNvPr id="2" name="Text 0"/>
+          <p:cNvPr id="45" name="After 2 arrow"/>
           <p:cNvSpPr/>
-          <p:nvPr>
-            <p:ph idx="100" type="title" hasCustomPrompt="1"/>
-          </p:nvPr>
-        </p:nvSpPr>
-        <p:spPr>
-          <a:xfrm>
-            <a:off x="548640" y="411480"/>
-            <a:ext cx="11094415" cy="777240"/>
-          </a:xfrm>
-          <a:prstGeom prst="rect">
-            <a:avLst/>
-          </a:prstGeom>
-          <a:noFill/>
-          <a:ln/>
-        </p:spPr>
-        <p:txBody>
-          <a:bodyPr wrap="square" lIns="0" tIns="0" rIns="0" bIns="0" rtlCol="0" anchor="ctr"/>
-          <a:lstStyle/>
-          <a:p>
-            <a:pPr algn="l" indent="0" marL="0">
-              <a:buNone/>
-            </a:pPr>
-            <a:r>
-              <a:rPr lang="en-US" sz="3400" b="1" dirty="0">
-                <a:solidFill>
-                  <a:schemeClr val="tx1"/>
-                </a:solidFill>
-              </a:rPr>
-              <a:t>How the parish census runs</a:t>
-            </a:r>
-            <a:endParaRPr lang="en-US" sz="3400" dirty="0"/>
-          </a:p>
-        </p:txBody>
-      </p:sp>
-      <p:sp>
-        <p:nvSpPr>
-          <p:cNvPr id="3" name="Census 1 card"/>
+          <p:nvPr/>
+        </p:nvSpPr>
+        <p:spPr>
+          <a:xfrm>
+            <a:off x="6008980" y="4869180"/>
+            <a:ext cx="173736" cy="274320"/>
+          </a:xfrm>
+          <a:prstGeom prst="chevron">
+            <a:avLst/>
+          </a:prstGeom>
+          <a:solidFill>
+            <a:schemeClr val="accent2"/>
+          </a:solidFill>
+          <a:ln w="12700">
+            <a:solidFill>
+              <a:schemeClr val="accent2"/>
+            </a:solidFill>
+            <a:prstDash val="solid"/>
+          </a:ln>
+        </p:spPr>
+      </p:sp>
+      <p:sp>
+        <p:nvSpPr>
+          <p:cNvPr id="46" name="After 3 card"/>
           <p:cNvSpPr/>
           <p:nvPr/>
         </p:nvSpPr>
         <p:spPr>
           <a:xfrm>
-            <a:off x="548640" y="1463040"/>
-            <a:ext cx="2377440" cy="2697480"/>
+            <a:off x="6255868" y="4343400"/>
+            <a:ext cx="2533574" cy="1325880"/>
           </a:xfrm>
           <a:prstGeom prst="roundRect">
             <a:avLst>
-              <a:gd name="adj" fmla="val 4615"/>
+              <a:gd name="adj" fmla="val 8276"/>
             </a:avLst>
           </a:prstGeom>
           <a:solidFill>
@@ -4606,807 +5475,32 @@
       </p:sp>
       <p:sp>
         <p:nvSpPr>
-          <p:cNvPr id="4" name="Census 1 dot"/>
+          <p:cNvPr id="47" name="After 3 icon circle"/>
           <p:cNvSpPr/>
           <p:nvPr/>
         </p:nvSpPr>
         <p:spPr>
           <a:xfrm>
-            <a:off x="749808" y="1664208"/>
+            <a:off x="6438748" y="4526280"/>
             <a:ext cx="420624" cy="420624"/>
           </a:xfrm>
           <a:prstGeom prst="ellipse">
             <a:avLst/>
           </a:prstGeom>
           <a:solidFill>
-            <a:schemeClr val="accent1"/>
+            <a:schemeClr val="accent3"/>
           </a:solidFill>
           <a:ln w="12700">
             <a:solidFill>
-              <a:schemeClr val="accent1"/>
+              <a:schemeClr val="accent3"/>
             </a:solidFill>
             <a:prstDash val="solid"/>
           </a:ln>
         </p:spPr>
       </p:sp>
-      <p:sp>
-        <p:nvSpPr>
-          <p:cNvPr id="5" name="Census 1 number"/>
-          <p:cNvSpPr txBox="1"/>
-          <p:nvPr/>
-        </p:nvSpPr>
-        <p:spPr>
-          <a:xfrm>
-            <a:off x="749808" y="1664208"/>
-            <a:ext cx="420624" cy="420624"/>
-          </a:xfrm>
-          <a:prstGeom prst="rect">
-            <a:avLst/>
-          </a:prstGeom>
-          <a:noFill/>
-          <a:ln/>
-        </p:spPr>
-        <p:txBody>
-          <a:bodyPr wrap="square" lIns="0" tIns="0" rIns="0" bIns="0" rtlCol="0" anchor="ctr"/>
-          <a:lstStyle/>
-          <a:p>
-            <a:pPr algn="ctr" indent="0" marL="0">
-              <a:buNone/>
-            </a:pPr>
-            <a:r>
-              <a:rPr lang="en-US" sz="1500" b="1" dirty="0">
-                <a:solidFill>
-                  <a:schemeClr val="bg1"/>
-                </a:solidFill>
-              </a:rPr>
-              <a:t>1</a:t>
-            </a:r>
-            <a:endParaRPr lang="en-US" sz="1500" dirty="0"/>
-          </a:p>
-        </p:txBody>
-      </p:sp>
       <p:pic>
         <p:nvPicPr>
-          <p:cNvPr id="6" name="Census 1 icon" descr="preencoded.png">    </p:cNvPr>
-          <p:cNvPicPr>
-            <a:picLocks noChangeAspect="1"/>
-          </p:cNvPicPr>
-          <p:nvPr/>
-        </p:nvPicPr>
-        <p:blipFill>
-          <a:blip r:embed="rId1"/>
-          <a:stretch>
-            <a:fillRect/>
-          </a:stretch>
-        </p:blipFill>
-        <p:spPr>
-          <a:xfrm>
-            <a:off x="2267712" y="1664208"/>
-            <a:ext cx="420624" cy="420624"/>
-          </a:xfrm>
-          <a:prstGeom prst="rect">
-            <a:avLst/>
-          </a:prstGeom>
-        </p:spPr>
-      </p:pic>
-      <p:sp>
-        <p:nvSpPr>
-          <p:cNvPr id="7" name="Census 1 heading"/>
-          <p:cNvSpPr txBox="1"/>
-          <p:nvPr/>
-        </p:nvSpPr>
-        <p:spPr>
-          <a:xfrm>
-            <a:off x="749808" y="2286000"/>
-            <a:ext cx="1975104" cy="365760"/>
-          </a:xfrm>
-          <a:prstGeom prst="rect">
-            <a:avLst/>
-          </a:prstGeom>
-          <a:noFill/>
-          <a:ln/>
-        </p:spPr>
-        <p:txBody>
-          <a:bodyPr wrap="square" lIns="0" tIns="0" rIns="0" bIns="0" rtlCol="0" anchor="t"/>
-          <a:lstStyle/>
-          <a:p>
-            <a:pPr indent="0" marL="0">
-              <a:buNone/>
-            </a:pPr>
-            <a:r>
-              <a:rPr lang="en-US" sz="1700" b="1" dirty="0">
-                <a:solidFill>
-                  <a:schemeClr val="tx1"/>
-                </a:solidFill>
-              </a:rPr>
-              <a:t>Staff start a census</a:t>
-            </a:r>
-            <a:endParaRPr lang="en-US" sz="1700" dirty="0"/>
-          </a:p>
-        </p:txBody>
-      </p:sp>
-      <p:sp>
-        <p:nvSpPr>
-          <p:cNvPr id="8" name="Census 1 text"/>
-          <p:cNvSpPr txBox="1"/>
-          <p:nvPr/>
-        </p:nvSpPr>
-        <p:spPr>
-          <a:xfrm>
-            <a:off x="749808" y="2761488"/>
-            <a:ext cx="1975104" cy="1234440"/>
-          </a:xfrm>
-          <a:prstGeom prst="rect">
-            <a:avLst/>
-          </a:prstGeom>
-          <a:noFill/>
-          <a:ln/>
-        </p:spPr>
-        <p:txBody>
-          <a:bodyPr wrap="square" lIns="0" tIns="0" rIns="0" bIns="0" rtlCol="0" anchor="t"/>
-          <a:lstStyle/>
-          <a:p>
-            <a:pPr indent="0" marL="0">
-              <a:buNone/>
-            </a:pPr>
-            <a:r>
-              <a:rPr lang="en-US" sz="1300" dirty="0">
-                <a:solidFill>
-                  <a:schemeClr val="tx2"/>
-                </a:solidFill>
-              </a:rPr>
-              <a:t>For example "2026 Census". The parish decides when: every year, every two years, or as needed.</a:t>
-            </a:r>
-            <a:endParaRPr lang="en-US" sz="1300" dirty="0"/>
-          </a:p>
-        </p:txBody>
-      </p:sp>
-      <p:sp>
-        <p:nvSpPr>
-          <p:cNvPr id="9" name="Census arrow 1"/>
-          <p:cNvSpPr/>
-          <p:nvPr/>
-        </p:nvSpPr>
-        <p:spPr>
-          <a:xfrm>
-            <a:off x="2999232" y="2674620"/>
-            <a:ext cx="173736" cy="274320"/>
-          </a:xfrm>
-          <a:prstGeom prst="chevron">
-            <a:avLst/>
-          </a:prstGeom>
-          <a:solidFill>
-            <a:schemeClr val="accent2"/>
-          </a:solidFill>
-          <a:ln w="12700">
-            <a:solidFill>
-              <a:schemeClr val="accent2"/>
-            </a:solidFill>
-            <a:prstDash val="solid"/>
-          </a:ln>
-        </p:spPr>
-      </p:sp>
-      <p:sp>
-        <p:nvSpPr>
-          <p:cNvPr id="10" name="Census 2 card"/>
-          <p:cNvSpPr/>
-          <p:nvPr/>
-        </p:nvSpPr>
-        <p:spPr>
-          <a:xfrm>
-            <a:off x="3246120" y="1463040"/>
-            <a:ext cx="2377440" cy="2697480"/>
-          </a:xfrm>
-          <a:prstGeom prst="roundRect">
-            <a:avLst>
-              <a:gd name="adj" fmla="val 4615"/>
-            </a:avLst>
-          </a:prstGeom>
-          <a:solidFill>
-            <a:schemeClr val="bg2"/>
-          </a:solidFill>
-          <a:ln w="12700">
-            <a:solidFill>
-              <a:schemeClr val="bg2"/>
-            </a:solidFill>
-            <a:prstDash val="solid"/>
-          </a:ln>
-        </p:spPr>
-      </p:sp>
-      <p:sp>
-        <p:nvSpPr>
-          <p:cNvPr id="11" name="Census 2 dot"/>
-          <p:cNvSpPr/>
-          <p:nvPr/>
-        </p:nvSpPr>
-        <p:spPr>
-          <a:xfrm>
-            <a:off x="3447288" y="1664208"/>
-            <a:ext cx="420624" cy="420624"/>
-          </a:xfrm>
-          <a:prstGeom prst="ellipse">
-            <a:avLst/>
-          </a:prstGeom>
-          <a:solidFill>
-            <a:schemeClr val="accent1"/>
-          </a:solidFill>
-          <a:ln w="12700">
-            <a:solidFill>
-              <a:schemeClr val="accent1"/>
-            </a:solidFill>
-            <a:prstDash val="solid"/>
-          </a:ln>
-        </p:spPr>
-      </p:sp>
-      <p:sp>
-        <p:nvSpPr>
-          <p:cNvPr id="12" name="Census 2 number"/>
-          <p:cNvSpPr txBox="1"/>
-          <p:nvPr/>
-        </p:nvSpPr>
-        <p:spPr>
-          <a:xfrm>
-            <a:off x="3447288" y="1664208"/>
-            <a:ext cx="420624" cy="420624"/>
-          </a:xfrm>
-          <a:prstGeom prst="rect">
-            <a:avLst/>
-          </a:prstGeom>
-          <a:noFill/>
-          <a:ln/>
-        </p:spPr>
-        <p:txBody>
-          <a:bodyPr wrap="square" lIns="0" tIns="0" rIns="0" bIns="0" rtlCol="0" anchor="ctr"/>
-          <a:lstStyle/>
-          <a:p>
-            <a:pPr algn="ctr" indent="0" marL="0">
-              <a:buNone/>
-            </a:pPr>
-            <a:r>
-              <a:rPr lang="en-US" sz="1500" b="1" dirty="0">
-                <a:solidFill>
-                  <a:schemeClr val="bg1"/>
-                </a:solidFill>
-              </a:rPr>
-              <a:t>2</a:t>
-            </a:r>
-            <a:endParaRPr lang="en-US" sz="1500" dirty="0"/>
-          </a:p>
-        </p:txBody>
-      </p:sp>
-      <p:pic>
-        <p:nvPicPr>
-          <p:cNvPr id="13" name="Census 2 icon" descr="preencoded.png">    </p:cNvPr>
-          <p:cNvPicPr>
-            <a:picLocks noChangeAspect="1"/>
-          </p:cNvPicPr>
-          <p:nvPr/>
-        </p:nvPicPr>
-        <p:blipFill>
-          <a:blip r:embed="rId2"/>
-          <a:stretch>
-            <a:fillRect/>
-          </a:stretch>
-        </p:blipFill>
-        <p:spPr>
-          <a:xfrm>
-            <a:off x="4965192" y="1664208"/>
-            <a:ext cx="420624" cy="420624"/>
-          </a:xfrm>
-          <a:prstGeom prst="rect">
-            <a:avLst/>
-          </a:prstGeom>
-        </p:spPr>
-      </p:pic>
-      <p:sp>
-        <p:nvSpPr>
-          <p:cNvPr id="14" name="Census 2 heading"/>
-          <p:cNvSpPr txBox="1"/>
-          <p:nvPr/>
-        </p:nvSpPr>
-        <p:spPr>
-          <a:xfrm>
-            <a:off x="3447288" y="2286000"/>
-            <a:ext cx="1975104" cy="365760"/>
-          </a:xfrm>
-          <a:prstGeom prst="rect">
-            <a:avLst/>
-          </a:prstGeom>
-          <a:noFill/>
-          <a:ln/>
-        </p:spPr>
-        <p:txBody>
-          <a:bodyPr wrap="square" lIns="0" tIns="0" rIns="0" bIns="0" rtlCol="0" anchor="t"/>
-          <a:lstStyle/>
-          <a:p>
-            <a:pPr indent="0" marL="0">
-              <a:buNone/>
-            </a:pPr>
-            <a:r>
-              <a:rPr lang="en-US" sz="1700" b="1" dirty="0">
-                <a:solidFill>
-                  <a:schemeClr val="tx1"/>
-                </a:solidFill>
-              </a:rPr>
-              <a:t>Print forms by GKK</a:t>
-            </a:r>
-            <a:endParaRPr lang="en-US" sz="1700" dirty="0"/>
-          </a:p>
-        </p:txBody>
-      </p:sp>
-      <p:sp>
-        <p:nvSpPr>
-          <p:cNvPr id="15" name="Census 2 text"/>
-          <p:cNvSpPr txBox="1"/>
-          <p:nvPr/>
-        </p:nvSpPr>
-        <p:spPr>
-          <a:xfrm>
-            <a:off x="3447288" y="2761488"/>
-            <a:ext cx="1975104" cy="1234440"/>
-          </a:xfrm>
-          <a:prstGeom prst="rect">
-            <a:avLst/>
-          </a:prstGeom>
-          <a:noFill/>
-          <a:ln/>
-        </p:spPr>
-        <p:txBody>
-          <a:bodyPr wrap="square" lIns="0" tIns="0" rIns="0" bIns="0" rtlCol="0" anchor="t"/>
-          <a:lstStyle/>
-          <a:p>
-            <a:pPr indent="0" marL="0">
-              <a:buNone/>
-            </a:pPr>
-            <a:r>
-              <a:rPr lang="en-US" sz="1300" dirty="0">
-                <a:solidFill>
-                  <a:schemeClr val="tx2"/>
-                </a:solidFill>
-              </a:rPr>
-              <a:t>One page per household, pre-filled with what is on file, plus the family’s access code for the online portal.</a:t>
-            </a:r>
-            <a:endParaRPr lang="en-US" sz="1300" dirty="0"/>
-          </a:p>
-        </p:txBody>
-      </p:sp>
-      <p:sp>
-        <p:nvSpPr>
-          <p:cNvPr id="16" name="Census arrow 2"/>
-          <p:cNvSpPr/>
-          <p:nvPr/>
-        </p:nvSpPr>
-        <p:spPr>
-          <a:xfrm>
-            <a:off x="5696712" y="2674620"/>
-            <a:ext cx="173736" cy="274320"/>
-          </a:xfrm>
-          <a:prstGeom prst="chevron">
-            <a:avLst/>
-          </a:prstGeom>
-          <a:solidFill>
-            <a:schemeClr val="accent2"/>
-          </a:solidFill>
-          <a:ln w="12700">
-            <a:solidFill>
-              <a:schemeClr val="accent2"/>
-            </a:solidFill>
-            <a:prstDash val="solid"/>
-          </a:ln>
-        </p:spPr>
-      </p:sp>
-      <p:sp>
-        <p:nvSpPr>
-          <p:cNvPr id="17" name="Census 3a card"/>
-          <p:cNvSpPr/>
-          <p:nvPr/>
-        </p:nvSpPr>
-        <p:spPr>
-          <a:xfrm>
-            <a:off x="5943600" y="1463040"/>
-            <a:ext cx="3001975" cy="1234440"/>
-          </a:xfrm>
-          <a:prstGeom prst="roundRect">
-            <a:avLst>
-              <a:gd name="adj" fmla="val 8889"/>
-            </a:avLst>
-          </a:prstGeom>
-          <a:solidFill>
-            <a:schemeClr val="bg2"/>
-          </a:solidFill>
-          <a:ln w="12700">
-            <a:solidFill>
-              <a:schemeClr val="bg2"/>
-            </a:solidFill>
-            <a:prstDash val="solid"/>
-          </a:ln>
-        </p:spPr>
-      </p:sp>
-      <p:sp>
-        <p:nvSpPr>
-          <p:cNvPr id="18" name="Census 3a icon circle"/>
-          <p:cNvSpPr/>
-          <p:nvPr/>
-        </p:nvSpPr>
-        <p:spPr>
-          <a:xfrm>
-            <a:off x="6126480" y="1645920"/>
-            <a:ext cx="420624" cy="420624"/>
-          </a:xfrm>
-          <a:prstGeom prst="ellipse">
-            <a:avLst/>
-          </a:prstGeom>
-          <a:solidFill>
-            <a:schemeClr val="accent2"/>
-          </a:solidFill>
-          <a:ln w="12700">
-            <a:solidFill>
-              <a:schemeClr val="accent2"/>
-            </a:solidFill>
-            <a:prstDash val="solid"/>
-          </a:ln>
-        </p:spPr>
-      </p:sp>
-      <p:pic>
-        <p:nvPicPr>
-          <p:cNvPr id="19" name="Census 3a icon" descr="preencoded.png">    </p:cNvPr>
-          <p:cNvPicPr>
-            <a:picLocks noChangeAspect="1"/>
-          </p:cNvPicPr>
-          <p:nvPr/>
-        </p:nvPicPr>
-        <p:blipFill>
-          <a:blip r:embed="rId3"/>
-          <a:stretch>
-            <a:fillRect/>
-          </a:stretch>
-        </p:blipFill>
-        <p:spPr>
-          <a:xfrm>
-            <a:off x="6236208" y="1755648"/>
-            <a:ext cx="201168" cy="201168"/>
-          </a:xfrm>
-          <a:prstGeom prst="rect">
-            <a:avLst/>
-          </a:prstGeom>
-        </p:spPr>
-      </p:pic>
-      <p:sp>
-        <p:nvSpPr>
-          <p:cNvPr id="20" name="Census 3a heading"/>
-          <p:cNvSpPr txBox="1"/>
-          <p:nvPr/>
-        </p:nvSpPr>
-        <p:spPr>
-          <a:xfrm>
-            <a:off x="6675120" y="1645920"/>
-            <a:ext cx="2087575" cy="420624"/>
-          </a:xfrm>
-          <a:prstGeom prst="rect">
-            <a:avLst/>
-          </a:prstGeom>
-          <a:noFill/>
-          <a:ln/>
-        </p:spPr>
-        <p:txBody>
-          <a:bodyPr wrap="square" lIns="0" tIns="0" rIns="0" bIns="0" rtlCol="0" anchor="ctr"/>
-          <a:lstStyle/>
-          <a:p>
-            <a:pPr indent="0" marL="0">
-              <a:buNone/>
-            </a:pPr>
-            <a:r>
-              <a:rPr lang="en-US" sz="1550" b="1" dirty="0">
-                <a:solidFill>
-                  <a:schemeClr val="tx1"/>
-                </a:solidFill>
-              </a:rPr>
-              <a:t>3a  On paper</a:t>
-            </a:r>
-            <a:endParaRPr lang="en-US" sz="1550" dirty="0"/>
-          </a:p>
-        </p:txBody>
-      </p:sp>
-      <p:sp>
-        <p:nvSpPr>
-          <p:cNvPr id="21" name="Census 3a text"/>
-          <p:cNvSpPr txBox="1"/>
-          <p:nvPr/>
-        </p:nvSpPr>
-        <p:spPr>
-          <a:xfrm>
-            <a:off x="6126480" y="2139696"/>
-            <a:ext cx="2636215" cy="466344"/>
-          </a:xfrm>
-          <a:prstGeom prst="rect">
-            <a:avLst/>
-          </a:prstGeom>
-          <a:noFill/>
-          <a:ln/>
-        </p:spPr>
-        <p:txBody>
-          <a:bodyPr wrap="square" lIns="0" tIns="0" rIns="0" bIns="0" rtlCol="0" anchor="t"/>
-          <a:lstStyle/>
-          <a:p>
-            <a:pPr indent="0" marL="0">
-              <a:buNone/>
-            </a:pPr>
-            <a:r>
-              <a:rPr lang="en-US" sz="1200" dirty="0">
-                <a:solidFill>
-                  <a:schemeClr val="tx2"/>
-                </a:solidFill>
-              </a:rPr>
-              <a:t>The family fills in the form. Staff record each member’s answers.</a:t>
-            </a:r>
-            <a:endParaRPr lang="en-US" sz="1200" dirty="0"/>
-          </a:p>
-        </p:txBody>
-      </p:sp>
-      <p:sp>
-        <p:nvSpPr>
-          <p:cNvPr id="22" name="Census 3b card"/>
-          <p:cNvSpPr/>
-          <p:nvPr/>
-        </p:nvSpPr>
-        <p:spPr>
-          <a:xfrm>
-            <a:off x="5943600" y="2926080"/>
-            <a:ext cx="3001975" cy="1234440"/>
-          </a:xfrm>
-          <a:prstGeom prst="roundRect">
-            <a:avLst>
-              <a:gd name="adj" fmla="val 8889"/>
-            </a:avLst>
-          </a:prstGeom>
-          <a:solidFill>
-            <a:schemeClr val="bg2"/>
-          </a:solidFill>
-          <a:ln w="12700">
-            <a:solidFill>
-              <a:schemeClr val="bg2"/>
-            </a:solidFill>
-            <a:prstDash val="solid"/>
-          </a:ln>
-        </p:spPr>
-      </p:sp>
-      <p:sp>
-        <p:nvSpPr>
-          <p:cNvPr id="23" name="Census 3b icon circle"/>
-          <p:cNvSpPr/>
-          <p:nvPr/>
-        </p:nvSpPr>
-        <p:spPr>
-          <a:xfrm>
-            <a:off x="6126480" y="3108960"/>
-            <a:ext cx="420624" cy="420624"/>
-          </a:xfrm>
-          <a:prstGeom prst="ellipse">
-            <a:avLst/>
-          </a:prstGeom>
-          <a:solidFill>
-            <a:schemeClr val="accent2"/>
-          </a:solidFill>
-          <a:ln w="12700">
-            <a:solidFill>
-              <a:schemeClr val="accent2"/>
-            </a:solidFill>
-            <a:prstDash val="solid"/>
-          </a:ln>
-        </p:spPr>
-      </p:sp>
-      <p:pic>
-        <p:nvPicPr>
-          <p:cNvPr id="24" name="Census 3b icon" descr="preencoded.png">    </p:cNvPr>
-          <p:cNvPicPr>
-            <a:picLocks noChangeAspect="1"/>
-          </p:cNvPicPr>
-          <p:nvPr/>
-        </p:nvPicPr>
-        <p:blipFill>
-          <a:blip r:embed="rId4"/>
-          <a:stretch>
-            <a:fillRect/>
-          </a:stretch>
-        </p:blipFill>
-        <p:spPr>
-          <a:xfrm>
-            <a:off x="6236208" y="3218688"/>
-            <a:ext cx="201168" cy="201168"/>
-          </a:xfrm>
-          <a:prstGeom prst="rect">
-            <a:avLst/>
-          </a:prstGeom>
-        </p:spPr>
-      </p:pic>
-      <p:sp>
-        <p:nvSpPr>
-          <p:cNvPr id="25" name="Census 3b heading"/>
-          <p:cNvSpPr txBox="1"/>
-          <p:nvPr/>
-        </p:nvSpPr>
-        <p:spPr>
-          <a:xfrm>
-            <a:off x="6675120" y="3108960"/>
-            <a:ext cx="2087575" cy="420624"/>
-          </a:xfrm>
-          <a:prstGeom prst="rect">
-            <a:avLst/>
-          </a:prstGeom>
-          <a:noFill/>
-          <a:ln/>
-        </p:spPr>
-        <p:txBody>
-          <a:bodyPr wrap="square" lIns="0" tIns="0" rIns="0" bIns="0" rtlCol="0" anchor="ctr"/>
-          <a:lstStyle/>
-          <a:p>
-            <a:pPr indent="0" marL="0">
-              <a:buNone/>
-            </a:pPr>
-            <a:r>
-              <a:rPr lang="en-US" sz="1550" b="1" dirty="0">
-                <a:solidFill>
-                  <a:schemeClr val="tx1"/>
-                </a:solidFill>
-              </a:rPr>
-              <a:t>3b  Online</a:t>
-            </a:r>
-            <a:endParaRPr lang="en-US" sz="1550" dirty="0"/>
-          </a:p>
-        </p:txBody>
-      </p:sp>
-      <p:sp>
-        <p:nvSpPr>
-          <p:cNvPr id="26" name="Census 3b text"/>
-          <p:cNvSpPr txBox="1"/>
-          <p:nvPr/>
-        </p:nvSpPr>
-        <p:spPr>
-          <a:xfrm>
-            <a:off x="6126480" y="3602736"/>
-            <a:ext cx="2636215" cy="466344"/>
-          </a:xfrm>
-          <a:prstGeom prst="rect">
-            <a:avLst/>
-          </a:prstGeom>
-          <a:noFill/>
-          <a:ln/>
-        </p:spPr>
-        <p:txBody>
-          <a:bodyPr wrap="square" lIns="0" tIns="0" rIns="0" bIns="0" rtlCol="0" anchor="t"/>
-          <a:lstStyle/>
-          <a:p>
-            <a:pPr indent="0" marL="0">
-              <a:buNone/>
-            </a:pPr>
-            <a:r>
-              <a:rPr lang="en-US" sz="1200" dirty="0">
-                <a:solidFill>
-                  <a:schemeClr val="tx2"/>
-                </a:solidFill>
-              </a:rPr>
-              <a:t>The family signs in with its reference number and code; staff approve.</a:t>
-            </a:r>
-            <a:endParaRPr lang="en-US" sz="1200" dirty="0"/>
-          </a:p>
-        </p:txBody>
-      </p:sp>
-      <p:sp>
-        <p:nvSpPr>
-          <p:cNvPr id="27" name="Census arrow 3"/>
-          <p:cNvSpPr/>
-          <p:nvPr/>
-        </p:nvSpPr>
-        <p:spPr>
-          <a:xfrm>
-            <a:off x="9018727" y="2674620"/>
-            <a:ext cx="173736" cy="274320"/>
-          </a:xfrm>
-          <a:prstGeom prst="chevron">
-            <a:avLst/>
-          </a:prstGeom>
-          <a:solidFill>
-            <a:schemeClr val="accent2"/>
-          </a:solidFill>
-          <a:ln w="12700">
-            <a:solidFill>
-              <a:schemeClr val="accent2"/>
-            </a:solidFill>
-            <a:prstDash val="solid"/>
-          </a:ln>
-        </p:spPr>
-      </p:sp>
-      <p:sp>
-        <p:nvSpPr>
-          <p:cNvPr id="28" name="Census 4 card"/>
-          <p:cNvSpPr/>
-          <p:nvPr/>
-        </p:nvSpPr>
-        <p:spPr>
-          <a:xfrm>
-            <a:off x="9265615" y="1463040"/>
-            <a:ext cx="2377440" cy="2697480"/>
-          </a:xfrm>
-          <a:prstGeom prst="roundRect">
-            <a:avLst>
-              <a:gd name="adj" fmla="val 4615"/>
-            </a:avLst>
-          </a:prstGeom>
-          <a:solidFill>
-            <a:schemeClr val="bg2"/>
-          </a:solidFill>
-          <a:ln w="12700">
-            <a:solidFill>
-              <a:schemeClr val="bg2"/>
-            </a:solidFill>
-            <a:prstDash val="solid"/>
-          </a:ln>
-        </p:spPr>
-      </p:sp>
-      <p:sp>
-        <p:nvSpPr>
-          <p:cNvPr id="29" name="Census 4 dot"/>
-          <p:cNvSpPr/>
-          <p:nvPr/>
-        </p:nvSpPr>
-        <p:spPr>
-          <a:xfrm>
-            <a:off x="9466783" y="1664208"/>
-            <a:ext cx="420624" cy="420624"/>
-          </a:xfrm>
-          <a:prstGeom prst="ellipse">
-            <a:avLst/>
-          </a:prstGeom>
-          <a:solidFill>
-            <a:schemeClr val="accent1"/>
-          </a:solidFill>
-          <a:ln w="12700">
-            <a:solidFill>
-              <a:schemeClr val="accent1"/>
-            </a:solidFill>
-            <a:prstDash val="solid"/>
-          </a:ln>
-        </p:spPr>
-      </p:sp>
-      <p:sp>
-        <p:nvSpPr>
-          <p:cNvPr id="30" name="Census 4 number"/>
-          <p:cNvSpPr txBox="1"/>
-          <p:nvPr/>
-        </p:nvSpPr>
-        <p:spPr>
-          <a:xfrm>
-            <a:off x="9466783" y="1664208"/>
-            <a:ext cx="420624" cy="420624"/>
-          </a:xfrm>
-          <a:prstGeom prst="rect">
-            <a:avLst/>
-          </a:prstGeom>
-          <a:noFill/>
-          <a:ln/>
-        </p:spPr>
-        <p:txBody>
-          <a:bodyPr wrap="square" lIns="0" tIns="0" rIns="0" bIns="0" rtlCol="0" anchor="ctr"/>
-          <a:lstStyle/>
-          <a:p>
-            <a:pPr algn="ctr" indent="0" marL="0">
-              <a:buNone/>
-            </a:pPr>
-            <a:r>
-              <a:rPr lang="en-US" sz="1500" b="1" dirty="0">
-                <a:solidFill>
-                  <a:schemeClr val="bg1"/>
-                </a:solidFill>
-              </a:rPr>
-              <a:t>4</a:t>
-            </a:r>
-            <a:endParaRPr lang="en-US" sz="1500" dirty="0"/>
-          </a:p>
-        </p:txBody>
-      </p:sp>
-      <p:pic>
-        <p:nvPicPr>
-          <p:cNvPr id="31" name="Census 4 icon" descr="preencoded.png">    </p:cNvPr>
+          <p:cNvPr id="48" name="After 3 icon" descr="preencoded.png"/>
           <p:cNvPicPr>
             <a:picLocks noChangeAspect="1"/>
           </p:cNvPicPr>
@@ -5420,8 +5514,8 @@
         </p:blipFill>
         <p:spPr>
           <a:xfrm>
-            <a:off x="10984687" y="1664208"/>
-            <a:ext cx="420624" cy="420624"/>
+            <a:off x="6548476" y="4636008"/>
+            <a:ext cx="201168" cy="201168"/>
           </a:xfrm>
           <a:prstGeom prst="rect">
             <a:avLst/>
@@ -5430,14 +5524,50 @@
       </p:pic>
       <p:sp>
         <p:nvSpPr>
-          <p:cNvPr id="32" name="Census 4 heading"/>
-          <p:cNvSpPr txBox="1"/>
-          <p:nvPr/>
-        </p:nvSpPr>
-        <p:spPr>
-          <a:xfrm>
-            <a:off x="9466783" y="2286000"/>
-            <a:ext cx="1975104" cy="365760"/>
+          <p:cNvPr id="49" name="After 3 heading"/>
+          <p:cNvSpPr txBox="1"/>
+          <p:nvPr/>
+        </p:nvSpPr>
+        <p:spPr>
+          <a:xfrm>
+            <a:off x="6987388" y="4526280"/>
+            <a:ext cx="1619174" cy="420624"/>
+          </a:xfrm>
+          <a:prstGeom prst="rect">
+            <a:avLst/>
+          </a:prstGeom>
+          <a:noFill/>
+          <a:ln/>
+        </p:spPr>
+        <p:txBody>
+          <a:bodyPr wrap="square" lIns="0" tIns="0" rIns="0" bIns="0" rtlCol="0" anchor="ctr"/>
+          <a:lstStyle/>
+          <a:p>
+            <a:pPr marL="0" indent="0">
+              <a:buNone/>
+            </a:pPr>
+            <a:r>
+              <a:rPr lang="en-US" sz="1550" b="1" dirty="0">
+                <a:solidFill>
+                  <a:schemeClr val="tx1"/>
+                </a:solidFill>
+              </a:rPr>
+              <a:t>Staff verify</a:t>
+            </a:r>
+            <a:endParaRPr lang="en-US" sz="1550" dirty="0"/>
+          </a:p>
+        </p:txBody>
+      </p:sp>
+      <p:sp>
+        <p:nvSpPr>
+          <p:cNvPr id="50" name="After 3 text"/>
+          <p:cNvSpPr txBox="1"/>
+          <p:nvPr/>
+        </p:nvSpPr>
+        <p:spPr>
+          <a:xfrm>
+            <a:off x="6438748" y="5056632"/>
+            <a:ext cx="2167814" cy="566928"/>
           </a:xfrm>
           <a:prstGeom prst="rect">
             <a:avLst/>
@@ -5449,79 +5579,41 @@
           <a:bodyPr wrap="square" lIns="0" tIns="0" rIns="0" bIns="0" rtlCol="0" anchor="t"/>
           <a:lstStyle/>
           <a:p>
-            <a:pPr indent="0" marL="0">
-              <a:buNone/>
-            </a:pPr>
-            <a:r>
-              <a:rPr lang="en-US" sz="1700" b="1" dirty="0">
-                <a:solidFill>
-                  <a:schemeClr val="tx1"/>
-                </a:solidFill>
-              </a:rPr>
-              <a:t>Close and see results</a:t>
-            </a:r>
-            <a:endParaRPr lang="en-US" sz="1700" dirty="0"/>
-          </a:p>
-        </p:txBody>
-      </p:sp>
-      <p:sp>
-        <p:nvSpPr>
-          <p:cNvPr id="33" name="Census 4 text"/>
-          <p:cNvSpPr txBox="1"/>
-          <p:nvPr/>
-        </p:nvSpPr>
-        <p:spPr>
-          <a:xfrm>
-            <a:off x="9466783" y="2761488"/>
-            <a:ext cx="1975104" cy="1234440"/>
-          </a:xfrm>
-          <a:prstGeom prst="rect">
-            <a:avLst/>
-          </a:prstGeom>
-          <a:noFill/>
-          <a:ln/>
-        </p:spPr>
-        <p:txBody>
-          <a:bodyPr wrap="square" lIns="0" tIns="0" rIns="0" bIns="0" rtlCol="0" anchor="t"/>
-          <a:lstStyle/>
-          <a:p>
-            <a:pPr indent="0" marL="0">
-              <a:buNone/>
-            </a:pPr>
-            <a:r>
-              <a:rPr lang="en-US" sz="1300" dirty="0">
+            <a:pPr marL="0" indent="0">
+              <a:buNone/>
+            </a:pPr>
+            <a:r>
+              <a:rPr lang="en-US" sz="1200" dirty="0">
                 <a:solidFill>
                   <a:schemeClr val="tx2"/>
                 </a:solidFill>
               </a:rPr>
-              <a:t>Results by GKK. Members nobody confirmed are listed for follow-up. Closing changes no data.</a:t>
-            </a:r>
-            <a:endParaRPr lang="en-US" sz="1300" dirty="0"/>
-          </a:p>
-        </p:txBody>
-      </p:sp>
-      <p:sp>
-        <p:nvSpPr>
-          <p:cNvPr id="34" name="Status band"/>
+              <a:t>Staff check the details. Who verified, and when, is recorded.</a:t>
+            </a:r>
+            <a:endParaRPr lang="en-US" sz="1200" dirty="0"/>
+          </a:p>
+        </p:txBody>
+      </p:sp>
+      <p:sp>
+        <p:nvSpPr>
+          <p:cNvPr id="51" name="After 3 arrow"/>
           <p:cNvSpPr/>
           <p:nvPr/>
         </p:nvSpPr>
         <p:spPr>
           <a:xfrm>
-            <a:off x="548640" y="4434840"/>
-            <a:ext cx="11094415" cy="960120"/>
-          </a:xfrm>
-          <a:prstGeom prst="roundRect">
-            <a:avLst>
-              <a:gd name="adj" fmla="val 11429"/>
-            </a:avLst>
-          </a:prstGeom>
-          <a:solidFill>
-            <a:schemeClr val="tx1"/>
+            <a:off x="8862593" y="4869180"/>
+            <a:ext cx="173736" cy="274320"/>
+          </a:xfrm>
+          <a:prstGeom prst="chevron">
+            <a:avLst/>
+          </a:prstGeom>
+          <a:solidFill>
+            <a:schemeClr val="accent2"/>
           </a:solidFill>
           <a:ln w="12700">
             <a:solidFill>
-              <a:schemeClr val="tx1"/>
+              <a:schemeClr val="accent2"/>
             </a:solidFill>
             <a:prstDash val="solid"/>
           </a:ln>
@@ -5529,62 +5621,26 @@
       </p:sp>
       <p:sp>
         <p:nvSpPr>
-          <p:cNvPr id="35" name="Status band label"/>
-          <p:cNvSpPr txBox="1"/>
-          <p:nvPr/>
-        </p:nvSpPr>
-        <p:spPr>
-          <a:xfrm>
-            <a:off x="822960" y="4434840"/>
-            <a:ext cx="2743200" cy="960120"/>
-          </a:xfrm>
-          <a:prstGeom prst="rect">
-            <a:avLst/>
-          </a:prstGeom>
-          <a:noFill/>
-          <a:ln/>
-        </p:spPr>
-        <p:txBody>
-          <a:bodyPr wrap="square" lIns="0" tIns="0" rIns="0" bIns="0" rtlCol="0" anchor="ctr"/>
-          <a:lstStyle/>
-          <a:p>
-            <a:pPr indent="0" marL="0">
-              <a:buNone/>
-            </a:pPr>
-            <a:r>
-              <a:rPr lang="en-US" sz="1600" b="1" dirty="0">
-                <a:solidFill>
-                  <a:schemeClr val="bg1"/>
-                </a:solidFill>
-              </a:rPr>
-              <a:t>Every member gets a status</a:t>
-            </a:r>
-            <a:endParaRPr lang="en-US" sz="1600" dirty="0"/>
-          </a:p>
-        </p:txBody>
-      </p:sp>
-      <p:sp>
-        <p:nvSpPr>
-          <p:cNvPr id="36" name="Status chip 1"/>
+          <p:cNvPr id="52" name="After 4 card"/>
           <p:cNvSpPr/>
           <p:nvPr/>
         </p:nvSpPr>
         <p:spPr>
           <a:xfrm>
-            <a:off x="3657600" y="4690872"/>
-            <a:ext cx="1410553" cy="457200"/>
+            <a:off x="9109481" y="4343400"/>
+            <a:ext cx="2533574" cy="1325880"/>
           </a:xfrm>
           <a:prstGeom prst="roundRect">
             <a:avLst>
-              <a:gd name="adj" fmla="val 50000"/>
+              <a:gd name="adj" fmla="val 8276"/>
             </a:avLst>
           </a:prstGeom>
           <a:solidFill>
-            <a:schemeClr val="bg1"/>
+            <a:schemeClr val="bg2"/>
           </a:solidFill>
           <a:ln w="12700">
             <a:solidFill>
-              <a:schemeClr val="bg1"/>
+              <a:schemeClr val="bg2"/>
             </a:solidFill>
             <a:prstDash val="solid"/>
           </a:ln>
@@ -5592,77 +5648,63 @@
       </p:sp>
       <p:sp>
         <p:nvSpPr>
-          <p:cNvPr id="37" name="Status chip 1 text"/>
-          <p:cNvSpPr txBox="1"/>
-          <p:nvPr/>
-        </p:nvSpPr>
-        <p:spPr>
-          <a:xfrm>
-            <a:off x="3657600" y="4690872"/>
-            <a:ext cx="1410553" cy="457200"/>
-          </a:xfrm>
-          <a:prstGeom prst="rect">
-            <a:avLst/>
-          </a:prstGeom>
-          <a:noFill/>
-          <a:ln/>
-        </p:spPr>
-        <p:txBody>
-          <a:bodyPr wrap="square" lIns="0" tIns="0" rIns="0" bIns="0" rtlCol="0" anchor="ctr"/>
-          <a:lstStyle/>
-          <a:p>
-            <a:pPr algn="ctr" indent="0" marL="0">
-              <a:buNone/>
-            </a:pPr>
-            <a:r>
-              <a:rPr lang="en-US" sz="1350" b="1" dirty="0">
-                <a:solidFill>
-                  <a:schemeClr val="tx1"/>
-                </a:solidFill>
-              </a:rPr>
-              <a:t>Active</a:t>
-            </a:r>
-            <a:endParaRPr lang="en-US" sz="1350" dirty="0"/>
-          </a:p>
-        </p:txBody>
-      </p:sp>
-      <p:sp>
-        <p:nvSpPr>
-          <p:cNvPr id="38" name="Status chip 2"/>
+          <p:cNvPr id="53" name="After 4 icon circle"/>
           <p:cNvSpPr/>
           <p:nvPr/>
         </p:nvSpPr>
         <p:spPr>
           <a:xfrm>
-            <a:off x="5232745" y="4690872"/>
-            <a:ext cx="1410553" cy="457200"/>
-          </a:xfrm>
-          <a:prstGeom prst="roundRect">
-            <a:avLst>
-              <a:gd name="adj" fmla="val 50000"/>
-            </a:avLst>
-          </a:prstGeom>
-          <a:solidFill>
-            <a:schemeClr val="bg1"/>
+            <a:off x="9292361" y="4526280"/>
+            <a:ext cx="420624" cy="420624"/>
+          </a:xfrm>
+          <a:prstGeom prst="ellipse">
+            <a:avLst/>
+          </a:prstGeom>
+          <a:solidFill>
+            <a:schemeClr val="accent1"/>
           </a:solidFill>
           <a:ln w="12700">
             <a:solidFill>
-              <a:schemeClr val="bg1"/>
+              <a:schemeClr val="accent1"/>
             </a:solidFill>
             <a:prstDash val="solid"/>
           </a:ln>
         </p:spPr>
       </p:sp>
-      <p:sp>
-        <p:nvSpPr>
-          <p:cNvPr id="39" name="Status chip 2 text"/>
-          <p:cNvSpPr txBox="1"/>
-          <p:nvPr/>
-        </p:nvSpPr>
-        <p:spPr>
-          <a:xfrm>
-            <a:off x="5232745" y="4690872"/>
-            <a:ext cx="1410553" cy="457200"/>
+      <p:pic>
+        <p:nvPicPr>
+          <p:cNvPr id="54" name="After 4 icon" descr="preencoded.png"/>
+          <p:cNvPicPr>
+            <a:picLocks noChangeAspect="1"/>
+          </p:cNvPicPr>
+          <p:nvPr/>
+        </p:nvPicPr>
+        <p:blipFill>
+          <a:blip r:embed="rId6"/>
+          <a:stretch>
+            <a:fillRect/>
+          </a:stretch>
+        </p:blipFill>
+        <p:spPr>
+          <a:xfrm>
+            <a:off x="9402089" y="4636008"/>
+            <a:ext cx="201168" cy="201168"/>
+          </a:xfrm>
+          <a:prstGeom prst="rect">
+            <a:avLst/>
+          </a:prstGeom>
+        </p:spPr>
+      </p:pic>
+      <p:sp>
+        <p:nvSpPr>
+          <p:cNvPr id="55" name="After 4 heading"/>
+          <p:cNvSpPr txBox="1"/>
+          <p:nvPr/>
+        </p:nvSpPr>
+        <p:spPr>
+          <a:xfrm>
+            <a:off x="9841001" y="4526280"/>
+            <a:ext cx="1619174" cy="420624"/>
           </a:xfrm>
           <a:prstGeom prst="rect">
             <a:avLst/>
@@ -5674,58 +5716,67 @@
           <a:bodyPr wrap="square" lIns="0" tIns="0" rIns="0" bIns="0" rtlCol="0" anchor="ctr"/>
           <a:lstStyle/>
           <a:p>
-            <a:pPr algn="ctr" indent="0" marL="0">
-              <a:buNone/>
-            </a:pPr>
-            <a:r>
-              <a:rPr lang="en-US" sz="1350" b="1" dirty="0">
+            <a:pPr marL="0" indent="0">
+              <a:buNone/>
+            </a:pPr>
+            <a:r>
+              <a:rPr lang="en-US" sz="1550" b="1" dirty="0">
                 <a:solidFill>
                   <a:schemeClr val="tx1"/>
                 </a:solidFill>
               </a:rPr>
-              <a:t>Inactive</a:t>
-            </a:r>
-            <a:endParaRPr lang="en-US" sz="1350" dirty="0"/>
-          </a:p>
-        </p:txBody>
-      </p:sp>
-      <p:sp>
-        <p:nvSpPr>
-          <p:cNvPr id="40" name="Status chip 3"/>
-          <p:cNvSpPr/>
-          <p:nvPr/>
-        </p:nvSpPr>
-        <p:spPr>
-          <a:xfrm>
-            <a:off x="6807891" y="4690872"/>
-            <a:ext cx="1410553" cy="457200"/>
-          </a:xfrm>
-          <a:prstGeom prst="roundRect">
-            <a:avLst>
-              <a:gd name="adj" fmla="val 50000"/>
-            </a:avLst>
-          </a:prstGeom>
-          <a:solidFill>
-            <a:schemeClr val="bg1"/>
-          </a:solidFill>
-          <a:ln w="12700">
-            <a:solidFill>
-              <a:schemeClr val="bg1"/>
-            </a:solidFill>
-            <a:prstDash val="solid"/>
-          </a:ln>
-        </p:spPr>
-      </p:sp>
-      <p:sp>
-        <p:nvSpPr>
-          <p:cNvPr id="41" name="Status chip 3 text"/>
-          <p:cNvSpPr txBox="1"/>
-          <p:nvPr/>
-        </p:nvSpPr>
-        <p:spPr>
-          <a:xfrm>
-            <a:off x="6807891" y="4690872"/>
-            <a:ext cx="1410553" cy="457200"/>
+              <a:t>Status check</a:t>
+            </a:r>
+            <a:endParaRPr lang="en-US" sz="1550" dirty="0"/>
+          </a:p>
+        </p:txBody>
+      </p:sp>
+      <p:sp>
+        <p:nvSpPr>
+          <p:cNvPr id="56" name="After 4 text"/>
+          <p:cNvSpPr txBox="1"/>
+          <p:nvPr/>
+        </p:nvSpPr>
+        <p:spPr>
+          <a:xfrm>
+            <a:off x="9292361" y="5056632"/>
+            <a:ext cx="2167814" cy="566928"/>
+          </a:xfrm>
+          <a:prstGeom prst="rect">
+            <a:avLst/>
+          </a:prstGeom>
+          <a:noFill/>
+          <a:ln/>
+        </p:spPr>
+        <p:txBody>
+          <a:bodyPr wrap="square" lIns="0" tIns="0" rIns="0" bIns="0" rtlCol="0" anchor="t"/>
+          <a:lstStyle/>
+          <a:p>
+            <a:pPr marL="0" indent="0">
+              <a:buNone/>
+            </a:pPr>
+            <a:r>
+              <a:rPr lang="en-US" sz="1200" dirty="0">
+                <a:solidFill>
+                  <a:schemeClr val="tx2"/>
+                </a:solidFill>
+              </a:rPr>
+              <a:t>With the reference number, the website shows Received or Verified.</a:t>
+            </a:r>
+            <a:endParaRPr lang="en-US" sz="1200" dirty="0"/>
+          </a:p>
+        </p:txBody>
+      </p:sp>
+      <p:sp>
+        <p:nvSpPr>
+          <p:cNvPr id="57" name="Office entry note"/>
+          <p:cNvSpPr txBox="1"/>
+          <p:nvPr/>
+        </p:nvSpPr>
+        <p:spPr>
+          <a:xfrm>
+            <a:off x="548640" y="5879592"/>
+            <a:ext cx="11094415" cy="320040"/>
           </a:xfrm>
           <a:prstGeom prst="rect">
             <a:avLst/>
@@ -5737,169 +5788,7 @@
           <a:bodyPr wrap="square" lIns="0" tIns="0" rIns="0" bIns="0" rtlCol="0" anchor="ctr"/>
           <a:lstStyle/>
           <a:p>
-            <a:pPr algn="ctr" indent="0" marL="0">
-              <a:buNone/>
-            </a:pPr>
-            <a:r>
-              <a:rPr lang="en-US" sz="1350" b="1" dirty="0">
-                <a:solidFill>
-                  <a:schemeClr val="tx1"/>
-                </a:solidFill>
-              </a:rPr>
-              <a:t>Moved away</a:t>
-            </a:r>
-            <a:endParaRPr lang="en-US" sz="1350" dirty="0"/>
-          </a:p>
-        </p:txBody>
-      </p:sp>
-      <p:sp>
-        <p:nvSpPr>
-          <p:cNvPr id="42" name="Status chip 4"/>
-          <p:cNvSpPr/>
-          <p:nvPr/>
-        </p:nvSpPr>
-        <p:spPr>
-          <a:xfrm>
-            <a:off x="8383036" y="4690872"/>
-            <a:ext cx="1410553" cy="457200"/>
-          </a:xfrm>
-          <a:prstGeom prst="roundRect">
-            <a:avLst>
-              <a:gd name="adj" fmla="val 50000"/>
-            </a:avLst>
-          </a:prstGeom>
-          <a:solidFill>
-            <a:schemeClr val="bg1"/>
-          </a:solidFill>
-          <a:ln w="12700">
-            <a:solidFill>
-              <a:schemeClr val="bg1"/>
-            </a:solidFill>
-            <a:prstDash val="solid"/>
-          </a:ln>
-        </p:spPr>
-      </p:sp>
-      <p:sp>
-        <p:nvSpPr>
-          <p:cNvPr id="43" name="Status chip 4 text"/>
-          <p:cNvSpPr txBox="1"/>
-          <p:nvPr/>
-        </p:nvSpPr>
-        <p:spPr>
-          <a:xfrm>
-            <a:off x="8383036" y="4690872"/>
-            <a:ext cx="1410553" cy="457200"/>
-          </a:xfrm>
-          <a:prstGeom prst="rect">
-            <a:avLst/>
-          </a:prstGeom>
-          <a:noFill/>
-          <a:ln/>
-        </p:spPr>
-        <p:txBody>
-          <a:bodyPr wrap="square" lIns="0" tIns="0" rIns="0" bIns="0" rtlCol="0" anchor="ctr"/>
-          <a:lstStyle/>
-          <a:p>
-            <a:pPr algn="ctr" indent="0" marL="0">
-              <a:buNone/>
-            </a:pPr>
-            <a:r>
-              <a:rPr lang="en-US" sz="1350" b="1" dirty="0">
-                <a:solidFill>
-                  <a:schemeClr val="tx1"/>
-                </a:solidFill>
-              </a:rPr>
-              <a:t>Deceased</a:t>
-            </a:r>
-            <a:endParaRPr lang="en-US" sz="1350" dirty="0"/>
-          </a:p>
-        </p:txBody>
-      </p:sp>
-      <p:sp>
-        <p:nvSpPr>
-          <p:cNvPr id="44" name="Status chip 5"/>
-          <p:cNvSpPr/>
-          <p:nvPr/>
-        </p:nvSpPr>
-        <p:spPr>
-          <a:xfrm>
-            <a:off x="9958182" y="4690872"/>
-            <a:ext cx="1410553" cy="457200"/>
-          </a:xfrm>
-          <a:prstGeom prst="roundRect">
-            <a:avLst>
-              <a:gd name="adj" fmla="val 50000"/>
-            </a:avLst>
-          </a:prstGeom>
-          <a:solidFill>
-            <a:schemeClr val="bg1"/>
-          </a:solidFill>
-          <a:ln w="12700">
-            <a:solidFill>
-              <a:schemeClr val="bg1"/>
-            </a:solidFill>
-            <a:prstDash val="solid"/>
-          </a:ln>
-        </p:spPr>
-      </p:sp>
-      <p:sp>
-        <p:nvSpPr>
-          <p:cNvPr id="45" name="Status chip 5 text"/>
-          <p:cNvSpPr txBox="1"/>
-          <p:nvPr/>
-        </p:nvSpPr>
-        <p:spPr>
-          <a:xfrm>
-            <a:off x="9958182" y="4690872"/>
-            <a:ext cx="1410553" cy="457200"/>
-          </a:xfrm>
-          <a:prstGeom prst="rect">
-            <a:avLst/>
-          </a:prstGeom>
-          <a:noFill/>
-          <a:ln/>
-        </p:spPr>
-        <p:txBody>
-          <a:bodyPr wrap="square" lIns="0" tIns="0" rIns="0" bIns="0" rtlCol="0" anchor="ctr"/>
-          <a:lstStyle/>
-          <a:p>
-            <a:pPr algn="ctr" indent="0" marL="0">
-              <a:buNone/>
-            </a:pPr>
-            <a:r>
-              <a:rPr lang="en-US" sz="1350" b="1" dirty="0">
-                <a:solidFill>
-                  <a:schemeClr val="tx1"/>
-                </a:solidFill>
-              </a:rPr>
-              <a:t>Left the Church</a:t>
-            </a:r>
-            <a:endParaRPr lang="en-US" sz="1350" dirty="0"/>
-          </a:p>
-        </p:txBody>
-      </p:sp>
-      <p:sp>
-        <p:nvSpPr>
-          <p:cNvPr id="46" name="Safeguards note"/>
-          <p:cNvSpPr txBox="1"/>
-          <p:nvPr/>
-        </p:nvSpPr>
-        <p:spPr>
-          <a:xfrm>
-            <a:off x="548640" y="5669280"/>
-            <a:ext cx="11094415" cy="502920"/>
-          </a:xfrm>
-          <a:prstGeom prst="rect">
-            <a:avLst/>
-          </a:prstGeom>
-          <a:noFill/>
-          <a:ln/>
-        </p:spPr>
-        <p:txBody>
-          <a:bodyPr wrap="square" lIns="0" tIns="0" rIns="0" bIns="0" rtlCol="0" anchor="t"/>
-          <a:lstStyle/>
-          <a:p>
-            <a:pPr indent="0" marL="0">
+            <a:pPr marL="0" indent="0">
               <a:buNone/>
             </a:pPr>
             <a:r>
@@ -5908,18 +5797,15 @@
                   <a:schemeClr val="accent4"/>
                 </a:solidFill>
               </a:rPr>
-              <a:t>Safeguards:  </a:t>
-            </a:r>
-            <a:pPr indent="0" marL="0">
-              <a:buNone/>
-            </a:pPr>
+              <a:t>No phone or internet?  </a:t>
+            </a:r>
             <a:r>
               <a:rPr lang="en-US" sz="1300" dirty="0">
                 <a:solidFill>
                   <a:schemeClr val="tx2"/>
                 </a:solidFill>
               </a:rPr>
-              <a:t>nothing changes in the registry until staff save or approve  ·  five wrong codes lock a household’s sign-in for 15 minutes  ·  a lost form gets a new code</a:t>
+              <a:t>Staff can enter the household at the parish office using the same form.</a:t>
             </a:r>
             <a:endParaRPr lang="en-US" sz="1300" dirty="0"/>
           </a:p>
@@ -5927,7 +5813,7 @@
       </p:sp>
       <p:sp>
         <p:nvSpPr>
-          <p:cNvPr id="25" name="Slide Number Placeholder 0"/>
+          <p:cNvPr id="58" name="Slide Number Placeholder 0"/>
           <p:cNvSpPr>
             <a:spLocks noGrp="1"/>
           </p:cNvSpPr>
@@ -5945,7 +5831,7 @@
           </a:prstGeom>
           <a:extLst>
             <a:ext uri="{C572A759-6A51-4108-AA02-DFA0A04FC94B}">
-              <ma14:wrappingTextBoxFlag xmlns:ma14="http://schemas.microsoft.com/office/mac/drawingml/2011/main" val="0"/>
+              <ma14:wrappingTextBoxFlag xmlns:ma14="http://schemas.microsoft.com/office/mac/drawingml/2011/main" xmlns="" val="0"/>
             </a:ext>
           </a:extLst>
         </p:spPr>
@@ -5963,7 +5849,7 @@
           <a:p>
             <a:pPr algn="r"/>
             <a:fld id="{F7021451-1387-4CA6-816F-3879F97B5CBC}" type="slidenum">
-              <a:rPr b="0" lang="en-US"/>
+              <a:rPr lang="en-US" b="0"/>
               <a:t>4</a:t>
             </a:fld>
             <a:endParaRPr lang="en-US"/>
@@ -5998,9 +5884,11 @@
       <p:sp>
         <p:nvSpPr>
           <p:cNvPr id="2" name="Text 0"/>
-          <p:cNvSpPr/>
+          <p:cNvSpPr>
+            <a:spLocks noGrp="1"/>
+          </p:cNvSpPr>
           <p:nvPr>
-            <p:ph idx="100" type="title" hasCustomPrompt="1"/>
+            <p:ph type="title" idx="100" hasCustomPrompt="1"/>
           </p:nvPr>
         </p:nvSpPr>
         <p:spPr>
@@ -6018,7 +5906,7 @@
           <a:bodyPr wrap="square" lIns="0" tIns="0" rIns="0" bIns="0" rtlCol="0" anchor="ctr"/>
           <a:lstStyle/>
           <a:p>
-            <a:pPr algn="l" indent="0" marL="0">
+            <a:pPr marL="0" indent="0" algn="l">
               <a:buNone/>
             </a:pPr>
             <a:r>
@@ -6087,14 +5975,14 @@
       </p:sp>
       <p:pic>
         <p:nvPicPr>
-          <p:cNvPr id="5" name="Supabase Free icon" descr="preencoded.png">    </p:cNvPr>
+          <p:cNvPr id="5" name="Supabase Free icon" descr="preencoded.png"/>
           <p:cNvPicPr>
             <a:picLocks noChangeAspect="1"/>
           </p:cNvPicPr>
           <p:nvPr/>
         </p:nvPicPr>
         <p:blipFill>
-          <a:blip r:embed="rId1"/>
+          <a:blip r:embed="rId3"/>
           <a:stretch>
             <a:fillRect/>
           </a:stretch>
@@ -6130,7 +6018,7 @@
           <a:bodyPr wrap="square" lIns="0" tIns="0" rIns="0" bIns="0" rtlCol="0" anchor="ctr"/>
           <a:lstStyle/>
           <a:p>
-            <a:pPr indent="0" marL="0">
+            <a:pPr marL="0" indent="0">
               <a:buNone/>
             </a:pPr>
             <a:r>
@@ -6141,9 +6029,6 @@
               </a:rPr>
               <a:t>Supabase Free</a:t>
             </a:r>
-            <a:pPr indent="0" marL="0">
-              <a:buNone/>
-            </a:pPr>
             <a:r>
               <a:rPr lang="en-US" sz="1300" dirty="0">
                 <a:solidFill>
@@ -6204,7 +6089,7 @@
           <a:bodyPr wrap="square" lIns="0" tIns="0" rIns="0" bIns="0" rtlCol="0" anchor="ctr"/>
           <a:lstStyle/>
           <a:p>
-            <a:pPr indent="0" marL="0">
+            <a:pPr marL="0" indent="0">
               <a:buNone/>
             </a:pPr>
             <a:r>
@@ -6240,7 +6125,7 @@
           <a:bodyPr wrap="square" lIns="0" tIns="0" rIns="0" bIns="0" rtlCol="0" anchor="t"/>
           <a:lstStyle/>
           <a:p>
-            <a:pPr indent="0" marL="0">
+            <a:pPr marL="0" indent="0">
               <a:buNone/>
             </a:pPr>
             <a:r>
@@ -6303,7 +6188,7 @@
           <a:bodyPr wrap="square" lIns="0" tIns="0" rIns="0" bIns="0" rtlCol="0" anchor="ctr"/>
           <a:lstStyle/>
           <a:p>
-            <a:pPr algn="ctr" indent="0" marL="0">
+            <a:pPr marL="0" indent="0" algn="ctr">
               <a:buNone/>
             </a:pPr>
             <a:r>
@@ -6366,7 +6251,7 @@
           <a:bodyPr wrap="square" lIns="0" tIns="0" rIns="0" bIns="0" rtlCol="0" anchor="ctr"/>
           <a:lstStyle/>
           <a:p>
-            <a:pPr indent="0" marL="0">
+            <a:pPr marL="0" indent="0">
               <a:buNone/>
             </a:pPr>
             <a:r>
@@ -6402,7 +6287,7 @@
           <a:bodyPr wrap="square" lIns="0" tIns="0" rIns="0" bIns="0" rtlCol="0" anchor="t"/>
           <a:lstStyle/>
           <a:p>
-            <a:pPr indent="0" marL="0">
+            <a:pPr marL="0" indent="0">
               <a:buNone/>
             </a:pPr>
             <a:r>
@@ -6465,7 +6350,7 @@
           <a:bodyPr wrap="square" lIns="0" tIns="0" rIns="0" bIns="0" rtlCol="0" anchor="ctr"/>
           <a:lstStyle/>
           <a:p>
-            <a:pPr algn="ctr" indent="0" marL="0">
+            <a:pPr marL="0" indent="0" algn="ctr">
               <a:buNone/>
             </a:pPr>
             <a:r>
@@ -6528,7 +6413,7 @@
           <a:bodyPr wrap="square" lIns="0" tIns="0" rIns="0" bIns="0" rtlCol="0" anchor="ctr"/>
           <a:lstStyle/>
           <a:p>
-            <a:pPr indent="0" marL="0">
+            <a:pPr marL="0" indent="0">
               <a:buNone/>
             </a:pPr>
             <a:r>
@@ -6564,7 +6449,7 @@
           <a:bodyPr wrap="square" lIns="0" tIns="0" rIns="0" bIns="0" rtlCol="0" anchor="t"/>
           <a:lstStyle/>
           <a:p>
-            <a:pPr indent="0" marL="0">
+            <a:pPr marL="0" indent="0">
               <a:buNone/>
             </a:pPr>
             <a:r>
@@ -6627,7 +6512,7 @@
           <a:bodyPr wrap="square" lIns="0" tIns="0" rIns="0" bIns="0" rtlCol="0" anchor="ctr"/>
           <a:lstStyle/>
           <a:p>
-            <a:pPr algn="ctr" indent="0" marL="0">
+            <a:pPr marL="0" indent="0" algn="ctr">
               <a:buNone/>
             </a:pPr>
             <a:r>
@@ -6690,7 +6575,7 @@
           <a:bodyPr wrap="square" lIns="0" tIns="0" rIns="0" bIns="0" rtlCol="0" anchor="ctr"/>
           <a:lstStyle/>
           <a:p>
-            <a:pPr indent="0" marL="0">
+            <a:pPr marL="0" indent="0">
               <a:buNone/>
             </a:pPr>
             <a:r>
@@ -6726,7 +6611,7 @@
           <a:bodyPr wrap="square" lIns="0" tIns="0" rIns="0" bIns="0" rtlCol="0" anchor="t"/>
           <a:lstStyle/>
           <a:p>
-            <a:pPr indent="0" marL="0">
+            <a:pPr marL="0" indent="0">
               <a:buNone/>
             </a:pPr>
             <a:r>
@@ -6789,7 +6674,7 @@
           <a:bodyPr wrap="square" lIns="0" tIns="0" rIns="0" bIns="0" rtlCol="0" anchor="ctr"/>
           <a:lstStyle/>
           <a:p>
-            <a:pPr algn="ctr" indent="0" marL="0">
+            <a:pPr marL="0" indent="0" algn="ctr">
               <a:buNone/>
             </a:pPr>
             <a:r>
@@ -6858,14 +6743,14 @@
       </p:sp>
       <p:pic>
         <p:nvPicPr>
-          <p:cNvPr id="29" name="Vercel Hobby icon" descr="preencoded.png">    </p:cNvPr>
+          <p:cNvPr id="29" name="Vercel Hobby icon" descr="preencoded.png"/>
           <p:cNvPicPr>
             <a:picLocks noChangeAspect="1"/>
           </p:cNvPicPr>
           <p:nvPr/>
         </p:nvPicPr>
         <p:blipFill>
-          <a:blip r:embed="rId2"/>
+          <a:blip r:embed="rId4"/>
           <a:stretch>
             <a:fillRect/>
           </a:stretch>
@@ -6901,7 +6786,7 @@
           <a:bodyPr wrap="square" lIns="0" tIns="0" rIns="0" bIns="0" rtlCol="0" anchor="ctr"/>
           <a:lstStyle/>
           <a:p>
-            <a:pPr indent="0" marL="0">
+            <a:pPr marL="0" indent="0">
               <a:buNone/>
             </a:pPr>
             <a:r>
@@ -6912,9 +6797,6 @@
               </a:rPr>
               <a:t>Vercel Hobby</a:t>
             </a:r>
-            <a:pPr indent="0" marL="0">
-              <a:buNone/>
-            </a:pPr>
             <a:r>
               <a:rPr lang="en-US" sz="1300" dirty="0">
                 <a:solidFill>
@@ -6975,7 +6857,7 @@
           <a:bodyPr wrap="square" lIns="0" tIns="0" rIns="0" bIns="0" rtlCol="0" anchor="ctr"/>
           <a:lstStyle/>
           <a:p>
-            <a:pPr indent="0" marL="0">
+            <a:pPr marL="0" indent="0">
               <a:buNone/>
             </a:pPr>
             <a:r>
@@ -7011,7 +6893,7 @@
           <a:bodyPr wrap="square" lIns="0" tIns="0" rIns="0" bIns="0" rtlCol="0" anchor="t"/>
           <a:lstStyle/>
           <a:p>
-            <a:pPr indent="0" marL="0">
+            <a:pPr marL="0" indent="0">
               <a:buNone/>
             </a:pPr>
             <a:r>
@@ -7074,7 +6956,7 @@
           <a:bodyPr wrap="square" lIns="0" tIns="0" rIns="0" bIns="0" rtlCol="0" anchor="ctr"/>
           <a:lstStyle/>
           <a:p>
-            <a:pPr algn="ctr" indent="0" marL="0">
+            <a:pPr marL="0" indent="0" algn="ctr">
               <a:buNone/>
             </a:pPr>
             <a:r>
@@ -7137,7 +7019,7 @@
           <a:bodyPr wrap="square" lIns="0" tIns="0" rIns="0" bIns="0" rtlCol="0" anchor="ctr"/>
           <a:lstStyle/>
           <a:p>
-            <a:pPr indent="0" marL="0">
+            <a:pPr marL="0" indent="0">
               <a:buNone/>
             </a:pPr>
             <a:r>
@@ -7173,7 +7055,7 @@
           <a:bodyPr wrap="square" lIns="0" tIns="0" rIns="0" bIns="0" rtlCol="0" anchor="t"/>
           <a:lstStyle/>
           <a:p>
-            <a:pPr indent="0" marL="0">
+            <a:pPr marL="0" indent="0">
               <a:buNone/>
             </a:pPr>
             <a:r>
@@ -7236,7 +7118,7 @@
           <a:bodyPr wrap="square" lIns="0" tIns="0" rIns="0" bIns="0" rtlCol="0" anchor="ctr"/>
           <a:lstStyle/>
           <a:p>
-            <a:pPr algn="ctr" indent="0" marL="0">
+            <a:pPr marL="0" indent="0" algn="ctr">
               <a:buNone/>
             </a:pPr>
             <a:r>
@@ -7299,7 +7181,7 @@
           <a:bodyPr wrap="square" lIns="0" tIns="0" rIns="0" bIns="0" rtlCol="0" anchor="ctr"/>
           <a:lstStyle/>
           <a:p>
-            <a:pPr indent="0" marL="0">
+            <a:pPr marL="0" indent="0">
               <a:buNone/>
             </a:pPr>
             <a:r>
@@ -7335,7 +7217,7 @@
           <a:bodyPr wrap="square" lIns="0" tIns="0" rIns="0" bIns="0" rtlCol="0" anchor="t"/>
           <a:lstStyle/>
           <a:p>
-            <a:pPr indent="0" marL="0">
+            <a:pPr marL="0" indent="0">
               <a:buNone/>
             </a:pPr>
             <a:r>
@@ -7398,7 +7280,7 @@
           <a:bodyPr wrap="square" lIns="0" tIns="0" rIns="0" bIns="0" rtlCol="0" anchor="ctr"/>
           <a:lstStyle/>
           <a:p>
-            <a:pPr algn="ctr" indent="0" marL="0">
+            <a:pPr marL="0" indent="0" algn="ctr">
               <a:buNone/>
             </a:pPr>
             <a:r>
@@ -7461,7 +7343,7 @@
           <a:bodyPr wrap="square" lIns="0" tIns="0" rIns="0" bIns="0" rtlCol="0" anchor="ctr"/>
           <a:lstStyle/>
           <a:p>
-            <a:pPr indent="0" marL="0">
+            <a:pPr marL="0" indent="0">
               <a:buNone/>
             </a:pPr>
             <a:r>
@@ -7497,7 +7379,7 @@
           <a:bodyPr wrap="square" lIns="0" tIns="0" rIns="0" bIns="0" rtlCol="0" anchor="t"/>
           <a:lstStyle/>
           <a:p>
-            <a:pPr indent="0" marL="0">
+            <a:pPr marL="0" indent="0">
               <a:buNone/>
             </a:pPr>
             <a:r>
@@ -7560,7 +7442,7 @@
           <a:bodyPr wrap="square" lIns="0" tIns="0" rIns="0" bIns="0" rtlCol="0" anchor="ctr"/>
           <a:lstStyle/>
           <a:p>
-            <a:pPr algn="ctr" indent="0" marL="0">
+            <a:pPr marL="0" indent="0" algn="ctr">
               <a:buNone/>
             </a:pPr>
             <a:r>
@@ -7596,7 +7478,7 @@
           <a:bodyPr wrap="square" lIns="0" tIns="0" rIns="0" bIns="0" rtlCol="0" anchor="ctr"/>
           <a:lstStyle/>
           <a:p>
-            <a:pPr indent="0" marL="0">
+            <a:pPr marL="0" indent="0">
               <a:buNone/>
             </a:pPr>
             <a:r>
@@ -7607,9 +7489,6 @@
               </a:rPr>
               <a:t>If the parish outgrows free:  </a:t>
             </a:r>
-            <a:pPr indent="0" marL="0">
-              <a:buNone/>
-            </a:pPr>
             <a:r>
               <a:rPr lang="en-US" sz="1300" dirty="0">
                 <a:solidFill>
@@ -7643,7 +7522,7 @@
           <a:bodyPr wrap="square" lIns="0" tIns="0" rIns="0" bIns="0" rtlCol="0" anchor="ctr"/>
           <a:lstStyle/>
           <a:p>
-            <a:pPr indent="0" marL="0">
+            <a:pPr marL="0" indent="0">
               <a:buNone/>
             </a:pPr>
             <a:r>
@@ -7660,7 +7539,7 @@
       </p:sp>
       <p:sp>
         <p:nvSpPr>
-          <p:cNvPr id="25" name="Slide Number Placeholder 0"/>
+          <p:cNvPr id="53" name="Slide Number Placeholder 0"/>
           <p:cNvSpPr>
             <a:spLocks noGrp="1"/>
           </p:cNvSpPr>
@@ -7678,7 +7557,7 @@
           </a:prstGeom>
           <a:extLst>
             <a:ext uri="{C572A759-6A51-4108-AA02-DFA0A04FC94B}">
-              <ma14:wrappingTextBoxFlag xmlns:ma14="http://schemas.microsoft.com/office/mac/drawingml/2011/main" val="0"/>
+              <ma14:wrappingTextBoxFlag xmlns:ma14="http://schemas.microsoft.com/office/mac/drawingml/2011/main" xmlns="" val="0"/>
             </a:ext>
           </a:extLst>
         </p:spPr>
@@ -7696,7 +7575,7 @@
           <a:p>
             <a:pPr algn="r"/>
             <a:fld id="{F7021451-1387-4CA6-816F-3879F97B5CBC}" type="slidenum">
-              <a:rPr b="0" lang="en-US"/>
+              <a:rPr lang="en-US" b="0"/>
               <a:t>5</a:t>
             </a:fld>
             <a:endParaRPr lang="en-US"/>
@@ -8004,4 +7883,319 @@
     </a:ext>
   </a:extLst>
 </a:theme>
+</file>
+
+<file path=ppt/theme/theme2.xml><?xml version="1.0" encoding="utf-8"?>
+<a:theme xmlns:a="http://schemas.openxmlformats.org/drawingml/2006/main" name="Office Theme">
+  <a:themeElements>
+    <a:clrScheme name="Office">
+      <a:dk1>
+        <a:sysClr val="windowText" lastClr="000000"/>
+      </a:dk1>
+      <a:lt1>
+        <a:sysClr val="window" lastClr="FFFFFF"/>
+      </a:lt1>
+      <a:dk2>
+        <a:srgbClr val="0E2841"/>
+      </a:dk2>
+      <a:lt2>
+        <a:srgbClr val="E8E8E8"/>
+      </a:lt2>
+      <a:accent1>
+        <a:srgbClr val="156082"/>
+      </a:accent1>
+      <a:accent2>
+        <a:srgbClr val="E97132"/>
+      </a:accent2>
+      <a:accent3>
+        <a:srgbClr val="196B24"/>
+      </a:accent3>
+      <a:accent4>
+        <a:srgbClr val="0F9ED5"/>
+      </a:accent4>
+      <a:accent5>
+        <a:srgbClr val="A02B93"/>
+      </a:accent5>
+      <a:accent6>
+        <a:srgbClr val="4EA72E"/>
+      </a:accent6>
+      <a:hlink>
+        <a:srgbClr val="467886"/>
+      </a:hlink>
+      <a:folHlink>
+        <a:srgbClr val="96607D"/>
+      </a:folHlink>
+    </a:clrScheme>
+    <a:fontScheme name="Office">
+      <a:majorFont>
+        <a:latin typeface="Aptos Display" panose="02110004020202020204"/>
+        <a:ea typeface=""/>
+        <a:cs typeface=""/>
+        <a:font script="Jpan" typeface="游ゴシック Light"/>
+        <a:font script="Hang" typeface="맑은 고딕"/>
+        <a:font script="Hans" typeface="等线 Light"/>
+        <a:font script="Hant" typeface="新細明體"/>
+        <a:font script="Arab" typeface="Times New Roman"/>
+        <a:font script="Hebr" typeface="Times New Roman"/>
+        <a:font script="Thai" typeface="Angsana New"/>
+        <a:font script="Ethi" typeface="Nyala"/>
+        <a:font script="Beng" typeface="Vrinda"/>
+        <a:font script="Gujr" typeface="Shruti"/>
+        <a:font script="Khmr" typeface="MoolBoran"/>
+        <a:font script="Knda" typeface="Tunga"/>
+        <a:font script="Guru" typeface="Raavi"/>
+        <a:font script="Cans" typeface="Euphemia"/>
+        <a:font script="Cher" typeface="Plantagenet Cherokee"/>
+        <a:font script="Yiii" typeface="Microsoft Yi Baiti"/>
+        <a:font script="Tibt" typeface="Microsoft Himalaya"/>
+        <a:font script="Thaa" typeface="MV Boli"/>
+        <a:font script="Deva" typeface="Mangal"/>
+        <a:font script="Telu" typeface="Gautami"/>
+        <a:font script="Taml" typeface="Latha"/>
+        <a:font script="Syrc" typeface="Estrangelo Edessa"/>
+        <a:font script="Orya" typeface="Kalinga"/>
+        <a:font script="Mlym" typeface="Kartika"/>
+        <a:font script="Laoo" typeface="DokChampa"/>
+        <a:font script="Sinh" typeface="Iskoola Pota"/>
+        <a:font script="Mong" typeface="Mongolian Baiti"/>
+        <a:font script="Viet" typeface="Times New Roman"/>
+        <a:font script="Uigh" typeface="Microsoft Uighur"/>
+        <a:font script="Geor" typeface="Sylfaen"/>
+        <a:font script="Armn" typeface="Arial"/>
+        <a:font script="Bugi" typeface="Leelawadee UI"/>
+        <a:font script="Bopo" typeface="Microsoft JhengHei"/>
+        <a:font script="Java" typeface="Javanese Text"/>
+        <a:font script="Lisu" typeface="Segoe UI"/>
+        <a:font script="Mymr" typeface="Myanmar Text"/>
+        <a:font script="Nkoo" typeface="Ebrima"/>
+        <a:font script="Olck" typeface="Nirmala UI"/>
+        <a:font script="Osma" typeface="Ebrima"/>
+        <a:font script="Phag" typeface="Phagspa"/>
+        <a:font script="Syrn" typeface="Estrangelo Edessa"/>
+        <a:font script="Syrj" typeface="Estrangelo Edessa"/>
+        <a:font script="Syre" typeface="Estrangelo Edessa"/>
+        <a:font script="Sora" typeface="Nirmala UI"/>
+        <a:font script="Tale" typeface="Microsoft Tai Le"/>
+        <a:font script="Talu" typeface="Microsoft New Tai Lue"/>
+        <a:font script="Tfng" typeface="Ebrima"/>
+      </a:majorFont>
+      <a:minorFont>
+        <a:latin typeface="Aptos" panose="02110004020202020204"/>
+        <a:ea typeface=""/>
+        <a:cs typeface=""/>
+        <a:font script="Jpan" typeface="游ゴシック"/>
+        <a:font script="Hang" typeface="맑은 고딕"/>
+        <a:font script="Hans" typeface="等线"/>
+        <a:font script="Hant" typeface="新細明體"/>
+        <a:font script="Arab" typeface="Arial"/>
+        <a:font script="Hebr" typeface="Arial"/>
+        <a:font script="Thai" typeface="Cordia New"/>
+        <a:font script="Ethi" typeface="Nyala"/>
+        <a:font script="Beng" typeface="Vrinda"/>
+        <a:font script="Gujr" typeface="Shruti"/>
+        <a:font script="Khmr" typeface="DaunPenh"/>
+        <a:font script="Knda" typeface="Tunga"/>
+        <a:font script="Guru" typeface="Raavi"/>
+        <a:font script="Cans" typeface="Euphemia"/>
+        <a:font script="Cher" typeface="Plantagenet Cherokee"/>
+        <a:font script="Yiii" typeface="Microsoft Yi Baiti"/>
+        <a:font script="Tibt" typeface="Microsoft Himalaya"/>
+        <a:font script="Thaa" typeface="MV Boli"/>
+        <a:font script="Deva" typeface="Mangal"/>
+        <a:font script="Telu" typeface="Gautami"/>
+        <a:font script="Taml" typeface="Latha"/>
+        <a:font script="Syrc" typeface="Estrangelo Edessa"/>
+        <a:font script="Orya" typeface="Kalinga"/>
+        <a:font script="Mlym" typeface="Kartika"/>
+        <a:font script="Laoo" typeface="DokChampa"/>
+        <a:font script="Sinh" typeface="Iskoola Pota"/>
+        <a:font script="Mong" typeface="Mongolian Baiti"/>
+        <a:font script="Viet" typeface="Arial"/>
+        <a:font script="Uigh" typeface="Microsoft Uighur"/>
+        <a:font script="Geor" typeface="Sylfaen"/>
+        <a:font script="Armn" typeface="Arial"/>
+        <a:font script="Bugi" typeface="Leelawadee UI"/>
+        <a:font script="Bopo" typeface="Microsoft JhengHei"/>
+        <a:font script="Java" typeface="Javanese Text"/>
+        <a:font script="Lisu" typeface="Segoe UI"/>
+        <a:font script="Mymr" typeface="Myanmar Text"/>
+        <a:font script="Nkoo" typeface="Ebrima"/>
+        <a:font script="Olck" typeface="Nirmala UI"/>
+        <a:font script="Osma" typeface="Ebrima"/>
+        <a:font script="Phag" typeface="Phagspa"/>
+        <a:font script="Syrn" typeface="Estrangelo Edessa"/>
+        <a:font script="Syrj" typeface="Estrangelo Edessa"/>
+        <a:font script="Syre" typeface="Estrangelo Edessa"/>
+        <a:font script="Sora" typeface="Nirmala UI"/>
+        <a:font script="Tale" typeface="Microsoft Tai Le"/>
+        <a:font script="Talu" typeface="Microsoft New Tai Lue"/>
+        <a:font script="Tfng" typeface="Ebrima"/>
+      </a:minorFont>
+    </a:fontScheme>
+    <a:fmtScheme name="Office">
+      <a:fillStyleLst>
+        <a:solidFill>
+          <a:schemeClr val="phClr"/>
+        </a:solidFill>
+        <a:gradFill rotWithShape="1">
+          <a:gsLst>
+            <a:gs pos="0">
+              <a:schemeClr val="phClr">
+                <a:lumMod val="110000"/>
+                <a:satMod val="105000"/>
+                <a:tint val="67000"/>
+              </a:schemeClr>
+            </a:gs>
+            <a:gs pos="50000">
+              <a:schemeClr val="phClr">
+                <a:lumMod val="105000"/>
+                <a:satMod val="103000"/>
+                <a:tint val="73000"/>
+              </a:schemeClr>
+            </a:gs>
+            <a:gs pos="100000">
+              <a:schemeClr val="phClr">
+                <a:lumMod val="105000"/>
+                <a:satMod val="109000"/>
+                <a:tint val="81000"/>
+              </a:schemeClr>
+            </a:gs>
+          </a:gsLst>
+          <a:lin ang="5400000" scaled="0"/>
+        </a:gradFill>
+        <a:gradFill rotWithShape="1">
+          <a:gsLst>
+            <a:gs pos="0">
+              <a:schemeClr val="phClr">
+                <a:satMod val="103000"/>
+                <a:lumMod val="102000"/>
+                <a:tint val="94000"/>
+              </a:schemeClr>
+            </a:gs>
+            <a:gs pos="50000">
+              <a:schemeClr val="phClr">
+                <a:satMod val="110000"/>
+                <a:lumMod val="100000"/>
+                <a:shade val="100000"/>
+              </a:schemeClr>
+            </a:gs>
+            <a:gs pos="100000">
+              <a:schemeClr val="phClr">
+                <a:lumMod val="99000"/>
+                <a:satMod val="120000"/>
+                <a:shade val="78000"/>
+              </a:schemeClr>
+            </a:gs>
+          </a:gsLst>
+          <a:lin ang="5400000" scaled="0"/>
+        </a:gradFill>
+      </a:fillStyleLst>
+      <a:lnStyleLst>
+        <a:ln w="12700" cap="flat" cmpd="sng" algn="ctr">
+          <a:solidFill>
+            <a:schemeClr val="phClr"/>
+          </a:solidFill>
+          <a:prstDash val="solid"/>
+          <a:miter lim="800000"/>
+        </a:ln>
+        <a:ln w="19050" cap="flat" cmpd="sng" algn="ctr">
+          <a:solidFill>
+            <a:schemeClr val="phClr"/>
+          </a:solidFill>
+          <a:prstDash val="solid"/>
+          <a:miter lim="800000"/>
+        </a:ln>
+        <a:ln w="25400" cap="flat" cmpd="sng" algn="ctr">
+          <a:solidFill>
+            <a:schemeClr val="phClr"/>
+          </a:solidFill>
+          <a:prstDash val="solid"/>
+          <a:miter lim="800000"/>
+        </a:ln>
+      </a:lnStyleLst>
+      <a:effectStyleLst>
+        <a:effectStyle>
+          <a:effectLst/>
+        </a:effectStyle>
+        <a:effectStyle>
+          <a:effectLst/>
+        </a:effectStyle>
+        <a:effectStyle>
+          <a:effectLst>
+            <a:outerShdw blurRad="57150" dist="19050" dir="5400000" algn="ctr" rotWithShape="0">
+              <a:srgbClr val="000000">
+                <a:alpha val="63000"/>
+              </a:srgbClr>
+            </a:outerShdw>
+          </a:effectLst>
+        </a:effectStyle>
+      </a:effectStyleLst>
+      <a:bgFillStyleLst>
+        <a:solidFill>
+          <a:schemeClr val="phClr"/>
+        </a:solidFill>
+        <a:solidFill>
+          <a:schemeClr val="phClr">
+            <a:tint val="95000"/>
+            <a:satMod val="170000"/>
+          </a:schemeClr>
+        </a:solidFill>
+        <a:gradFill rotWithShape="1">
+          <a:gsLst>
+            <a:gs pos="0">
+              <a:schemeClr val="phClr">
+                <a:tint val="93000"/>
+                <a:satMod val="150000"/>
+                <a:shade val="98000"/>
+                <a:lumMod val="102000"/>
+              </a:schemeClr>
+            </a:gs>
+            <a:gs pos="50000">
+              <a:schemeClr val="phClr">
+                <a:tint val="98000"/>
+                <a:satMod val="130000"/>
+                <a:shade val="90000"/>
+                <a:lumMod val="103000"/>
+              </a:schemeClr>
+            </a:gs>
+            <a:gs pos="100000">
+              <a:schemeClr val="phClr">
+                <a:shade val="63000"/>
+                <a:satMod val="120000"/>
+              </a:schemeClr>
+            </a:gs>
+          </a:gsLst>
+          <a:lin ang="5400000" scaled="0"/>
+        </a:gradFill>
+      </a:bgFillStyleLst>
+    </a:fmtScheme>
+  </a:themeElements>
+  <a:objectDefaults>
+    <a:lnDef>
+      <a:spPr/>
+      <a:bodyPr/>
+      <a:lstStyle/>
+      <a:style>
+        <a:lnRef idx="2">
+          <a:schemeClr val="accent1"/>
+        </a:lnRef>
+        <a:fillRef idx="0">
+          <a:schemeClr val="accent1"/>
+        </a:fillRef>
+        <a:effectRef idx="1">
+          <a:schemeClr val="accent1"/>
+        </a:effectRef>
+        <a:fontRef idx="minor">
+          <a:schemeClr val="tx1"/>
+        </a:fontRef>
+      </a:style>
+    </a:lnDef>
+  </a:objectDefaults>
+  <a:extraClrSchemeLst/>
+  <a:extLst>
+    <a:ext uri="{05A4C25C-085E-4340-85A3-A5531E510DB2}">
+      <thm15:themeFamily xmlns:thm15="http://schemas.microsoft.com/office/thememl/2012/main" name="Office Theme" id="{2E142A2C-CD16-42D6-873A-C26D2A0506FA}" vid="{1BDDFF52-6CD6-40A5-AB3C-68EB2F1E4D0A}"/>
+    </a:ext>
+  </a:extLst>
+</a:theme>
 </file>